--- a/수행평가_안내.pptx
+++ b/수행평가_안내.pptx
@@ -13,9 +13,11 @@
     <p:sldId id="261" r:id="rId7"/>
     <p:sldId id="262" r:id="rId8"/>
     <p:sldId id="263" r:id="rId9"/>
+    <p:sldId id="264" r:id="rId10"/>
+    <p:sldId id="265" r:id="rId11"/>
   </p:sldIdLst>
   <p:notesMasterIdLst>
-    <p:notesMasterId r:id="rId10"/>
+    <p:notesMasterId r:id="rId12"/>
   </p:notesMasterIdLst>
   <p:sldSz cx="12192000" cy="6858000"/>
   <p:notesSz cx="6858000" cy="12192000"/>
@@ -114,36 +116,34 @@
   <p:extLst>
     <p:ext uri="{521415D9-36F7-43E2-AB2F-B90AF26B5E84}">
       <p14:sectionLst xmlns:p14="http://schemas.microsoft.com/office/powerpoint/2010/main">
-        <p14:section name="표지" id="{3cbaf801-abac-1527-fd01-76b739a11c84}">
+        <p14:section name="표지" id="{816b477a-2b11-9cbd-35c3-952cfc58f339}">
           <p14:sldIdLst>
             <p14:sldId id="256"/>
           </p14:sldIdLst>
         </p14:section>
-        <p14:section name="평가 개요" id="{d0448d43-f2e4-7efd-369c-660e19219ee3}">
+        <p14:section name="평가 개요" id="{c80f311d-9e3b-f57a-8d0e-998409530e2d}">
           <p14:sldIdLst>
             <p14:sldId id="257"/>
             <p14:sldId id="258"/>
-          </p14:sldIdLst>
-        </p14:section>
-        <p14:section name="진행 방법" id="{f7c60dd2-5d70-f722-1604-84c6effc2630}">
-          <p14:sldIdLst>
             <p14:sldId id="259"/>
           </p14:sldIdLst>
         </p14:section>
-        <p14:section name="평가 기준" id="{b5a2807c-1e4f-4a90-188b-c9e46b68c806}">
+        <p14:section name="작성 규칙" id="{37b4cd18-78e8-1cbe-28a2-22f6086bc2e4}">
           <p14:sldIdLst>
             <p14:sldId id="260"/>
             <p14:sldId id="261"/>
           </p14:sldIdLst>
         </p14:section>
-        <p14:section name="유의사항" id="{273c3ed7-fd93-5786-67d7-7d0cd0587c2b}">
+        <p14:section name="채점 기준" id="{e44c61aa-fe28-ebb6-7ea3-a9c8078ad103}">
           <p14:sldIdLst>
             <p14:sldId id="262"/>
+            <p14:sldId id="263"/>
+            <p14:sldId id="264"/>
           </p14:sldIdLst>
         </p14:section>
-        <p14:section name="마무리" id="{ba5fed97-c9bd-0e49-1a12-c02eba8dbbd7}">
+        <p14:section name="마무리" id="{9b996b95-24e2-0836-d2bc-4c2a25b66799}">
           <p14:sldIdLst>
-            <p14:sldId id="263"/>
+            <p14:sldId id="265"/>
           </p14:sldIdLst>
         </p14:section>
       </p14:sectionLst>
@@ -550,7 +550,7 @@
           <a:p>
             <a:r>
               <a:rPr lang="en-US" dirty="0"/>
-              <a:t>수행평가 전체 안내. 평가 일정과 기준은 학교 계획에 맞게 수정하세요.</a:t>
+              <a:t>2학기 수행평가: 희망표현 〜たいです를 활용한 일본 여행 버킷리스트 작성(7점) + 인터뷰 말하기(5점).</a:t>
             </a:r>
             <a:endParaRPr lang="en-US" dirty="0"/>
           </a:p>
@@ -574,6 +574,94 @@
             <a:fld id="{F7021451-1387-4CA6-816F-3879F97B5CBC}" type="slidenum">
               <a:rPr lang="en-US"/>
               <a:t>1</a:t>
+            </a:fld>
+            <a:endParaRPr lang="en-US"/>
+          </a:p>
+        </p:txBody>
+      </p:sp>
+    </p:spTree>
+    <p:extLst>
+      <p:ext uri="{BB962C8B-B14F-4D97-AF65-F5344CB8AC3E}">
+        <p14:creationId xmlns:p14="http://schemas.microsoft.com/office/powerpoint/2010/main" val="1024086991"/>
+      </p:ext>
+    </p:extLst>
+  </p:cSld>
+  <p:clrMapOvr>
+    <a:masterClrMapping/>
+  </p:clrMapOvr>
+</p:notes>
+</file>
+
+<file path=ppt/notesSlides/notesSlide10.xml><?xml version="1.0" encoding="utf-8"?>
+<p:notes xmlns:a="http://schemas.openxmlformats.org/drawingml/2006/main" xmlns:r="http://schemas.openxmlformats.org/officeDocument/2006/relationships" xmlns:p="http://schemas.openxmlformats.org/presentationml/2006/main">
+  <p:cSld>
+    <p:spTree>
+      <p:nvGrpSpPr>
+        <p:cNvPr id="1" name=""/>
+        <p:cNvGrpSpPr/>
+        <p:nvPr/>
+      </p:nvGrpSpPr>
+      <p:grpSpPr>
+        <a:xfrm>
+          <a:off x="0" y="0"/>
+          <a:ext cx="0" cy="0"/>
+          <a:chOff x="0" y="0"/>
+          <a:chExt cx="0" cy="0"/>
+        </a:xfrm>
+      </p:grpSpPr>
+      <p:sp>
+        <p:nvSpPr>
+          <p:cNvPr id="2" name="Slide Image Placeholder 1"/>
+          <p:cNvSpPr>
+            <a:spLocks noGrp="1" noRot="1" noChangeAspect="1"/>
+          </p:cNvSpPr>
+          <p:nvPr>
+            <p:ph type="sldImg"/>
+          </p:nvPr>
+        </p:nvSpPr>
+        <p:spPr/>
+      </p:sp>
+      <p:sp>
+        <p:nvSpPr>
+          <p:cNvPr id="3" name="Notes Placeholder 2"/>
+          <p:cNvSpPr>
+            <a:spLocks noGrp="1"/>
+          </p:cNvSpPr>
+          <p:nvPr>
+            <p:ph type="body" idx="1"/>
+          </p:nvPr>
+        </p:nvSpPr>
+        <p:spPr/>
+        <p:txBody>
+          <a:bodyPr/>
+          <a:lstStyle/>
+          <a:p>
+            <a:r>
+              <a:rPr lang="en-US" dirty="0"/>
+              <a:t/>
+            </a:r>
+            <a:endParaRPr lang="en-US" dirty="0"/>
+          </a:p>
+        </p:txBody>
+      </p:sp>
+      <p:sp>
+        <p:nvSpPr>
+          <p:cNvPr id="4" name="Slide Number Placeholder 3"/>
+          <p:cNvSpPr>
+            <a:spLocks noGrp="1"/>
+          </p:cNvSpPr>
+          <p:nvPr>
+            <p:ph type="sldNum" sz="quarter" idx="10"/>
+          </p:nvPr>
+        </p:nvSpPr>
+        <p:spPr/>
+        <p:txBody>
+          <a:bodyPr/>
+          <a:lstStyle/>
+          <a:p>
+            <a:fld id="{F7021451-1387-4CA6-816F-3879F97B5CBC}" type="slidenum">
+              <a:rPr lang="en-US"/>
+              <a:t>10</a:t>
             </a:fld>
             <a:endParaRPr lang="en-US"/>
           </a:p>
@@ -1190,6 +1278,94 @@
             <a:fld id="{F7021451-1387-4CA6-816F-3879F97B5CBC}" type="slidenum">
               <a:rPr lang="en-US"/>
               <a:t>8</a:t>
+            </a:fld>
+            <a:endParaRPr lang="en-US"/>
+          </a:p>
+        </p:txBody>
+      </p:sp>
+    </p:spTree>
+    <p:extLst>
+      <p:ext uri="{BB962C8B-B14F-4D97-AF65-F5344CB8AC3E}">
+        <p14:creationId xmlns:p14="http://schemas.microsoft.com/office/powerpoint/2010/main" val="1024086991"/>
+      </p:ext>
+    </p:extLst>
+  </p:cSld>
+  <p:clrMapOvr>
+    <a:masterClrMapping/>
+  </p:clrMapOvr>
+</p:notes>
+</file>
+
+<file path=ppt/notesSlides/notesSlide9.xml><?xml version="1.0" encoding="utf-8"?>
+<p:notes xmlns:a="http://schemas.openxmlformats.org/drawingml/2006/main" xmlns:r="http://schemas.openxmlformats.org/officeDocument/2006/relationships" xmlns:p="http://schemas.openxmlformats.org/presentationml/2006/main">
+  <p:cSld>
+    <p:spTree>
+      <p:nvGrpSpPr>
+        <p:cNvPr id="1" name=""/>
+        <p:cNvGrpSpPr/>
+        <p:nvPr/>
+      </p:nvGrpSpPr>
+      <p:grpSpPr>
+        <a:xfrm>
+          <a:off x="0" y="0"/>
+          <a:ext cx="0" cy="0"/>
+          <a:chOff x="0" y="0"/>
+          <a:chExt cx="0" cy="0"/>
+        </a:xfrm>
+      </p:grpSpPr>
+      <p:sp>
+        <p:nvSpPr>
+          <p:cNvPr id="2" name="Slide Image Placeholder 1"/>
+          <p:cNvSpPr>
+            <a:spLocks noGrp="1" noRot="1" noChangeAspect="1"/>
+          </p:cNvSpPr>
+          <p:nvPr>
+            <p:ph type="sldImg"/>
+          </p:nvPr>
+        </p:nvSpPr>
+        <p:spPr/>
+      </p:sp>
+      <p:sp>
+        <p:nvSpPr>
+          <p:cNvPr id="3" name="Notes Placeholder 2"/>
+          <p:cNvSpPr>
+            <a:spLocks noGrp="1"/>
+          </p:cNvSpPr>
+          <p:nvPr>
+            <p:ph type="body" idx="1"/>
+          </p:nvPr>
+        </p:nvSpPr>
+        <p:spPr/>
+        <p:txBody>
+          <a:bodyPr/>
+          <a:lstStyle/>
+          <a:p>
+            <a:r>
+              <a:rPr lang="en-US" dirty="0"/>
+              <a:t/>
+            </a:r>
+            <a:endParaRPr lang="en-US" dirty="0"/>
+          </a:p>
+        </p:txBody>
+      </p:sp>
+      <p:sp>
+        <p:nvSpPr>
+          <p:cNvPr id="4" name="Slide Number Placeholder 3"/>
+          <p:cNvSpPr>
+            <a:spLocks noGrp="1"/>
+          </p:cNvSpPr>
+          <p:nvPr>
+            <p:ph type="sldNum" sz="quarter" idx="10"/>
+          </p:nvPr>
+        </p:nvSpPr>
+        <p:spPr/>
+        <p:txBody>
+          <a:bodyPr/>
+          <a:lstStyle/>
+          <a:p>
+            <a:fld id="{F7021451-1387-4CA6-816F-3879F97B5CBC}" type="slidenum">
+              <a:rPr lang="en-US"/>
+              <a:t>9</a:t>
             </a:fld>
             <a:endParaRPr lang="en-US"/>
           </a:p>
@@ -1814,7 +1990,7 @@
         <p:spPr>
           <a:xfrm>
             <a:off x="731520" y="1371600"/>
-            <a:ext cx="7315200" cy="640080"/>
+            <a:ext cx="8412480" cy="640080"/>
           </a:xfrm>
           <a:prstGeom prst="rect">
             <a:avLst/>
@@ -1830,14 +2006,14 @@
               <a:buNone/>
             </a:pPr>
             <a:r>
-              <a:rPr lang="en-US" sz="2800" dirty="0">
+              <a:rPr lang="en-US" sz="2600" dirty="0">
                 <a:solidFill>
                   <a:schemeClr val="accent6"/>
                 </a:solidFill>
               </a:rPr>
-              <a:t>2학기 일본어 수행평가</a:t>
-            </a:r>
-            <a:endParaRPr lang="en-US" sz="2800" dirty="0"/>
+              <a:t>송호고등학교 2학년 일본어회화 · 2학기 수행평가</a:t>
+            </a:r>
+            <a:endParaRPr lang="en-US" sz="2600" dirty="0"/>
           </a:p>
         </p:txBody>
       </p:sp>
@@ -1873,7 +2049,7 @@
                   <a:schemeClr val="bg1"/>
                 </a:solidFill>
               </a:rPr>
-              <a:t>나를 소개해요!</a:t>
+              <a:t>일본 여행 버킷리스트</a:t>
             </a:r>
             <a:endParaRPr lang="en-US" sz="5400" dirty="0"/>
           </a:p>
@@ -1906,7 +2082,7 @@
               <a:buNone/>
             </a:pPr>
             <a:r>
-              <a:rPr lang="en-US" sz="3000" dirty="0">
+              <a:rPr lang="en-US" sz="3000" b="1" dirty="0">
                 <a:solidFill>
                   <a:schemeClr val="accent3"/>
                 </a:solidFill>
@@ -1914,7 +2090,7 @@
                 <a:ea typeface="Meiryo" pitchFamily="34" charset="-122"/>
                 <a:cs typeface="Meiryo" pitchFamily="34" charset="-120"/>
               </a:rPr>
-              <a:t>じこしょうかい</a:t>
+              <a:t>〜たいです</a:t>
             </a:r>
             <a:pPr algn="l" indent="0" marL="0">
               <a:buNone/>
@@ -1925,7 +2101,7 @@
                   <a:schemeClr val="accent3"/>
                 </a:solidFill>
               </a:rPr>
-              <a:t>  말하기 평가</a:t>
+              <a:t>  로 쓰고, 말하기</a:t>
             </a:r>
             <a:endParaRPr lang="en-US" sz="3000" dirty="0"/>
           </a:p>
@@ -1951,16 +2127,67 @@
           <a:ln/>
         </p:spPr>
       </p:sp>
-      <p:sp>
-        <p:nvSpPr>
-          <p:cNvPr id="6" name="Footer"/>
-          <p:cNvSpPr txBox="1"/>
-          <p:nvPr/>
-        </p:nvSpPr>
-        <p:spPr>
-          <a:xfrm>
-            <a:off x="731520" y="5760720"/>
-            <a:ext cx="5486400" cy="457200"/>
+      <p:pic>
+        <p:nvPicPr>
+          <p:cNvPr id="6" name="Plane" descr="preencoded.png">    </p:cNvPr>
+          <p:cNvPicPr>
+            <a:picLocks noChangeAspect="1"/>
+          </p:cNvPicPr>
+          <p:nvPr/>
+        </p:nvPicPr>
+        <p:blipFill>
+          <a:blip r:embed="rId1"/>
+          <a:stretch>
+            <a:fillRect/>
+          </a:stretch>
+        </p:blipFill>
+        <p:spPr>
+          <a:xfrm>
+            <a:off x="9875520" y="1371600"/>
+            <a:ext cx="1097280" cy="1097280"/>
+          </a:xfrm>
+          <a:prstGeom prst="rect">
+            <a:avLst/>
+          </a:prstGeom>
+        </p:spPr>
+      </p:pic>
+    </p:spTree>
+  </p:cSld>
+  <p:clrMapOvr>
+    <a:masterClrMapping/>
+  </p:clrMapOvr>
+</p:sld>
+</file>
+
+<file path=ppt/slides/slide10.xml><?xml version="1.0" encoding="utf-8"?>
+<p:sld xmlns:a="http://schemas.openxmlformats.org/drawingml/2006/main" xmlns:r="http://schemas.openxmlformats.org/officeDocument/2006/relationships" xmlns:p="http://schemas.openxmlformats.org/presentationml/2006/main">
+  <p:cSld name="Slide 10">
+    <p:spTree>
+      <p:nvGrpSpPr>
+        <p:cNvPr id="1" name=""/>
+        <p:cNvGrpSpPr/>
+        <p:nvPr/>
+      </p:nvGrpSpPr>
+      <p:grpSpPr>
+        <a:xfrm>
+          <a:off x="0" y="0"/>
+          <a:ext cx="0" cy="0"/>
+          <a:chOff x="0" y="0"/>
+          <a:chExt cx="0" cy="0"/>
+        </a:xfrm>
+      </p:grpSpPr>
+      <p:sp>
+        <p:nvSpPr>
+          <p:cNvPr id="2" name="Text 0"/>
+          <p:cNvSpPr/>
+          <p:nvPr>
+            <p:ph idx="100" type="title" hasCustomPrompt="1"/>
+          </p:nvPr>
+        </p:nvSpPr>
+        <p:spPr>
+          <a:xfrm>
+            <a:off x="731520" y="2286000"/>
+            <a:ext cx="10698480" cy="1371600"/>
           </a:xfrm>
           <a:prstGeom prst="rect">
             <a:avLst/>
@@ -1972,21 +2199,86 @@
           <a:bodyPr wrap="square" lIns="0" tIns="0" rIns="0" bIns="0" rtlCol="0" anchor="ctr"/>
           <a:lstStyle/>
           <a:p>
-            <a:pPr indent="0" marL="0">
-              <a:buNone/>
-            </a:pPr>
-            <a:r>
-              <a:rPr lang="en-US" sz="2200" dirty="0">
-                <a:solidFill>
-                  <a:schemeClr val="bg2"/>
-                </a:solidFill>
-              </a:rPr>
-              <a:t>2학년 일본어</a:t>
-            </a:r>
-            <a:endParaRPr lang="en-US" sz="2200" dirty="0"/>
-          </a:p>
-        </p:txBody>
-      </p:sp>
+            <a:pPr algn="l" indent="0" marL="0">
+              <a:buNone/>
+            </a:pPr>
+            <a:r>
+              <a:rPr lang="en-US" sz="5400" b="1" dirty="0">
+                <a:solidFill>
+                  <a:schemeClr val="bg1"/>
+                </a:solidFill>
+                <a:latin typeface="Meiryo" pitchFamily="34" charset="0"/>
+                <a:ea typeface="Meiryo" pitchFamily="34" charset="-122"/>
+                <a:cs typeface="Meiryo" pitchFamily="34" charset="-120"/>
+              </a:rPr>
+              <a:t>がんばってください！</a:t>
+            </a:r>
+            <a:endParaRPr lang="en-US" sz="5400" dirty="0"/>
+          </a:p>
+        </p:txBody>
+      </p:sp>
+      <p:sp>
+        <p:nvSpPr>
+          <p:cNvPr id="3" name="Text 0"/>
+          <p:cNvSpPr/>
+          <p:nvPr>
+            <p:ph idx="101" type="body" hasCustomPrompt="1"/>
+          </p:nvPr>
+        </p:nvSpPr>
+        <p:spPr>
+          <a:xfrm>
+            <a:off x="731520" y="3749040"/>
+            <a:ext cx="10698480" cy="914400"/>
+          </a:xfrm>
+          <a:prstGeom prst="rect">
+            <a:avLst/>
+          </a:prstGeom>
+          <a:noFill/>
+          <a:ln/>
+        </p:spPr>
+        <p:txBody>
+          <a:bodyPr wrap="square" lIns="0" tIns="0" rIns="0" bIns="0" rtlCol="0" anchor="t"/>
+          <a:lstStyle/>
+          <a:p>
+            <a:pPr algn="l" indent="0" marL="0">
+              <a:buNone/>
+            </a:pPr>
+            <a:r>
+              <a:rPr lang="en-US" sz="3000" dirty="0">
+                <a:solidFill>
+                  <a:schemeClr val="accent3"/>
+                </a:solidFill>
+              </a:rPr>
+              <a:t>궁금한 점은 언제든지 선생님께 물어보세요</a:t>
+            </a:r>
+            <a:endParaRPr lang="en-US" sz="3000" dirty="0"/>
+          </a:p>
+        </p:txBody>
+      </p:sp>
+      <p:pic>
+        <p:nvPicPr>
+          <p:cNvPr id="4" name="Plane end" descr="preencoded.png">    </p:cNvPr>
+          <p:cNvPicPr>
+            <a:picLocks noChangeAspect="1"/>
+          </p:cNvPicPr>
+          <p:nvPr/>
+        </p:nvPicPr>
+        <p:blipFill>
+          <a:blip r:embed="rId1"/>
+          <a:stretch>
+            <a:fillRect/>
+          </a:stretch>
+        </p:blipFill>
+        <p:spPr>
+          <a:xfrm>
+            <a:off x="9875520" y="914400"/>
+            <a:ext cx="1280160" cy="1280160"/>
+          </a:xfrm>
+          <a:prstGeom prst="rect">
+            <a:avLst/>
+          </a:prstGeom>
+        </p:spPr>
+      </p:pic>
     </p:spTree>
   </p:cSld>
   <p:clrMapOvr>
@@ -2063,7 +2355,7 @@
           </a:xfrm>
           <a:prstGeom prst="roundRect">
             <a:avLst>
-              <a:gd name="adj" fmla="val 5882"/>
+              <a:gd name="adj" fmla="val 4412"/>
             </a:avLst>
           </a:prstGeom>
           <a:solidFill>
@@ -2102,7 +2394,7 @@
                   <a:schemeClr val="accent1"/>
                 </a:solidFill>
               </a:rPr>
-              <a:t>20%</a:t>
+              <a:t>5문장</a:t>
             </a:r>
             <a:endParaRPr lang="en-US" sz="6600" dirty="0"/>
           </a:p>
@@ -2138,7 +2430,7 @@
                   <a:schemeClr val="tx2"/>
                 </a:solidFill>
               </a:rPr>
-              <a:t>성적 반영 비율</a:t>
+              <a:t>버킷리스트 작성</a:t>
             </a:r>
             <a:endParaRPr lang="en-US" sz="2800" dirty="0"/>
           </a:p>
@@ -2157,7 +2449,7 @@
           </a:xfrm>
           <a:prstGeom prst="roundRect">
             <a:avLst>
-              <a:gd name="adj" fmla="val 5882"/>
+              <a:gd name="adj" fmla="val 4412"/>
             </a:avLst>
           </a:prstGeom>
           <a:solidFill>
@@ -2196,7 +2488,7 @@
                   <a:schemeClr val="accent1"/>
                 </a:solidFill>
               </a:rPr>
-              <a:t>1분</a:t>
+              <a:t>7점</a:t>
             </a:r>
             <a:endParaRPr lang="en-US" sz="6600" dirty="0"/>
           </a:p>
@@ -2232,7 +2524,7 @@
                   <a:schemeClr val="tx2"/>
                 </a:solidFill>
               </a:rPr>
-              <a:t>발표 시간</a:t>
+              <a:t>쓰기</a:t>
             </a:r>
             <a:endParaRPr lang="en-US" sz="2800" dirty="0"/>
           </a:p>
@@ -2251,7 +2543,7 @@
           </a:xfrm>
           <a:prstGeom prst="roundRect">
             <a:avLst>
-              <a:gd name="adj" fmla="val 5882"/>
+              <a:gd name="adj" fmla="val 4412"/>
             </a:avLst>
           </a:prstGeom>
           <a:solidFill>
@@ -2290,7 +2582,7 @@
                   <a:schemeClr val="accent1"/>
                 </a:solidFill>
               </a:rPr>
-              <a:t>11월</a:t>
+              <a:t>5점</a:t>
             </a:r>
             <a:endParaRPr lang="en-US" sz="6600" dirty="0"/>
           </a:p>
@@ -2326,7 +2618,7 @@
                   <a:schemeClr val="tx2"/>
                 </a:solidFill>
               </a:rPr>
-              <a:t>평가 시기</a:t>
+              <a:t>말하기 (인터뷰)</a:t>
             </a:r>
             <a:endParaRPr lang="en-US" sz="2800" dirty="0"/>
           </a:p>
@@ -2353,7 +2645,7 @@
           <a:bodyPr wrap="square" lIns="0" tIns="0" rIns="0" bIns="0" rtlCol="0" anchor="ctr"/>
           <a:lstStyle/>
           <a:p>
-            <a:pPr algn="l" indent="0" marL="0">
+            <a:pPr indent="0" marL="0">
               <a:buNone/>
             </a:pPr>
             <a:r>
@@ -2362,7 +2654,32 @@
                   <a:schemeClr val="tx1"/>
                 </a:solidFill>
               </a:rPr>
-              <a:t>일본어로 1분 동안 자기소개를 하고, 원고 없이 발표해요</a:t>
+              <a:t>일본 여행지에서 해 보고 싶은 것 5가지를 </a:t>
+            </a:r>
+            <a:pPr indent="0" marL="0">
+              <a:buNone/>
+            </a:pPr>
+            <a:r>
+              <a:rPr lang="en-US" sz="2800" b="1" dirty="0">
+                <a:solidFill>
+                  <a:schemeClr val="accent1"/>
+                </a:solidFill>
+                <a:latin typeface="Meiryo" pitchFamily="34" charset="0"/>
+                <a:ea typeface="Meiryo" pitchFamily="34" charset="-122"/>
+                <a:cs typeface="Meiryo" pitchFamily="34" charset="-120"/>
+              </a:rPr>
+              <a:t>〜たいです</a:t>
+            </a:r>
+            <a:pPr indent="0" marL="0">
+              <a:buNone/>
+            </a:pPr>
+            <a:r>
+              <a:rPr lang="en-US" sz="2800" b="1" dirty="0">
+                <a:solidFill>
+                  <a:schemeClr val="tx1"/>
+                </a:solidFill>
+              </a:rPr>
+              <a:t>로 쓰고 말해요</a:t>
             </a:r>
             <a:endParaRPr lang="en-US" sz="2800" dirty="0"/>
           </a:p>
@@ -2470,7 +2787,21 @@
                   <a:schemeClr val="tx2"/>
                 </a:solidFill>
               </a:rPr>
-              <a:t>발표에 꼭 들어가야 할 4가지</a:t>
+              <a:t>희망표현 </a:t>
+            </a:r>
+            <a:pPr algn="l" indent="0" marL="0">
+              <a:buNone/>
+            </a:pPr>
+            <a:r>
+              <a:rPr lang="en-US" sz="4000" b="1" dirty="0">
+                <a:solidFill>
+                  <a:schemeClr val="tx2"/>
+                </a:solidFill>
+                <a:latin typeface="Meiryo" pitchFamily="34" charset="0"/>
+                <a:ea typeface="Meiryo" pitchFamily="34" charset="-122"/>
+                <a:cs typeface="Meiryo" pitchFamily="34" charset="-120"/>
+              </a:rPr>
+              <a:t>〜たいです</a:t>
             </a:r>
             <a:endParaRPr lang="en-US" sz="4000" dirty="0"/>
           </a:p>
@@ -2478,18 +2809,126 @@
       </p:sp>
       <p:sp>
         <p:nvSpPr>
-          <p:cNvPr id="3" name="Item card 1"/>
+          <p:cNvPr id="3" name="Formula card"/>
           <p:cNvSpPr/>
           <p:nvPr/>
         </p:nvSpPr>
         <p:spPr>
           <a:xfrm>
-            <a:off x="548640" y="1691640"/>
-            <a:ext cx="5394960" cy="1965960"/>
+            <a:off x="548640" y="1554480"/>
+            <a:ext cx="11064240" cy="1188720"/>
           </a:xfrm>
           <a:prstGeom prst="roundRect">
             <a:avLst>
-              <a:gd name="adj" fmla="val 6977"/>
+              <a:gd name="adj" fmla="val 11538"/>
+            </a:avLst>
+          </a:prstGeom>
+          <a:solidFill>
+            <a:schemeClr val="tx2"/>
+          </a:solidFill>
+          <a:ln/>
+        </p:spPr>
+      </p:sp>
+      <p:sp>
+        <p:nvSpPr>
+          <p:cNvPr id="4" name="Formula"/>
+          <p:cNvSpPr txBox="1"/>
+          <p:nvPr/>
+        </p:nvSpPr>
+        <p:spPr>
+          <a:xfrm>
+            <a:off x="548640" y="1554480"/>
+            <a:ext cx="11064240" cy="1188720"/>
+          </a:xfrm>
+          <a:prstGeom prst="rect">
+            <a:avLst/>
+          </a:prstGeom>
+          <a:noFill/>
+          <a:ln/>
+        </p:spPr>
+        <p:txBody>
+          <a:bodyPr wrap="square" lIns="0" tIns="0" rIns="0" bIns="0" rtlCol="0" anchor="ctr"/>
+          <a:lstStyle/>
+          <a:p>
+            <a:pPr algn="ctr" indent="0" marL="0">
+              <a:buNone/>
+            </a:pPr>
+            <a:r>
+              <a:rPr lang="en-US" sz="3400" b="1" dirty="0">
+                <a:solidFill>
+                  <a:schemeClr val="bg1"/>
+                </a:solidFill>
+              </a:rPr>
+              <a:t>동사 ます형  −  </a:t>
+            </a:r>
+            <a:pPr algn="ctr" indent="0" marL="0">
+              <a:buNone/>
+            </a:pPr>
+            <a:r>
+              <a:rPr lang="en-US" sz="3400" b="1" strike="sngStrike" dirty="0">
+                <a:solidFill>
+                  <a:schemeClr val="accent3"/>
+                </a:solidFill>
+                <a:latin typeface="Meiryo" pitchFamily="34" charset="0"/>
+                <a:ea typeface="Meiryo" pitchFamily="34" charset="-122"/>
+                <a:cs typeface="Meiryo" pitchFamily="34" charset="-120"/>
+              </a:rPr>
+              <a:t>ます</a:t>
+            </a:r>
+            <a:pPr algn="ctr" indent="0" marL="0">
+              <a:buNone/>
+            </a:pPr>
+            <a:r>
+              <a:rPr lang="en-US" sz="3400" b="1" dirty="0">
+                <a:solidFill>
+                  <a:schemeClr val="bg1"/>
+                </a:solidFill>
+              </a:rPr>
+              <a:t>  +  </a:t>
+            </a:r>
+            <a:pPr algn="ctr" indent="0" marL="0">
+              <a:buNone/>
+            </a:pPr>
+            <a:r>
+              <a:rPr lang="en-US" sz="3400" b="1" dirty="0">
+                <a:solidFill>
+                  <a:schemeClr val="accent3"/>
+                </a:solidFill>
+                <a:latin typeface="Meiryo" pitchFamily="34" charset="0"/>
+                <a:ea typeface="Meiryo" pitchFamily="34" charset="-122"/>
+                <a:cs typeface="Meiryo" pitchFamily="34" charset="-120"/>
+              </a:rPr>
+              <a:t>たいです</a:t>
+            </a:r>
+            <a:pPr algn="ctr" indent="0" marL="0">
+              <a:buNone/>
+            </a:pPr>
+            <a:r>
+              <a:rPr lang="en-US" sz="3400" b="1" dirty="0">
+                <a:solidFill>
+                  <a:schemeClr val="bg1"/>
+                </a:solidFill>
+              </a:rPr>
+              <a:t>   = ~하고 싶습니다</a:t>
+            </a:r>
+            <a:endParaRPr lang="en-US" sz="3400" dirty="0"/>
+          </a:p>
+        </p:txBody>
+      </p:sp>
+      <p:sp>
+        <p:nvSpPr>
+          <p:cNvPr id="5" name="Example row 1"/>
+          <p:cNvSpPr/>
+          <p:nvPr/>
+        </p:nvSpPr>
+        <p:spPr>
+          <a:xfrm>
+            <a:off x="548640" y="3063240"/>
+            <a:ext cx="11064240" cy="868680"/>
+          </a:xfrm>
+          <a:prstGeom prst="roundRect">
+            <a:avLst>
+              <a:gd name="adj" fmla="val 15789"/>
             </a:avLst>
           </a:prstGeom>
           <a:solidFill>
@@ -2500,27 +2939,46 @@
       </p:sp>
       <p:sp>
         <p:nvSpPr>
-          <p:cNvPr id="4" name="Item circle 1"/>
-          <p:cNvSpPr/>
-          <p:nvPr/>
-        </p:nvSpPr>
-        <p:spPr>
-          <a:xfrm>
-            <a:off x="868680" y="2148840"/>
-            <a:ext cx="1051560" cy="1051560"/>
-          </a:xfrm>
-          <a:prstGeom prst="ellipse">
-            <a:avLst/>
-          </a:prstGeom>
-          <a:solidFill>
-            <a:schemeClr val="accent1"/>
-          </a:solidFill>
-          <a:ln/>
-        </p:spPr>
+          <p:cNvPr id="6" name="Ex verb 1"/>
+          <p:cNvSpPr txBox="1"/>
+          <p:nvPr/>
+        </p:nvSpPr>
+        <p:spPr>
+          <a:xfrm>
+            <a:off x="822960" y="3063240"/>
+            <a:ext cx="3291840" cy="868680"/>
+          </a:xfrm>
+          <a:prstGeom prst="rect">
+            <a:avLst/>
+          </a:prstGeom>
+          <a:noFill/>
+          <a:ln/>
+        </p:spPr>
+        <p:txBody>
+          <a:bodyPr wrap="square" lIns="0" tIns="0" rIns="0" bIns="0" rtlCol="0" anchor="ctr"/>
+          <a:lstStyle/>
+          <a:p>
+            <a:pPr indent="0" marL="0">
+              <a:buNone/>
+            </a:pPr>
+            <a:r>
+              <a:rPr lang="en-US" sz="2800" dirty="0">
+                <a:solidFill>
+                  <a:schemeClr val="tx1"/>
+                </a:solidFill>
+                <a:latin typeface="Meiryo" pitchFamily="34" charset="0"/>
+                <a:ea typeface="Meiryo" pitchFamily="34" charset="-122"/>
+                <a:cs typeface="Meiryo" pitchFamily="34" charset="-120"/>
+              </a:rPr>
+              <a:t>行（い）きます</a:t>
+            </a:r>
+            <a:endParaRPr lang="en-US" sz="2800" dirty="0"/>
+          </a:p>
+        </p:txBody>
       </p:sp>
       <p:pic>
         <p:nvPicPr>
-          <p:cNvPr id="5" name="Item icon 1" descr="preencoded.png">    </p:cNvPr>
+          <p:cNvPr id="7" name="Ex arrow 1" descr="preencoded.png">    </p:cNvPr>
           <p:cNvPicPr>
             <a:picLocks noChangeAspect="1"/>
           </p:cNvPicPr>
@@ -2534,8 +2992,8 @@
         </p:blipFill>
         <p:spPr>
           <a:xfrm>
-            <a:off x="1097280" y="2377440"/>
-            <a:ext cx="594360" cy="594360"/>
+            <a:off x="4160520" y="3310128"/>
+            <a:ext cx="384048" cy="384048"/>
           </a:xfrm>
           <a:prstGeom prst="rect">
             <a:avLst/>
@@ -2544,14 +3002,14 @@
       </p:pic>
       <p:sp>
         <p:nvSpPr>
-          <p:cNvPr id="6" name="Item head 1"/>
+          <p:cNvPr id="8" name="Ex wish 1"/>
           <p:cNvSpPr txBox="1"/>
           <p:nvPr/>
         </p:nvSpPr>
         <p:spPr>
           <a:xfrm>
-            <a:off x="2194560" y="1965960"/>
-            <a:ext cx="3566160" cy="685800"/>
+            <a:off x="4754880" y="3063240"/>
+            <a:ext cx="3931920" cy="868680"/>
           </a:xfrm>
           <a:prstGeom prst="rect">
             <a:avLst/>
@@ -2567,70 +3025,70 @@
               <a:buNone/>
             </a:pPr>
             <a:r>
-              <a:rPr lang="en-US" sz="3200" b="1" dirty="0">
-                <a:solidFill>
-                  <a:schemeClr val="tx2"/>
-                </a:solidFill>
-              </a:rPr>
-              <a:t>이름</a:t>
-            </a:r>
-            <a:endParaRPr lang="en-US" sz="3200" dirty="0"/>
-          </a:p>
-        </p:txBody>
-      </p:sp>
-      <p:sp>
-        <p:nvSpPr>
-          <p:cNvPr id="7" name="Item jp 1"/>
-          <p:cNvSpPr txBox="1"/>
-          <p:nvPr/>
-        </p:nvSpPr>
-        <p:spPr>
-          <a:xfrm>
-            <a:off x="2194560" y="2697480"/>
-            <a:ext cx="3611880" cy="685800"/>
-          </a:xfrm>
-          <a:prstGeom prst="rect">
-            <a:avLst/>
-          </a:prstGeom>
-          <a:noFill/>
-          <a:ln/>
-        </p:spPr>
-        <p:txBody>
-          <a:bodyPr wrap="square" lIns="0" tIns="0" rIns="0" bIns="0" rtlCol="0" anchor="ctr"/>
-          <a:lstStyle/>
-          <a:p>
-            <a:pPr indent="0" marL="0">
-              <a:buNone/>
-            </a:pPr>
-            <a:r>
-              <a:rPr lang="en-US" sz="2200" dirty="0">
-                <a:solidFill>
-                  <a:schemeClr val="tx1"/>
+              <a:rPr lang="en-US" sz="2800" b="1" dirty="0">
+                <a:solidFill>
+                  <a:schemeClr val="accent1"/>
                 </a:solidFill>
                 <a:latin typeface="Meiryo" pitchFamily="34" charset="0"/>
                 <a:ea typeface="Meiryo" pitchFamily="34" charset="-122"/>
                 <a:cs typeface="Meiryo" pitchFamily="34" charset="-120"/>
               </a:rPr>
-              <a:t>はじめまして。〇〇です。</a:t>
-            </a:r>
-            <a:endParaRPr lang="en-US" sz="2200" dirty="0"/>
-          </a:p>
-        </p:txBody>
-      </p:sp>
-      <p:sp>
-        <p:nvSpPr>
-          <p:cNvPr id="8" name="Item card 2"/>
+              <a:t>行（い）きたいです</a:t>
+            </a:r>
+            <a:endParaRPr lang="en-US" sz="2800" dirty="0"/>
+          </a:p>
+        </p:txBody>
+      </p:sp>
+      <p:sp>
+        <p:nvSpPr>
+          <p:cNvPr id="9" name="Ex ko 1"/>
+          <p:cNvSpPr txBox="1"/>
+          <p:nvPr/>
+        </p:nvSpPr>
+        <p:spPr>
+          <a:xfrm>
+            <a:off x="8778240" y="3063240"/>
+            <a:ext cx="2651760" cy="868680"/>
+          </a:xfrm>
+          <a:prstGeom prst="rect">
+            <a:avLst/>
+          </a:prstGeom>
+          <a:noFill/>
+          <a:ln/>
+        </p:spPr>
+        <p:txBody>
+          <a:bodyPr wrap="square" lIns="0" tIns="0" rIns="0" bIns="0" rtlCol="0" anchor="ctr"/>
+          <a:lstStyle/>
+          <a:p>
+            <a:pPr indent="0" marL="0">
+              <a:buNone/>
+            </a:pPr>
+            <a:r>
+              <a:rPr lang="en-US" sz="2600" dirty="0">
+                <a:solidFill>
+                  <a:schemeClr val="tx2"/>
+                </a:solidFill>
+              </a:rPr>
+              <a:t>가고 싶습니다</a:t>
+            </a:r>
+            <a:endParaRPr lang="en-US" sz="2600" dirty="0"/>
+          </a:p>
+        </p:txBody>
+      </p:sp>
+      <p:sp>
+        <p:nvSpPr>
+          <p:cNvPr id="10" name="Example row 2"/>
           <p:cNvSpPr/>
           <p:nvPr/>
         </p:nvSpPr>
         <p:spPr>
           <a:xfrm>
-            <a:off x="6217920" y="1691640"/>
-            <a:ext cx="5394960" cy="1965960"/>
+            <a:off x="548640" y="4114800"/>
+            <a:ext cx="11064240" cy="868680"/>
           </a:xfrm>
           <a:prstGeom prst="roundRect">
             <a:avLst>
-              <a:gd name="adj" fmla="val 6977"/>
+              <a:gd name="adj" fmla="val 15789"/>
             </a:avLst>
           </a:prstGeom>
           <a:solidFill>
@@ -2641,27 +3099,46 @@
       </p:sp>
       <p:sp>
         <p:nvSpPr>
-          <p:cNvPr id="9" name="Item circle 2"/>
-          <p:cNvSpPr/>
-          <p:nvPr/>
-        </p:nvSpPr>
-        <p:spPr>
-          <a:xfrm>
-            <a:off x="6537960" y="2148840"/>
-            <a:ext cx="1051560" cy="1051560"/>
-          </a:xfrm>
-          <a:prstGeom prst="ellipse">
-            <a:avLst/>
-          </a:prstGeom>
-          <a:solidFill>
-            <a:schemeClr val="accent1"/>
-          </a:solidFill>
-          <a:ln/>
-        </p:spPr>
+          <p:cNvPr id="11" name="Ex verb 2"/>
+          <p:cNvSpPr txBox="1"/>
+          <p:nvPr/>
+        </p:nvSpPr>
+        <p:spPr>
+          <a:xfrm>
+            <a:off x="822960" y="4114800"/>
+            <a:ext cx="3291840" cy="868680"/>
+          </a:xfrm>
+          <a:prstGeom prst="rect">
+            <a:avLst/>
+          </a:prstGeom>
+          <a:noFill/>
+          <a:ln/>
+        </p:spPr>
+        <p:txBody>
+          <a:bodyPr wrap="square" lIns="0" tIns="0" rIns="0" bIns="0" rtlCol="0" anchor="ctr"/>
+          <a:lstStyle/>
+          <a:p>
+            <a:pPr indent="0" marL="0">
+              <a:buNone/>
+            </a:pPr>
+            <a:r>
+              <a:rPr lang="en-US" sz="2800" dirty="0">
+                <a:solidFill>
+                  <a:schemeClr val="tx1"/>
+                </a:solidFill>
+                <a:latin typeface="Meiryo" pitchFamily="34" charset="0"/>
+                <a:ea typeface="Meiryo" pitchFamily="34" charset="-122"/>
+                <a:cs typeface="Meiryo" pitchFamily="34" charset="-120"/>
+              </a:rPr>
+              <a:t>食（た）べます</a:t>
+            </a:r>
+            <a:endParaRPr lang="en-US" sz="2800" dirty="0"/>
+          </a:p>
+        </p:txBody>
       </p:sp>
       <p:pic>
         <p:nvPicPr>
-          <p:cNvPr id="10" name="Item icon 2" descr="preencoded.png">    </p:cNvPr>
+          <p:cNvPr id="12" name="Ex arrow 2" descr="preencoded.png">    </p:cNvPr>
           <p:cNvPicPr>
             <a:picLocks noChangeAspect="1"/>
           </p:cNvPicPr>
@@ -2675,8 +3152,8 @@
         </p:blipFill>
         <p:spPr>
           <a:xfrm>
-            <a:off x="6766560" y="2377440"/>
-            <a:ext cx="594360" cy="594360"/>
+            <a:off x="4160520" y="4361688"/>
+            <a:ext cx="384048" cy="384048"/>
           </a:xfrm>
           <a:prstGeom prst="rect">
             <a:avLst/>
@@ -2685,14 +3162,14 @@
       </p:pic>
       <p:sp>
         <p:nvSpPr>
-          <p:cNvPr id="11" name="Item head 2"/>
+          <p:cNvPr id="13" name="Ex wish 2"/>
           <p:cNvSpPr txBox="1"/>
           <p:nvPr/>
         </p:nvSpPr>
         <p:spPr>
           <a:xfrm>
-            <a:off x="7863840" y="1965960"/>
-            <a:ext cx="3566160" cy="685800"/>
+            <a:off x="4754880" y="4114800"/>
+            <a:ext cx="3931920" cy="868680"/>
           </a:xfrm>
           <a:prstGeom prst="rect">
             <a:avLst/>
@@ -2708,70 +3185,70 @@
               <a:buNone/>
             </a:pPr>
             <a:r>
-              <a:rPr lang="en-US" sz="3200" b="1" dirty="0">
-                <a:solidFill>
-                  <a:schemeClr val="tx2"/>
-                </a:solidFill>
-              </a:rPr>
-              <a:t>학년</a:t>
-            </a:r>
-            <a:endParaRPr lang="en-US" sz="3200" dirty="0"/>
-          </a:p>
-        </p:txBody>
-      </p:sp>
-      <p:sp>
-        <p:nvSpPr>
-          <p:cNvPr id="12" name="Item jp 2"/>
-          <p:cNvSpPr txBox="1"/>
-          <p:nvPr/>
-        </p:nvSpPr>
-        <p:spPr>
-          <a:xfrm>
-            <a:off x="7863840" y="2697480"/>
-            <a:ext cx="3611880" cy="685800"/>
-          </a:xfrm>
-          <a:prstGeom prst="rect">
-            <a:avLst/>
-          </a:prstGeom>
-          <a:noFill/>
-          <a:ln/>
-        </p:spPr>
-        <p:txBody>
-          <a:bodyPr wrap="square" lIns="0" tIns="0" rIns="0" bIns="0" rtlCol="0" anchor="ctr"/>
-          <a:lstStyle/>
-          <a:p>
-            <a:pPr indent="0" marL="0">
-              <a:buNone/>
-            </a:pPr>
-            <a:r>
-              <a:rPr lang="en-US" sz="2200" dirty="0">
-                <a:solidFill>
-                  <a:schemeClr val="tx1"/>
+              <a:rPr lang="en-US" sz="2800" b="1" dirty="0">
+                <a:solidFill>
+                  <a:schemeClr val="accent1"/>
                 </a:solidFill>
                 <a:latin typeface="Meiryo" pitchFamily="34" charset="0"/>
                 <a:ea typeface="Meiryo" pitchFamily="34" charset="-122"/>
                 <a:cs typeface="Meiryo" pitchFamily="34" charset="-120"/>
               </a:rPr>
-              <a:t>中学2年生です。</a:t>
-            </a:r>
-            <a:endParaRPr lang="en-US" sz="2200" dirty="0"/>
-          </a:p>
-        </p:txBody>
-      </p:sp>
-      <p:sp>
-        <p:nvSpPr>
-          <p:cNvPr id="13" name="Item card 3"/>
+              <a:t>食（た）べたいです</a:t>
+            </a:r>
+            <a:endParaRPr lang="en-US" sz="2800" dirty="0"/>
+          </a:p>
+        </p:txBody>
+      </p:sp>
+      <p:sp>
+        <p:nvSpPr>
+          <p:cNvPr id="14" name="Ex ko 2"/>
+          <p:cNvSpPr txBox="1"/>
+          <p:nvPr/>
+        </p:nvSpPr>
+        <p:spPr>
+          <a:xfrm>
+            <a:off x="8778240" y="4114800"/>
+            <a:ext cx="2651760" cy="868680"/>
+          </a:xfrm>
+          <a:prstGeom prst="rect">
+            <a:avLst/>
+          </a:prstGeom>
+          <a:noFill/>
+          <a:ln/>
+        </p:spPr>
+        <p:txBody>
+          <a:bodyPr wrap="square" lIns="0" tIns="0" rIns="0" bIns="0" rtlCol="0" anchor="ctr"/>
+          <a:lstStyle/>
+          <a:p>
+            <a:pPr indent="0" marL="0">
+              <a:buNone/>
+            </a:pPr>
+            <a:r>
+              <a:rPr lang="en-US" sz="2600" dirty="0">
+                <a:solidFill>
+                  <a:schemeClr val="tx2"/>
+                </a:solidFill>
+              </a:rPr>
+              <a:t>먹고 싶습니다</a:t>
+            </a:r>
+            <a:endParaRPr lang="en-US" sz="2600" dirty="0"/>
+          </a:p>
+        </p:txBody>
+      </p:sp>
+      <p:sp>
+        <p:nvSpPr>
+          <p:cNvPr id="15" name="Example row 3"/>
           <p:cNvSpPr/>
           <p:nvPr/>
         </p:nvSpPr>
         <p:spPr>
           <a:xfrm>
-            <a:off x="548640" y="3931920"/>
-            <a:ext cx="5394960" cy="1965960"/>
+            <a:off x="548640" y="5166360"/>
+            <a:ext cx="11064240" cy="868680"/>
           </a:xfrm>
           <a:prstGeom prst="roundRect">
             <a:avLst>
-              <a:gd name="adj" fmla="val 6977"/>
+              <a:gd name="adj" fmla="val 15789"/>
             </a:avLst>
           </a:prstGeom>
           <a:solidFill>
@@ -2782,27 +3259,46 @@
       </p:sp>
       <p:sp>
         <p:nvSpPr>
-          <p:cNvPr id="14" name="Item circle 3"/>
-          <p:cNvSpPr/>
-          <p:nvPr/>
-        </p:nvSpPr>
-        <p:spPr>
-          <a:xfrm>
-            <a:off x="868680" y="4389120"/>
-            <a:ext cx="1051560" cy="1051560"/>
-          </a:xfrm>
-          <a:prstGeom prst="ellipse">
-            <a:avLst/>
-          </a:prstGeom>
-          <a:solidFill>
-            <a:schemeClr val="accent1"/>
-          </a:solidFill>
-          <a:ln/>
-        </p:spPr>
+          <p:cNvPr id="16" name="Ex verb 3"/>
+          <p:cNvSpPr txBox="1"/>
+          <p:nvPr/>
+        </p:nvSpPr>
+        <p:spPr>
+          <a:xfrm>
+            <a:off x="822960" y="5166360"/>
+            <a:ext cx="3291840" cy="868680"/>
+          </a:xfrm>
+          <a:prstGeom prst="rect">
+            <a:avLst/>
+          </a:prstGeom>
+          <a:noFill/>
+          <a:ln/>
+        </p:spPr>
+        <p:txBody>
+          <a:bodyPr wrap="square" lIns="0" tIns="0" rIns="0" bIns="0" rtlCol="0" anchor="ctr"/>
+          <a:lstStyle/>
+          <a:p>
+            <a:pPr indent="0" marL="0">
+              <a:buNone/>
+            </a:pPr>
+            <a:r>
+              <a:rPr lang="en-US" sz="2800" dirty="0">
+                <a:solidFill>
+                  <a:schemeClr val="tx1"/>
+                </a:solidFill>
+                <a:latin typeface="Meiryo" pitchFamily="34" charset="0"/>
+                <a:ea typeface="Meiryo" pitchFamily="34" charset="-122"/>
+                <a:cs typeface="Meiryo" pitchFamily="34" charset="-120"/>
+              </a:rPr>
+              <a:t>買（か）います</a:t>
+            </a:r>
+            <a:endParaRPr lang="en-US" sz="2800" dirty="0"/>
+          </a:p>
+        </p:txBody>
       </p:sp>
       <p:pic>
         <p:nvPicPr>
-          <p:cNvPr id="15" name="Item icon 3" descr="preencoded.png">    </p:cNvPr>
+          <p:cNvPr id="17" name="Ex arrow 3" descr="preencoded.png">    </p:cNvPr>
           <p:cNvPicPr>
             <a:picLocks noChangeAspect="1"/>
           </p:cNvPicPr>
@@ -2816,8 +3312,8 @@
         </p:blipFill>
         <p:spPr>
           <a:xfrm>
-            <a:off x="1097280" y="4617720"/>
-            <a:ext cx="594360" cy="594360"/>
+            <a:off x="4160520" y="5413248"/>
+            <a:ext cx="384048" cy="384048"/>
           </a:xfrm>
           <a:prstGeom prst="rect">
             <a:avLst/>
@@ -2826,14 +3322,14 @@
       </p:pic>
       <p:sp>
         <p:nvSpPr>
-          <p:cNvPr id="16" name="Item head 3"/>
+          <p:cNvPr id="18" name="Ex wish 3"/>
           <p:cNvSpPr txBox="1"/>
           <p:nvPr/>
         </p:nvSpPr>
         <p:spPr>
           <a:xfrm>
-            <a:off x="2194560" y="4206240"/>
-            <a:ext cx="3566160" cy="685800"/>
+            <a:off x="4754880" y="5166360"/>
+            <a:ext cx="3931920" cy="868680"/>
           </a:xfrm>
           <a:prstGeom prst="rect">
             <a:avLst/>
@@ -2849,132 +3345,30 @@
               <a:buNone/>
             </a:pPr>
             <a:r>
-              <a:rPr lang="en-US" sz="3200" b="1" dirty="0">
-                <a:solidFill>
-                  <a:schemeClr val="tx2"/>
-                </a:solidFill>
-              </a:rPr>
-              <a:t>좋아하는 것</a:t>
-            </a:r>
-            <a:endParaRPr lang="en-US" sz="3200" dirty="0"/>
-          </a:p>
-        </p:txBody>
-      </p:sp>
-      <p:sp>
-        <p:nvSpPr>
-          <p:cNvPr id="17" name="Item jp 3"/>
-          <p:cNvSpPr txBox="1"/>
-          <p:nvPr/>
-        </p:nvSpPr>
-        <p:spPr>
-          <a:xfrm>
-            <a:off x="2194560" y="4937760"/>
-            <a:ext cx="3611880" cy="685800"/>
-          </a:xfrm>
-          <a:prstGeom prst="rect">
-            <a:avLst/>
-          </a:prstGeom>
-          <a:noFill/>
-          <a:ln/>
-        </p:spPr>
-        <p:txBody>
-          <a:bodyPr wrap="square" lIns="0" tIns="0" rIns="0" bIns="0" rtlCol="0" anchor="ctr"/>
-          <a:lstStyle/>
-          <a:p>
-            <a:pPr indent="0" marL="0">
-              <a:buNone/>
-            </a:pPr>
-            <a:r>
-              <a:rPr lang="en-US" sz="2200" dirty="0">
-                <a:solidFill>
-                  <a:schemeClr val="tx1"/>
+              <a:rPr lang="en-US" sz="2800" b="1" dirty="0">
+                <a:solidFill>
+                  <a:schemeClr val="accent1"/>
                 </a:solidFill>
                 <a:latin typeface="Meiryo" pitchFamily="34" charset="0"/>
                 <a:ea typeface="Meiryo" pitchFamily="34" charset="-122"/>
                 <a:cs typeface="Meiryo" pitchFamily="34" charset="-120"/>
               </a:rPr>
-              <a:t>〇〇が好きです。</a:t>
-            </a:r>
-            <a:endParaRPr lang="en-US" sz="2200" dirty="0"/>
-          </a:p>
-        </p:txBody>
-      </p:sp>
-      <p:sp>
-        <p:nvSpPr>
-          <p:cNvPr id="18" name="Item card 4"/>
-          <p:cNvSpPr/>
-          <p:nvPr/>
-        </p:nvSpPr>
-        <p:spPr>
-          <a:xfrm>
-            <a:off x="6217920" y="3931920"/>
-            <a:ext cx="5394960" cy="1965960"/>
-          </a:xfrm>
-          <a:prstGeom prst="roundRect">
-            <a:avLst>
-              <a:gd name="adj" fmla="val 6977"/>
-            </a:avLst>
-          </a:prstGeom>
-          <a:solidFill>
-            <a:schemeClr val="bg2"/>
-          </a:solidFill>
-          <a:ln/>
-        </p:spPr>
-      </p:sp>
-      <p:sp>
-        <p:nvSpPr>
-          <p:cNvPr id="19" name="Item circle 4"/>
-          <p:cNvSpPr/>
-          <p:nvPr/>
-        </p:nvSpPr>
-        <p:spPr>
-          <a:xfrm>
-            <a:off x="6537960" y="4389120"/>
-            <a:ext cx="1051560" cy="1051560"/>
-          </a:xfrm>
-          <a:prstGeom prst="ellipse">
-            <a:avLst/>
-          </a:prstGeom>
-          <a:solidFill>
-            <a:schemeClr val="accent1"/>
-          </a:solidFill>
-          <a:ln/>
-        </p:spPr>
-      </p:sp>
-      <p:pic>
-        <p:nvPicPr>
-          <p:cNvPr id="20" name="Item icon 4" descr="preencoded.png">    </p:cNvPr>
-          <p:cNvPicPr>
-            <a:picLocks noChangeAspect="1"/>
-          </p:cNvPicPr>
-          <p:nvPr/>
-        </p:nvPicPr>
-        <p:blipFill>
-          <a:blip r:embed="rId4"/>
-          <a:stretch>
-            <a:fillRect/>
-          </a:stretch>
-        </p:blipFill>
-        <p:spPr>
-          <a:xfrm>
-            <a:off x="6766560" y="4617720"/>
-            <a:ext cx="594360" cy="594360"/>
-          </a:xfrm>
-          <a:prstGeom prst="rect">
-            <a:avLst/>
-          </a:prstGeom>
-        </p:spPr>
-      </p:pic>
-      <p:sp>
-        <p:nvSpPr>
-          <p:cNvPr id="21" name="Item head 4"/>
+              <a:t>買（か）いたいです</a:t>
+            </a:r>
+            <a:endParaRPr lang="en-US" sz="2800" dirty="0"/>
+          </a:p>
+        </p:txBody>
+      </p:sp>
+      <p:sp>
+        <p:nvSpPr>
+          <p:cNvPr id="19" name="Ex ko 3"/>
           <p:cNvSpPr txBox="1"/>
           <p:nvPr/>
         </p:nvSpPr>
         <p:spPr>
           <a:xfrm>
-            <a:off x="7863840" y="4206240"/>
-            <a:ext cx="3566160" cy="685800"/>
+            <a:off x="8778240" y="5166360"/>
+            <a:ext cx="2651760" cy="868680"/>
           </a:xfrm>
           <a:prstGeom prst="rect">
             <a:avLst/>
@@ -2990,53 +3384,14 @@
               <a:buNone/>
             </a:pPr>
             <a:r>
-              <a:rPr lang="en-US" sz="3200" b="1" dirty="0">
+              <a:rPr lang="en-US" sz="2600" dirty="0">
                 <a:solidFill>
                   <a:schemeClr val="tx2"/>
                 </a:solidFill>
               </a:rPr>
-              <a:t>마무리 인사</a:t>
-            </a:r>
-            <a:endParaRPr lang="en-US" sz="3200" dirty="0"/>
-          </a:p>
-        </p:txBody>
-      </p:sp>
-      <p:sp>
-        <p:nvSpPr>
-          <p:cNvPr id="22" name="Item jp 4"/>
-          <p:cNvSpPr txBox="1"/>
-          <p:nvPr/>
-        </p:nvSpPr>
-        <p:spPr>
-          <a:xfrm>
-            <a:off x="7863840" y="4937760"/>
-            <a:ext cx="3611880" cy="685800"/>
-          </a:xfrm>
-          <a:prstGeom prst="rect">
-            <a:avLst/>
-          </a:prstGeom>
-          <a:noFill/>
-          <a:ln/>
-        </p:spPr>
-        <p:txBody>
-          <a:bodyPr wrap="square" lIns="0" tIns="0" rIns="0" bIns="0" rtlCol="0" anchor="ctr"/>
-          <a:lstStyle/>
-          <a:p>
-            <a:pPr indent="0" marL="0">
-              <a:buNone/>
-            </a:pPr>
-            <a:r>
-              <a:rPr lang="en-US" sz="2200" dirty="0">
-                <a:solidFill>
-                  <a:schemeClr val="tx1"/>
-                </a:solidFill>
-                <a:latin typeface="Meiryo" pitchFamily="34" charset="0"/>
-                <a:ea typeface="Meiryo" pitchFamily="34" charset="-122"/>
-                <a:cs typeface="Meiryo" pitchFamily="34" charset="-120"/>
-              </a:rPr>
-              <a:t>よろしくお願いします。</a:t>
-            </a:r>
-            <a:endParaRPr lang="en-US" sz="2200" dirty="0"/>
+              <a:t>사고 싶습니다</a:t>
+            </a:r>
+            <a:endParaRPr lang="en-US" sz="2600" dirty="0"/>
           </a:p>
         </p:txBody>
       </p:sp>
@@ -3142,7 +3497,7 @@
                   <a:schemeClr val="tx2"/>
                 </a:solidFill>
               </a:rPr>
-              <a:t>이렇게 진행해요</a:t>
+              <a:t>5문장은 이렇게 구성해요</a:t>
             </a:r>
             <a:endParaRPr lang="en-US" sz="4000" dirty="0"/>
           </a:p>
@@ -3150,27 +3505,49 @@
       </p:sp>
       <p:sp>
         <p:nvSpPr>
-          <p:cNvPr id="3" name="Step circle 1"/>
+          <p:cNvPr id="3" name="Cond row 1"/>
           <p:cNvSpPr/>
           <p:nvPr/>
         </p:nvSpPr>
         <p:spPr>
           <a:xfrm>
-            <a:off x="1280160" y="2011680"/>
-            <a:ext cx="1371600" cy="1371600"/>
+            <a:off x="548640" y="1463040"/>
+            <a:ext cx="11064240" cy="777240"/>
+          </a:xfrm>
+          <a:prstGeom prst="roundRect">
+            <a:avLst>
+              <a:gd name="adj" fmla="val 17647"/>
+            </a:avLst>
+          </a:prstGeom>
+          <a:solidFill>
+            <a:schemeClr val="bg2"/>
+          </a:solidFill>
+          <a:ln/>
+        </p:spPr>
+      </p:sp>
+      <p:sp>
+        <p:nvSpPr>
+          <p:cNvPr id="4" name="Cond 1 circle"/>
+          <p:cNvSpPr/>
+          <p:nvPr/>
+        </p:nvSpPr>
+        <p:spPr>
+          <a:xfrm>
+            <a:off x="731520" y="1554480"/>
+            <a:ext cx="594360" cy="594360"/>
           </a:xfrm>
           <a:prstGeom prst="ellipse">
             <a:avLst/>
           </a:prstGeom>
           <a:solidFill>
-            <a:schemeClr val="tx2"/>
+            <a:schemeClr val="accent1"/>
           </a:solidFill>
           <a:ln/>
         </p:spPr>
       </p:sp>
       <p:pic>
         <p:nvPicPr>
-          <p:cNvPr id="4" name="Step icon 1" descr="preencoded.png">    </p:cNvPr>
+          <p:cNvPr id="5" name="Cond 1 icon" descr="preencoded.png">    </p:cNvPr>
           <p:cNvPicPr>
             <a:picLocks noChangeAspect="1"/>
           </p:cNvPicPr>
@@ -3184,8 +3561,8 @@
         </p:blipFill>
         <p:spPr>
           <a:xfrm>
-            <a:off x="1600200" y="2331720"/>
-            <a:ext cx="731520" cy="731520"/>
+            <a:off x="880110" y="1703070"/>
+            <a:ext cx="297180" cy="297180"/>
           </a:xfrm>
           <a:prstGeom prst="rect">
             <a:avLst/>
@@ -3194,169 +3571,124 @@
       </p:pic>
       <p:sp>
         <p:nvSpPr>
-          <p:cNvPr id="5" name="Arrow 1"/>
+          <p:cNvPr id="6" name="Cond head 1"/>
+          <p:cNvSpPr txBox="1"/>
+          <p:nvPr/>
+        </p:nvSpPr>
+        <p:spPr>
+          <a:xfrm>
+            <a:off x="1554480" y="1463040"/>
+            <a:ext cx="2194560" cy="777240"/>
+          </a:xfrm>
+          <a:prstGeom prst="rect">
+            <a:avLst/>
+          </a:prstGeom>
+          <a:noFill/>
+          <a:ln/>
+        </p:spPr>
+        <p:txBody>
+          <a:bodyPr wrap="square" lIns="0" tIns="0" rIns="0" bIns="0" rtlCol="0" anchor="ctr"/>
+          <a:lstStyle/>
+          <a:p>
+            <a:pPr indent="0" marL="0">
+              <a:buNone/>
+            </a:pPr>
+            <a:r>
+              <a:rPr lang="en-US" sz="2800" b="1" dirty="0">
+                <a:solidFill>
+                  <a:schemeClr val="tx2"/>
+                </a:solidFill>
+              </a:rPr>
+              <a:t>장소</a:t>
+            </a:r>
+            <a:endParaRPr lang="en-US" sz="2800" dirty="0"/>
+          </a:p>
+        </p:txBody>
+      </p:sp>
+      <p:sp>
+        <p:nvSpPr>
+          <p:cNvPr id="7" name="Cond jp 1"/>
+          <p:cNvSpPr txBox="1"/>
+          <p:nvPr/>
+        </p:nvSpPr>
+        <p:spPr>
+          <a:xfrm>
+            <a:off x="3749040" y="1463040"/>
+            <a:ext cx="7680960" cy="777240"/>
+          </a:xfrm>
+          <a:prstGeom prst="rect">
+            <a:avLst/>
+          </a:prstGeom>
+          <a:noFill/>
+          <a:ln/>
+        </p:spPr>
+        <p:txBody>
+          <a:bodyPr wrap="square" lIns="0" tIns="0" rIns="0" bIns="0" rtlCol="0" anchor="ctr"/>
+          <a:lstStyle/>
+          <a:p>
+            <a:pPr indent="0" marL="0">
+              <a:buNone/>
+            </a:pPr>
+            <a:r>
+              <a:rPr lang="en-US" sz="2600" dirty="0">
+                <a:solidFill>
+                  <a:schemeClr val="tx1"/>
+                </a:solidFill>
+                <a:latin typeface="Meiryo" pitchFamily="34" charset="0"/>
+                <a:ea typeface="Meiryo" pitchFamily="34" charset="-122"/>
+                <a:cs typeface="Meiryo" pitchFamily="34" charset="-120"/>
+              </a:rPr>
+              <a:t>東京（とうきょう）タワーに 行（い）きたいです。</a:t>
+            </a:r>
+            <a:endParaRPr lang="en-US" sz="2600" dirty="0"/>
+          </a:p>
+        </p:txBody>
+      </p:sp>
+      <p:sp>
+        <p:nvSpPr>
+          <p:cNvPr id="8" name="Cond row 2"/>
           <p:cNvSpPr/>
           <p:nvPr/>
         </p:nvSpPr>
         <p:spPr>
-          <a:xfrm rot="5400000">
-            <a:off x="3063240" y="2514600"/>
-            <a:ext cx="365760" cy="365760"/>
-          </a:xfrm>
-          <a:prstGeom prst="triangle">
-            <a:avLst/>
+          <a:xfrm>
+            <a:off x="548640" y="2377440"/>
+            <a:ext cx="11064240" cy="777240"/>
+          </a:xfrm>
+          <a:prstGeom prst="roundRect">
+            <a:avLst>
+              <a:gd name="adj" fmla="val 17647"/>
+            </a:avLst>
           </a:prstGeom>
           <a:solidFill>
-            <a:schemeClr val="accent5"/>
+            <a:schemeClr val="bg2"/>
           </a:solidFill>
           <a:ln/>
         </p:spPr>
       </p:sp>
       <p:sp>
         <p:nvSpPr>
-          <p:cNvPr id="6" name="Step num 1"/>
-          <p:cNvSpPr txBox="1"/>
-          <p:nvPr/>
-        </p:nvSpPr>
-        <p:spPr>
-          <a:xfrm>
-            <a:off x="548640" y="3611880"/>
-            <a:ext cx="2834640" cy="457200"/>
-          </a:xfrm>
-          <a:prstGeom prst="rect">
-            <a:avLst/>
-          </a:prstGeom>
-          <a:noFill/>
-          <a:ln/>
-        </p:spPr>
-        <p:txBody>
-          <a:bodyPr wrap="square" lIns="0" tIns="0" rIns="0" bIns="0" rtlCol="0" anchor="ctr"/>
-          <a:lstStyle/>
-          <a:p>
-            <a:pPr algn="ctr" indent="0" marL="0">
-              <a:buNone/>
-            </a:pPr>
-            <a:r>
-              <a:rPr lang="en-US" sz="2200" b="1" dirty="0">
-                <a:solidFill>
-                  <a:schemeClr val="accent1"/>
-                </a:solidFill>
-              </a:rPr>
-              <a:t>1단계</a:t>
-            </a:r>
-            <a:endParaRPr lang="en-US" sz="2200" dirty="0"/>
-          </a:p>
-        </p:txBody>
-      </p:sp>
-      <p:sp>
-        <p:nvSpPr>
-          <p:cNvPr id="7" name="Step head 1"/>
-          <p:cNvSpPr txBox="1"/>
-          <p:nvPr/>
-        </p:nvSpPr>
-        <p:spPr>
-          <a:xfrm>
-            <a:off x="548640" y="4069080"/>
-            <a:ext cx="2834640" cy="685800"/>
-          </a:xfrm>
-          <a:prstGeom prst="rect">
-            <a:avLst/>
-          </a:prstGeom>
-          <a:noFill/>
-          <a:ln/>
-        </p:spPr>
-        <p:txBody>
-          <a:bodyPr wrap="square" lIns="0" tIns="0" rIns="0" bIns="0" rtlCol="0" anchor="ctr"/>
-          <a:lstStyle/>
-          <a:p>
-            <a:pPr algn="ctr" indent="0" marL="0">
-              <a:buNone/>
-            </a:pPr>
-            <a:r>
-              <a:rPr lang="en-US" sz="3200" b="1" dirty="0">
-                <a:solidFill>
-                  <a:schemeClr val="tx2"/>
-                </a:solidFill>
-              </a:rPr>
-              <a:t>원고 쓰기</a:t>
-            </a:r>
-            <a:endParaRPr lang="en-US" sz="3200" dirty="0"/>
-          </a:p>
-        </p:txBody>
-      </p:sp>
-      <p:sp>
-        <p:nvSpPr>
-          <p:cNvPr id="8" name="Step desc 1"/>
-          <p:cNvSpPr txBox="1"/>
-          <p:nvPr/>
-        </p:nvSpPr>
-        <p:spPr>
-          <a:xfrm>
-            <a:off x="548640" y="4846320"/>
-            <a:ext cx="2834640" cy="1188720"/>
-          </a:xfrm>
-          <a:prstGeom prst="rect">
-            <a:avLst/>
-          </a:prstGeom>
-          <a:noFill/>
-          <a:ln/>
-        </p:spPr>
-        <p:txBody>
-          <a:bodyPr wrap="square" lIns="0" tIns="0" rIns="0" bIns="0" rtlCol="0" anchor="t"/>
-          <a:lstStyle/>
-          <a:p>
-            <a:pPr algn="ctr" indent="0" marL="0">
-              <a:buNone/>
-            </a:pPr>
-            <a:r>
-              <a:rPr lang="en-US" sz="2400" dirty="0">
-                <a:solidFill>
-                  <a:schemeClr val="tx1"/>
-                </a:solidFill>
-              </a:rPr>
-              <a:t>수업 시간에</a:t>
-            </a:r>
-            <a:endParaRPr lang="en-US" sz="2400" dirty="0"/>
-          </a:p>
-          <a:p>
-            <a:pPr algn="ctr" indent="0" marL="0">
-              <a:buNone/>
-            </a:pPr>
-            <a:r>
-              <a:rPr lang="en-US" sz="2400" dirty="0">
-                <a:solidFill>
-                  <a:schemeClr val="tx1"/>
-                </a:solidFill>
-              </a:rPr>
-              <a:t>일본어로 작성</a:t>
-            </a:r>
-            <a:endParaRPr lang="en-US" sz="2400" dirty="0"/>
-          </a:p>
-        </p:txBody>
-      </p:sp>
-      <p:sp>
-        <p:nvSpPr>
-          <p:cNvPr id="9" name="Step circle 2"/>
+          <p:cNvPr id="9" name="Cond 2 circle"/>
           <p:cNvSpPr/>
           <p:nvPr/>
         </p:nvSpPr>
         <p:spPr>
           <a:xfrm>
-            <a:off x="4160520" y="2011680"/>
-            <a:ext cx="1371600" cy="1371600"/>
+            <a:off x="731520" y="2468880"/>
+            <a:ext cx="594360" cy="594360"/>
           </a:xfrm>
           <a:prstGeom prst="ellipse">
             <a:avLst/>
           </a:prstGeom>
           <a:solidFill>
-            <a:schemeClr val="tx2"/>
+            <a:schemeClr val="accent1"/>
           </a:solidFill>
           <a:ln/>
         </p:spPr>
       </p:sp>
       <p:pic>
         <p:nvPicPr>
-          <p:cNvPr id="10" name="Step icon 2" descr="preencoded.png">    </p:cNvPr>
+          <p:cNvPr id="10" name="Cond 2 icon" descr="preencoded.png">    </p:cNvPr>
           <p:cNvPicPr>
             <a:picLocks noChangeAspect="1"/>
           </p:cNvPicPr>
@@ -3370,8 +3702,8 @@
         </p:blipFill>
         <p:spPr>
           <a:xfrm>
-            <a:off x="4480560" y="2331720"/>
-            <a:ext cx="731520" cy="731520"/>
+            <a:off x="880110" y="2617470"/>
+            <a:ext cx="297180" cy="297180"/>
           </a:xfrm>
           <a:prstGeom prst="rect">
             <a:avLst/>
@@ -3380,169 +3712,124 @@
       </p:pic>
       <p:sp>
         <p:nvSpPr>
-          <p:cNvPr id="11" name="Arrow 2"/>
+          <p:cNvPr id="11" name="Cond head 2"/>
+          <p:cNvSpPr txBox="1"/>
+          <p:nvPr/>
+        </p:nvSpPr>
+        <p:spPr>
+          <a:xfrm>
+            <a:off x="1554480" y="2377440"/>
+            <a:ext cx="2194560" cy="777240"/>
+          </a:xfrm>
+          <a:prstGeom prst="rect">
+            <a:avLst/>
+          </a:prstGeom>
+          <a:noFill/>
+          <a:ln/>
+        </p:spPr>
+        <p:txBody>
+          <a:bodyPr wrap="square" lIns="0" tIns="0" rIns="0" bIns="0" rtlCol="0" anchor="ctr"/>
+          <a:lstStyle/>
+          <a:p>
+            <a:pPr indent="0" marL="0">
+              <a:buNone/>
+            </a:pPr>
+            <a:r>
+              <a:rPr lang="en-US" sz="2800" b="1" dirty="0">
+                <a:solidFill>
+                  <a:schemeClr val="tx2"/>
+                </a:solidFill>
+              </a:rPr>
+              <a:t>먹거리</a:t>
+            </a:r>
+            <a:endParaRPr lang="en-US" sz="2800" dirty="0"/>
+          </a:p>
+        </p:txBody>
+      </p:sp>
+      <p:sp>
+        <p:nvSpPr>
+          <p:cNvPr id="12" name="Cond jp 2"/>
+          <p:cNvSpPr txBox="1"/>
+          <p:nvPr/>
+        </p:nvSpPr>
+        <p:spPr>
+          <a:xfrm>
+            <a:off x="3749040" y="2377440"/>
+            <a:ext cx="7680960" cy="777240"/>
+          </a:xfrm>
+          <a:prstGeom prst="rect">
+            <a:avLst/>
+          </a:prstGeom>
+          <a:noFill/>
+          <a:ln/>
+        </p:spPr>
+        <p:txBody>
+          <a:bodyPr wrap="square" lIns="0" tIns="0" rIns="0" bIns="0" rtlCol="0" anchor="ctr"/>
+          <a:lstStyle/>
+          <a:p>
+            <a:pPr indent="0" marL="0">
+              <a:buNone/>
+            </a:pPr>
+            <a:r>
+              <a:rPr lang="en-US" sz="2600" dirty="0">
+                <a:solidFill>
+                  <a:schemeClr val="tx1"/>
+                </a:solidFill>
+                <a:latin typeface="Meiryo" pitchFamily="34" charset="0"/>
+                <a:ea typeface="Meiryo" pitchFamily="34" charset="-122"/>
+                <a:cs typeface="Meiryo" pitchFamily="34" charset="-120"/>
+              </a:rPr>
+              <a:t>たこやきを 食（た）べたいです。</a:t>
+            </a:r>
+            <a:endParaRPr lang="en-US" sz="2600" dirty="0"/>
+          </a:p>
+        </p:txBody>
+      </p:sp>
+      <p:sp>
+        <p:nvSpPr>
+          <p:cNvPr id="13" name="Cond row 3"/>
           <p:cNvSpPr/>
           <p:nvPr/>
         </p:nvSpPr>
         <p:spPr>
-          <a:xfrm rot="5400000">
-            <a:off x="5943600" y="2514600"/>
-            <a:ext cx="365760" cy="365760"/>
-          </a:xfrm>
-          <a:prstGeom prst="triangle">
-            <a:avLst/>
+          <a:xfrm>
+            <a:off x="548640" y="3291840"/>
+            <a:ext cx="11064240" cy="777240"/>
+          </a:xfrm>
+          <a:prstGeom prst="roundRect">
+            <a:avLst>
+              <a:gd name="adj" fmla="val 17647"/>
+            </a:avLst>
           </a:prstGeom>
           <a:solidFill>
-            <a:schemeClr val="accent5"/>
+            <a:schemeClr val="bg2"/>
           </a:solidFill>
           <a:ln/>
         </p:spPr>
       </p:sp>
       <p:sp>
         <p:nvSpPr>
-          <p:cNvPr id="12" name="Step num 2"/>
-          <p:cNvSpPr txBox="1"/>
-          <p:nvPr/>
-        </p:nvSpPr>
-        <p:spPr>
-          <a:xfrm>
-            <a:off x="3429000" y="3611880"/>
-            <a:ext cx="2834640" cy="457200"/>
-          </a:xfrm>
-          <a:prstGeom prst="rect">
-            <a:avLst/>
-          </a:prstGeom>
-          <a:noFill/>
-          <a:ln/>
-        </p:spPr>
-        <p:txBody>
-          <a:bodyPr wrap="square" lIns="0" tIns="0" rIns="0" bIns="0" rtlCol="0" anchor="ctr"/>
-          <a:lstStyle/>
-          <a:p>
-            <a:pPr algn="ctr" indent="0" marL="0">
-              <a:buNone/>
-            </a:pPr>
-            <a:r>
-              <a:rPr lang="en-US" sz="2200" b="1" dirty="0">
-                <a:solidFill>
-                  <a:schemeClr val="accent1"/>
-                </a:solidFill>
-              </a:rPr>
-              <a:t>2단계</a:t>
-            </a:r>
-            <a:endParaRPr lang="en-US" sz="2200" dirty="0"/>
-          </a:p>
-        </p:txBody>
-      </p:sp>
-      <p:sp>
-        <p:nvSpPr>
-          <p:cNvPr id="13" name="Step head 2"/>
-          <p:cNvSpPr txBox="1"/>
-          <p:nvPr/>
-        </p:nvSpPr>
-        <p:spPr>
-          <a:xfrm>
-            <a:off x="3429000" y="4069080"/>
-            <a:ext cx="2834640" cy="685800"/>
-          </a:xfrm>
-          <a:prstGeom prst="rect">
-            <a:avLst/>
-          </a:prstGeom>
-          <a:noFill/>
-          <a:ln/>
-        </p:spPr>
-        <p:txBody>
-          <a:bodyPr wrap="square" lIns="0" tIns="0" rIns="0" bIns="0" rtlCol="0" anchor="ctr"/>
-          <a:lstStyle/>
-          <a:p>
-            <a:pPr algn="ctr" indent="0" marL="0">
-              <a:buNone/>
-            </a:pPr>
-            <a:r>
-              <a:rPr lang="en-US" sz="3200" b="1" dirty="0">
-                <a:solidFill>
-                  <a:schemeClr val="tx2"/>
-                </a:solidFill>
-              </a:rPr>
-              <a:t>피드백</a:t>
-            </a:r>
-            <a:endParaRPr lang="en-US" sz="3200" dirty="0"/>
-          </a:p>
-        </p:txBody>
-      </p:sp>
-      <p:sp>
-        <p:nvSpPr>
-          <p:cNvPr id="14" name="Step desc 2"/>
-          <p:cNvSpPr txBox="1"/>
-          <p:nvPr/>
-        </p:nvSpPr>
-        <p:spPr>
-          <a:xfrm>
-            <a:off x="3429000" y="4846320"/>
-            <a:ext cx="2834640" cy="1188720"/>
-          </a:xfrm>
-          <a:prstGeom prst="rect">
-            <a:avLst/>
-          </a:prstGeom>
-          <a:noFill/>
-          <a:ln/>
-        </p:spPr>
-        <p:txBody>
-          <a:bodyPr wrap="square" lIns="0" tIns="0" rIns="0" bIns="0" rtlCol="0" anchor="t"/>
-          <a:lstStyle/>
-          <a:p>
-            <a:pPr algn="ctr" indent="0" marL="0">
-              <a:buNone/>
-            </a:pPr>
-            <a:r>
-              <a:rPr lang="en-US" sz="2400" dirty="0">
-                <a:solidFill>
-                  <a:schemeClr val="tx1"/>
-                </a:solidFill>
-              </a:rPr>
-              <a:t>선생님께</a:t>
-            </a:r>
-            <a:endParaRPr lang="en-US" sz="2400" dirty="0"/>
-          </a:p>
-          <a:p>
-            <a:pPr algn="ctr" indent="0" marL="0">
-              <a:buNone/>
-            </a:pPr>
-            <a:r>
-              <a:rPr lang="en-US" sz="2400" dirty="0">
-                <a:solidFill>
-                  <a:schemeClr val="tx1"/>
-                </a:solidFill>
-              </a:rPr>
-              <a:t>원고 점검받기</a:t>
-            </a:r>
-            <a:endParaRPr lang="en-US" sz="2400" dirty="0"/>
-          </a:p>
-        </p:txBody>
-      </p:sp>
-      <p:sp>
-        <p:nvSpPr>
-          <p:cNvPr id="15" name="Step circle 3"/>
+          <p:cNvPr id="14" name="Cond 3 circle"/>
           <p:cNvSpPr/>
           <p:nvPr/>
         </p:nvSpPr>
         <p:spPr>
           <a:xfrm>
-            <a:off x="7040880" y="2011680"/>
-            <a:ext cx="1371600" cy="1371600"/>
+            <a:off x="731520" y="3383280"/>
+            <a:ext cx="594360" cy="594360"/>
           </a:xfrm>
           <a:prstGeom prst="ellipse">
             <a:avLst/>
           </a:prstGeom>
           <a:solidFill>
-            <a:schemeClr val="tx2"/>
+            <a:schemeClr val="accent1"/>
           </a:solidFill>
           <a:ln/>
         </p:spPr>
       </p:sp>
       <p:pic>
         <p:nvPicPr>
-          <p:cNvPr id="16" name="Step icon 3" descr="preencoded.png">    </p:cNvPr>
+          <p:cNvPr id="15" name="Cond 3 icon" descr="preencoded.png">    </p:cNvPr>
           <p:cNvPicPr>
             <a:picLocks noChangeAspect="1"/>
           </p:cNvPicPr>
@@ -3556,8 +3843,8 @@
         </p:blipFill>
         <p:spPr>
           <a:xfrm>
-            <a:off x="7360920" y="2331720"/>
-            <a:ext cx="731520" cy="731520"/>
+            <a:off x="880110" y="3531870"/>
+            <a:ext cx="297180" cy="297180"/>
           </a:xfrm>
           <a:prstGeom prst="rect">
             <a:avLst/>
@@ -3566,156 +3853,111 @@
       </p:pic>
       <p:sp>
         <p:nvSpPr>
-          <p:cNvPr id="17" name="Arrow 3"/>
+          <p:cNvPr id="16" name="Cond head 3"/>
+          <p:cNvSpPr txBox="1"/>
+          <p:nvPr/>
+        </p:nvSpPr>
+        <p:spPr>
+          <a:xfrm>
+            <a:off x="1554480" y="3291840"/>
+            <a:ext cx="2194560" cy="777240"/>
+          </a:xfrm>
+          <a:prstGeom prst="rect">
+            <a:avLst/>
+          </a:prstGeom>
+          <a:noFill/>
+          <a:ln/>
+        </p:spPr>
+        <p:txBody>
+          <a:bodyPr wrap="square" lIns="0" tIns="0" rIns="0" bIns="0" rtlCol="0" anchor="ctr"/>
+          <a:lstStyle/>
+          <a:p>
+            <a:pPr indent="0" marL="0">
+              <a:buNone/>
+            </a:pPr>
+            <a:r>
+              <a:rPr lang="en-US" sz="2800" b="1" dirty="0">
+                <a:solidFill>
+                  <a:schemeClr val="tx2"/>
+                </a:solidFill>
+              </a:rPr>
+              <a:t>볼거리</a:t>
+            </a:r>
+            <a:endParaRPr lang="en-US" sz="2800" dirty="0"/>
+          </a:p>
+        </p:txBody>
+      </p:sp>
+      <p:sp>
+        <p:nvSpPr>
+          <p:cNvPr id="17" name="Cond jp 3"/>
+          <p:cNvSpPr txBox="1"/>
+          <p:nvPr/>
+        </p:nvSpPr>
+        <p:spPr>
+          <a:xfrm>
+            <a:off x="3749040" y="3291840"/>
+            <a:ext cx="7680960" cy="777240"/>
+          </a:xfrm>
+          <a:prstGeom prst="rect">
+            <a:avLst/>
+          </a:prstGeom>
+          <a:noFill/>
+          <a:ln/>
+        </p:spPr>
+        <p:txBody>
+          <a:bodyPr wrap="square" lIns="0" tIns="0" rIns="0" bIns="0" rtlCol="0" anchor="ctr"/>
+          <a:lstStyle/>
+          <a:p>
+            <a:pPr indent="0" marL="0">
+              <a:buNone/>
+            </a:pPr>
+            <a:r>
+              <a:rPr lang="en-US" sz="2600" dirty="0">
+                <a:solidFill>
+                  <a:schemeClr val="tx1"/>
+                </a:solidFill>
+                <a:latin typeface="Meiryo" pitchFamily="34" charset="0"/>
+                <a:ea typeface="Meiryo" pitchFamily="34" charset="-122"/>
+                <a:cs typeface="Meiryo" pitchFamily="34" charset="-120"/>
+              </a:rPr>
+              <a:t>富士山（ふじさん）を 見（み）たいです。</a:t>
+            </a:r>
+            <a:endParaRPr lang="en-US" sz="2600" dirty="0"/>
+          </a:p>
+        </p:txBody>
+      </p:sp>
+      <p:sp>
+        <p:nvSpPr>
+          <p:cNvPr id="18" name="Cond row 4"/>
           <p:cNvSpPr/>
           <p:nvPr/>
         </p:nvSpPr>
         <p:spPr>
-          <a:xfrm rot="5400000">
-            <a:off x="8823960" y="2514600"/>
-            <a:ext cx="365760" cy="365760"/>
-          </a:xfrm>
-          <a:prstGeom prst="triangle">
-            <a:avLst/>
+          <a:xfrm>
+            <a:off x="548640" y="4206240"/>
+            <a:ext cx="11064240" cy="777240"/>
+          </a:xfrm>
+          <a:prstGeom prst="roundRect">
+            <a:avLst>
+              <a:gd name="adj" fmla="val 17647"/>
+            </a:avLst>
           </a:prstGeom>
           <a:solidFill>
-            <a:schemeClr val="accent5"/>
+            <a:schemeClr val="bg2"/>
           </a:solidFill>
           <a:ln/>
         </p:spPr>
       </p:sp>
       <p:sp>
         <p:nvSpPr>
-          <p:cNvPr id="18" name="Step num 3"/>
-          <p:cNvSpPr txBox="1"/>
-          <p:nvPr/>
-        </p:nvSpPr>
-        <p:spPr>
-          <a:xfrm>
-            <a:off x="6309360" y="3611880"/>
-            <a:ext cx="2834640" cy="457200"/>
-          </a:xfrm>
-          <a:prstGeom prst="rect">
-            <a:avLst/>
-          </a:prstGeom>
-          <a:noFill/>
-          <a:ln/>
-        </p:spPr>
-        <p:txBody>
-          <a:bodyPr wrap="square" lIns="0" tIns="0" rIns="0" bIns="0" rtlCol="0" anchor="ctr"/>
-          <a:lstStyle/>
-          <a:p>
-            <a:pPr algn="ctr" indent="0" marL="0">
-              <a:buNone/>
-            </a:pPr>
-            <a:r>
-              <a:rPr lang="en-US" sz="2200" b="1" dirty="0">
-                <a:solidFill>
-                  <a:schemeClr val="accent1"/>
-                </a:solidFill>
-              </a:rPr>
-              <a:t>3단계</a:t>
-            </a:r>
-            <a:endParaRPr lang="en-US" sz="2200" dirty="0"/>
-          </a:p>
-        </p:txBody>
-      </p:sp>
-      <p:sp>
-        <p:nvSpPr>
-          <p:cNvPr id="19" name="Step head 3"/>
-          <p:cNvSpPr txBox="1"/>
-          <p:nvPr/>
-        </p:nvSpPr>
-        <p:spPr>
-          <a:xfrm>
-            <a:off x="6309360" y="4069080"/>
-            <a:ext cx="2834640" cy="685800"/>
-          </a:xfrm>
-          <a:prstGeom prst="rect">
-            <a:avLst/>
-          </a:prstGeom>
-          <a:noFill/>
-          <a:ln/>
-        </p:spPr>
-        <p:txBody>
-          <a:bodyPr wrap="square" lIns="0" tIns="0" rIns="0" bIns="0" rtlCol="0" anchor="ctr"/>
-          <a:lstStyle/>
-          <a:p>
-            <a:pPr algn="ctr" indent="0" marL="0">
-              <a:buNone/>
-            </a:pPr>
-            <a:r>
-              <a:rPr lang="en-US" sz="3200" b="1" dirty="0">
-                <a:solidFill>
-                  <a:schemeClr val="tx2"/>
-                </a:solidFill>
-              </a:rPr>
-              <a:t>연습하기</a:t>
-            </a:r>
-            <a:endParaRPr lang="en-US" sz="3200" dirty="0"/>
-          </a:p>
-        </p:txBody>
-      </p:sp>
-      <p:sp>
-        <p:nvSpPr>
-          <p:cNvPr id="20" name="Step desc 3"/>
-          <p:cNvSpPr txBox="1"/>
-          <p:nvPr/>
-        </p:nvSpPr>
-        <p:spPr>
-          <a:xfrm>
-            <a:off x="6309360" y="4846320"/>
-            <a:ext cx="2834640" cy="1188720"/>
-          </a:xfrm>
-          <a:prstGeom prst="rect">
-            <a:avLst/>
-          </a:prstGeom>
-          <a:noFill/>
-          <a:ln/>
-        </p:spPr>
-        <p:txBody>
-          <a:bodyPr wrap="square" lIns="0" tIns="0" rIns="0" bIns="0" rtlCol="0" anchor="t"/>
-          <a:lstStyle/>
-          <a:p>
-            <a:pPr algn="ctr" indent="0" marL="0">
-              <a:buNone/>
-            </a:pPr>
-            <a:r>
-              <a:rPr lang="en-US" sz="2400" dirty="0">
-                <a:solidFill>
-                  <a:schemeClr val="tx1"/>
-                </a:solidFill>
-              </a:rPr>
-              <a:t>외워서</a:t>
-            </a:r>
-            <a:endParaRPr lang="en-US" sz="2400" dirty="0"/>
-          </a:p>
-          <a:p>
-            <a:pPr algn="ctr" indent="0" marL="0">
-              <a:buNone/>
-            </a:pPr>
-            <a:r>
-              <a:rPr lang="en-US" sz="2400" dirty="0">
-                <a:solidFill>
-                  <a:schemeClr val="tx1"/>
-                </a:solidFill>
-              </a:rPr>
-              <a:t>소리 내어 연습</a:t>
-            </a:r>
-            <a:endParaRPr lang="en-US" sz="2400" dirty="0"/>
-          </a:p>
-        </p:txBody>
-      </p:sp>
-      <p:sp>
-        <p:nvSpPr>
-          <p:cNvPr id="21" name="Step circle 4"/>
+          <p:cNvPr id="19" name="Cond 4 circle"/>
           <p:cNvSpPr/>
           <p:nvPr/>
         </p:nvSpPr>
         <p:spPr>
           <a:xfrm>
-            <a:off x="9921240" y="2011680"/>
-            <a:ext cx="1371600" cy="1371600"/>
+            <a:off x="731520" y="4297680"/>
+            <a:ext cx="594360" cy="594360"/>
           </a:xfrm>
           <a:prstGeom prst="ellipse">
             <a:avLst/>
@@ -3728,7 +3970,7 @@
       </p:sp>
       <p:pic>
         <p:nvPicPr>
-          <p:cNvPr id="22" name="Step icon 4" descr="preencoded.png">    </p:cNvPr>
+          <p:cNvPr id="20" name="Cond 4 icon" descr="preencoded.png">    </p:cNvPr>
           <p:cNvPicPr>
             <a:picLocks noChangeAspect="1"/>
           </p:cNvPicPr>
@@ -3742,8 +3984,8 @@
         </p:blipFill>
         <p:spPr>
           <a:xfrm>
-            <a:off x="10241280" y="2331720"/>
-            <a:ext cx="731520" cy="731520"/>
+            <a:off x="880110" y="4446270"/>
+            <a:ext cx="297180" cy="297180"/>
           </a:xfrm>
           <a:prstGeom prst="rect">
             <a:avLst/>
@@ -3752,14 +3994,14 @@
       </p:pic>
       <p:sp>
         <p:nvSpPr>
-          <p:cNvPr id="23" name="Step num 4"/>
+          <p:cNvPr id="21" name="Cond head 4"/>
           <p:cNvSpPr txBox="1"/>
           <p:nvPr/>
         </p:nvSpPr>
         <p:spPr>
           <a:xfrm>
-            <a:off x="9189720" y="3611880"/>
-            <a:ext cx="2834640" cy="457200"/>
+            <a:off x="1554480" y="4206240"/>
+            <a:ext cx="2194560" cy="777240"/>
           </a:xfrm>
           <a:prstGeom prst="rect">
             <a:avLst/>
@@ -3771,31 +4013,31 @@
           <a:bodyPr wrap="square" lIns="0" tIns="0" rIns="0" bIns="0" rtlCol="0" anchor="ctr"/>
           <a:lstStyle/>
           <a:p>
-            <a:pPr algn="ctr" indent="0" marL="0">
-              <a:buNone/>
-            </a:pPr>
-            <a:r>
-              <a:rPr lang="en-US" sz="2200" b="1" dirty="0">
-                <a:solidFill>
-                  <a:schemeClr val="accent1"/>
-                </a:solidFill>
-              </a:rPr>
-              <a:t>4단계</a:t>
-            </a:r>
-            <a:endParaRPr lang="en-US" sz="2200" dirty="0"/>
-          </a:p>
-        </p:txBody>
-      </p:sp>
-      <p:sp>
-        <p:nvSpPr>
-          <p:cNvPr id="24" name="Step head 4"/>
+            <a:pPr indent="0" marL="0">
+              <a:buNone/>
+            </a:pPr>
+            <a:r>
+              <a:rPr lang="en-US" sz="2800" b="1" dirty="0">
+                <a:solidFill>
+                  <a:schemeClr val="tx2"/>
+                </a:solidFill>
+              </a:rPr>
+              <a:t>살 거리</a:t>
+            </a:r>
+            <a:endParaRPr lang="en-US" sz="2800" dirty="0"/>
+          </a:p>
+        </p:txBody>
+      </p:sp>
+      <p:sp>
+        <p:nvSpPr>
+          <p:cNvPr id="22" name="Cond jp 4"/>
           <p:cNvSpPr txBox="1"/>
           <p:nvPr/>
         </p:nvSpPr>
         <p:spPr>
           <a:xfrm>
-            <a:off x="9189720" y="4069080"/>
-            <a:ext cx="2834640" cy="685800"/>
+            <a:off x="3749040" y="4206240"/>
+            <a:ext cx="7680960" cy="777240"/>
           </a:xfrm>
           <a:prstGeom prst="rect">
             <a:avLst/>
@@ -3807,68 +4049,198 @@
           <a:bodyPr wrap="square" lIns="0" tIns="0" rIns="0" bIns="0" rtlCol="0" anchor="ctr"/>
           <a:lstStyle/>
           <a:p>
-            <a:pPr algn="ctr" indent="0" marL="0">
-              <a:buNone/>
-            </a:pPr>
-            <a:r>
-              <a:rPr lang="en-US" sz="3200" b="1" dirty="0">
+            <a:pPr indent="0" marL="0">
+              <a:buNone/>
+            </a:pPr>
+            <a:r>
+              <a:rPr lang="en-US" sz="2600" dirty="0">
+                <a:solidFill>
+                  <a:schemeClr val="tx1"/>
+                </a:solidFill>
+                <a:latin typeface="Meiryo" pitchFamily="34" charset="0"/>
+                <a:ea typeface="Meiryo" pitchFamily="34" charset="-122"/>
+                <a:cs typeface="Meiryo" pitchFamily="34" charset="-120"/>
+              </a:rPr>
+              <a:t>おみやげを 買（か）いたいです。</a:t>
+            </a:r>
+            <a:endParaRPr lang="en-US" sz="2600" dirty="0"/>
+          </a:p>
+        </p:txBody>
+      </p:sp>
+      <p:sp>
+        <p:nvSpPr>
+          <p:cNvPr id="23" name="Cond row 5"/>
+          <p:cNvSpPr/>
+          <p:nvPr/>
+        </p:nvSpPr>
+        <p:spPr>
+          <a:xfrm>
+            <a:off x="548640" y="5120640"/>
+            <a:ext cx="11064240" cy="777240"/>
+          </a:xfrm>
+          <a:prstGeom prst="roundRect">
+            <a:avLst>
+              <a:gd name="adj" fmla="val 17647"/>
+            </a:avLst>
+          </a:prstGeom>
+          <a:solidFill>
+            <a:schemeClr val="bg2"/>
+          </a:solidFill>
+          <a:ln/>
+        </p:spPr>
+      </p:sp>
+      <p:sp>
+        <p:nvSpPr>
+          <p:cNvPr id="24" name="Cond 5 circle"/>
+          <p:cNvSpPr/>
+          <p:nvPr/>
+        </p:nvSpPr>
+        <p:spPr>
+          <a:xfrm>
+            <a:off x="731520" y="5212080"/>
+            <a:ext cx="594360" cy="594360"/>
+          </a:xfrm>
+          <a:prstGeom prst="ellipse">
+            <a:avLst/>
+          </a:prstGeom>
+          <a:solidFill>
+            <a:schemeClr val="accent1"/>
+          </a:solidFill>
+          <a:ln/>
+        </p:spPr>
+      </p:sp>
+      <p:pic>
+        <p:nvPicPr>
+          <p:cNvPr id="25" name="Cond 5 icon" descr="preencoded.png">    </p:cNvPr>
+          <p:cNvPicPr>
+            <a:picLocks noChangeAspect="1"/>
+          </p:cNvPicPr>
+          <p:nvPr/>
+        </p:nvPicPr>
+        <p:blipFill>
+          <a:blip r:embed="rId5"/>
+          <a:stretch>
+            <a:fillRect/>
+          </a:stretch>
+        </p:blipFill>
+        <p:spPr>
+          <a:xfrm>
+            <a:off x="880110" y="5360670"/>
+            <a:ext cx="297180" cy="297180"/>
+          </a:xfrm>
+          <a:prstGeom prst="rect">
+            <a:avLst/>
+          </a:prstGeom>
+        </p:spPr>
+      </p:pic>
+      <p:sp>
+        <p:nvSpPr>
+          <p:cNvPr id="26" name="Cond head 5"/>
+          <p:cNvSpPr txBox="1"/>
+          <p:nvPr/>
+        </p:nvSpPr>
+        <p:spPr>
+          <a:xfrm>
+            <a:off x="1554480" y="5120640"/>
+            <a:ext cx="2194560" cy="777240"/>
+          </a:xfrm>
+          <a:prstGeom prst="rect">
+            <a:avLst/>
+          </a:prstGeom>
+          <a:noFill/>
+          <a:ln/>
+        </p:spPr>
+        <p:txBody>
+          <a:bodyPr wrap="square" lIns="0" tIns="0" rIns="0" bIns="0" rtlCol="0" anchor="ctr"/>
+          <a:lstStyle/>
+          <a:p>
+            <a:pPr indent="0" marL="0">
+              <a:buNone/>
+            </a:pPr>
+            <a:r>
+              <a:rPr lang="en-US" sz="2800" b="1" dirty="0">
                 <a:solidFill>
                   <a:schemeClr val="tx2"/>
                 </a:solidFill>
               </a:rPr>
-              <a:t>발표하기</a:t>
-            </a:r>
-            <a:endParaRPr lang="en-US" sz="3200" dirty="0"/>
-          </a:p>
-        </p:txBody>
-      </p:sp>
-      <p:sp>
-        <p:nvSpPr>
-          <p:cNvPr id="25" name="Step desc 4"/>
+              <a:t>자유 문장</a:t>
+            </a:r>
+            <a:endParaRPr lang="en-US" sz="2800" dirty="0"/>
+          </a:p>
+        </p:txBody>
+      </p:sp>
+      <p:sp>
+        <p:nvSpPr>
+          <p:cNvPr id="27" name="Cond jp 5"/>
           <p:cNvSpPr txBox="1"/>
           <p:nvPr/>
         </p:nvSpPr>
         <p:spPr>
           <a:xfrm>
-            <a:off x="9189720" y="4846320"/>
-            <a:ext cx="2834640" cy="1188720"/>
-          </a:xfrm>
-          <a:prstGeom prst="rect">
-            <a:avLst/>
-          </a:prstGeom>
-          <a:noFill/>
-          <a:ln/>
-        </p:spPr>
-        <p:txBody>
-          <a:bodyPr wrap="square" lIns="0" tIns="0" rIns="0" bIns="0" rtlCol="0" anchor="t"/>
-          <a:lstStyle/>
-          <a:p>
-            <a:pPr algn="ctr" indent="0" marL="0">
-              <a:buNone/>
-            </a:pPr>
-            <a:r>
-              <a:rPr lang="en-US" sz="2400" dirty="0">
+            <a:off x="3749040" y="5120640"/>
+            <a:ext cx="7680960" cy="777240"/>
+          </a:xfrm>
+          <a:prstGeom prst="rect">
+            <a:avLst/>
+          </a:prstGeom>
+          <a:noFill/>
+          <a:ln/>
+        </p:spPr>
+        <p:txBody>
+          <a:bodyPr wrap="square" lIns="0" tIns="0" rIns="0" bIns="0" rtlCol="0" anchor="ctr"/>
+          <a:lstStyle/>
+          <a:p>
+            <a:pPr indent="0" marL="0">
+              <a:buNone/>
+            </a:pPr>
+            <a:r>
+              <a:rPr lang="en-US" sz="2600" dirty="0">
                 <a:solidFill>
                   <a:schemeClr val="tx1"/>
                 </a:solidFill>
-              </a:rPr>
-              <a:t>앞에 나와서</a:t>
-            </a:r>
-            <a:endParaRPr lang="en-US" sz="2400" dirty="0"/>
-          </a:p>
-          <a:p>
-            <a:pPr algn="ctr" indent="0" marL="0">
-              <a:buNone/>
-            </a:pPr>
-            <a:r>
-              <a:rPr lang="en-US" sz="2400" dirty="0">
-                <a:solidFill>
-                  <a:schemeClr val="tx1"/>
-                </a:solidFill>
-              </a:rPr>
-              <a:t>1분 발표</a:t>
-            </a:r>
-            <a:endParaRPr lang="en-US" sz="2400" dirty="0"/>
+                <a:latin typeface="Meiryo" pitchFamily="34" charset="0"/>
+                <a:ea typeface="Meiryo" pitchFamily="34" charset="-122"/>
+                <a:cs typeface="Meiryo" pitchFamily="34" charset="-120"/>
+              </a:rPr>
+              <a:t>着物（きもの）を 着（き）たいです。</a:t>
+            </a:r>
+            <a:endParaRPr lang="en-US" sz="2600" dirty="0"/>
+          </a:p>
+        </p:txBody>
+      </p:sp>
+      <p:sp>
+        <p:nvSpPr>
+          <p:cNvPr id="28" name="Cond note"/>
+          <p:cNvSpPr txBox="1"/>
+          <p:nvPr/>
+        </p:nvSpPr>
+        <p:spPr>
+          <a:xfrm>
+            <a:off x="548640" y="6035040"/>
+            <a:ext cx="10332720" cy="411480"/>
+          </a:xfrm>
+          <a:prstGeom prst="rect">
+            <a:avLst/>
+          </a:prstGeom>
+          <a:noFill/>
+          <a:ln/>
+        </p:spPr>
+        <p:txBody>
+          <a:bodyPr wrap="square" lIns="0" tIns="0" rIns="0" bIns="0" rtlCol="0" anchor="ctr"/>
+          <a:lstStyle/>
+          <a:p>
+            <a:pPr indent="0" marL="0">
+              <a:buNone/>
+            </a:pPr>
+            <a:r>
+              <a:rPr lang="en-US" sz="2000" dirty="0">
+                <a:solidFill>
+                  <a:schemeClr val="accent5"/>
+                </a:solidFill>
+              </a:rPr>
+              <a:t>※ 모둠활동에서 조사한 여행지 내용으로 써요 (위 문장은 예시)</a:t>
+            </a:r>
+            <a:endParaRPr lang="en-US" sz="2000" dirty="0"/>
           </a:p>
         </p:txBody>
       </p:sp>
@@ -3974,15 +4346,1989 @@
                   <a:schemeClr val="tx2"/>
                 </a:solidFill>
               </a:rPr>
-              <a:t>평가 기준 (20점 만점)</a:t>
+              <a:t>꼭 지켜야 할 규칙</a:t>
             </a:r>
             <a:endParaRPr lang="en-US" sz="4000" dirty="0"/>
+          </a:p>
+        </p:txBody>
+      </p:sp>
+      <p:sp>
+        <p:nvSpPr>
+          <p:cNvPr id="3" name="Rule card 1"/>
+          <p:cNvSpPr/>
+          <p:nvPr/>
+        </p:nvSpPr>
+        <p:spPr>
+          <a:xfrm>
+            <a:off x="548640" y="1554480"/>
+            <a:ext cx="3566160" cy="2148840"/>
+          </a:xfrm>
+          <a:prstGeom prst="roundRect">
+            <a:avLst>
+              <a:gd name="adj" fmla="val 6383"/>
+            </a:avLst>
+          </a:prstGeom>
+          <a:solidFill>
+            <a:schemeClr val="bg2"/>
+          </a:solidFill>
+          <a:ln/>
+        </p:spPr>
+      </p:sp>
+      <p:sp>
+        <p:nvSpPr>
+          <p:cNvPr id="4" name="Rule 1 circle"/>
+          <p:cNvSpPr/>
+          <p:nvPr/>
+        </p:nvSpPr>
+        <p:spPr>
+          <a:xfrm>
+            <a:off x="822960" y="1828800"/>
+            <a:ext cx="685800" cy="685800"/>
+          </a:xfrm>
+          <a:prstGeom prst="ellipse">
+            <a:avLst/>
+          </a:prstGeom>
+          <a:solidFill>
+            <a:schemeClr val="accent1"/>
+          </a:solidFill>
+          <a:ln/>
+        </p:spPr>
+      </p:sp>
+      <p:pic>
+        <p:nvPicPr>
+          <p:cNvPr id="5" name="Rule 1 icon" descr="preencoded.png">    </p:cNvPr>
+          <p:cNvPicPr>
+            <a:picLocks noChangeAspect="1"/>
+          </p:cNvPicPr>
+          <p:nvPr/>
+        </p:nvPicPr>
+        <p:blipFill>
+          <a:blip r:embed="rId1"/>
+          <a:stretch>
+            <a:fillRect/>
+          </a:stretch>
+        </p:blipFill>
+        <p:spPr>
+          <a:xfrm>
+            <a:off x="994410" y="2000250"/>
+            <a:ext cx="342900" cy="342900"/>
+          </a:xfrm>
+          <a:prstGeom prst="rect">
+            <a:avLst/>
+          </a:prstGeom>
+        </p:spPr>
+      </p:pic>
+      <p:sp>
+        <p:nvSpPr>
+          <p:cNvPr id="6" name="Rule head 1"/>
+          <p:cNvSpPr txBox="1"/>
+          <p:nvPr/>
+        </p:nvSpPr>
+        <p:spPr>
+          <a:xfrm>
+            <a:off x="1645920" y="1828800"/>
+            <a:ext cx="2377440" cy="685800"/>
+          </a:xfrm>
+          <a:prstGeom prst="rect">
+            <a:avLst/>
+          </a:prstGeom>
+          <a:noFill/>
+          <a:ln/>
+        </p:spPr>
+        <p:txBody>
+          <a:bodyPr wrap="square" lIns="0" tIns="0" rIns="0" bIns="0" rtlCol="0" anchor="ctr"/>
+          <a:lstStyle/>
+          <a:p>
+            <a:pPr indent="0" marL="0">
+              <a:buNone/>
+            </a:pPr>
+            <a:r>
+              <a:rPr lang="en-US" sz="2400" b="1" dirty="0">
+                <a:solidFill>
+                  <a:schemeClr val="tx2"/>
+                </a:solidFill>
+              </a:rPr>
+              <a:t>모둠 조사 내용</a:t>
+            </a:r>
+            <a:endParaRPr lang="en-US" sz="2400" dirty="0"/>
+          </a:p>
+        </p:txBody>
+      </p:sp>
+      <p:sp>
+        <p:nvSpPr>
+          <p:cNvPr id="7" name="Rule desc 1"/>
+          <p:cNvSpPr txBox="1"/>
+          <p:nvPr/>
+        </p:nvSpPr>
+        <p:spPr>
+          <a:xfrm>
+            <a:off x="822960" y="2651760"/>
+            <a:ext cx="3108960" cy="914400"/>
+          </a:xfrm>
+          <a:prstGeom prst="rect">
+            <a:avLst/>
+          </a:prstGeom>
+          <a:noFill/>
+          <a:ln/>
+        </p:spPr>
+        <p:txBody>
+          <a:bodyPr wrap="square" lIns="0" tIns="0" rIns="0" bIns="0" rtlCol="0" anchor="t"/>
+          <a:lstStyle/>
+          <a:p>
+            <a:pPr indent="0" marL="0">
+              <a:buNone/>
+            </a:pPr>
+            <a:r>
+              <a:rPr lang="en-US" sz="2200" dirty="0">
+                <a:solidFill>
+                  <a:schemeClr val="tx1"/>
+                </a:solidFill>
+              </a:rPr>
+              <a:t>우리 모둠이 조사한</a:t>
+            </a:r>
+            <a:endParaRPr lang="en-US" sz="2200" dirty="0"/>
+          </a:p>
+          <a:p>
+            <a:pPr indent="0" marL="0">
+              <a:buNone/>
+            </a:pPr>
+            <a:r>
+              <a:rPr lang="en-US" sz="2200" dirty="0">
+                <a:solidFill>
+                  <a:schemeClr val="tx1"/>
+                </a:solidFill>
+              </a:rPr>
+              <a:t>여행지로 쓰기</a:t>
+            </a:r>
+            <a:endParaRPr lang="en-US" sz="2200" dirty="0"/>
+          </a:p>
+        </p:txBody>
+      </p:sp>
+      <p:sp>
+        <p:nvSpPr>
+          <p:cNvPr id="8" name="Rule card 2"/>
+          <p:cNvSpPr/>
+          <p:nvPr/>
+        </p:nvSpPr>
+        <p:spPr>
+          <a:xfrm>
+            <a:off x="4297680" y="1554480"/>
+            <a:ext cx="3566160" cy="2148840"/>
+          </a:xfrm>
+          <a:prstGeom prst="roundRect">
+            <a:avLst>
+              <a:gd name="adj" fmla="val 6383"/>
+            </a:avLst>
+          </a:prstGeom>
+          <a:solidFill>
+            <a:schemeClr val="bg2"/>
+          </a:solidFill>
+          <a:ln/>
+        </p:spPr>
+      </p:sp>
+      <p:sp>
+        <p:nvSpPr>
+          <p:cNvPr id="9" name="Rule 2 circle"/>
+          <p:cNvSpPr/>
+          <p:nvPr/>
+        </p:nvSpPr>
+        <p:spPr>
+          <a:xfrm>
+            <a:off x="4572000" y="1828800"/>
+            <a:ext cx="685800" cy="685800"/>
+          </a:xfrm>
+          <a:prstGeom prst="ellipse">
+            <a:avLst/>
+          </a:prstGeom>
+          <a:solidFill>
+            <a:schemeClr val="accent1"/>
+          </a:solidFill>
+          <a:ln/>
+        </p:spPr>
+      </p:sp>
+      <p:pic>
+        <p:nvPicPr>
+          <p:cNvPr id="10" name="Rule 2 icon" descr="preencoded.png">    </p:cNvPr>
+          <p:cNvPicPr>
+            <a:picLocks noChangeAspect="1"/>
+          </p:cNvPicPr>
+          <p:nvPr/>
+        </p:nvPicPr>
+        <p:blipFill>
+          <a:blip r:embed="rId2"/>
+          <a:stretch>
+            <a:fillRect/>
+          </a:stretch>
+        </p:blipFill>
+        <p:spPr>
+          <a:xfrm>
+            <a:off x="4743450" y="2000250"/>
+            <a:ext cx="342900" cy="342900"/>
+          </a:xfrm>
+          <a:prstGeom prst="rect">
+            <a:avLst/>
+          </a:prstGeom>
+        </p:spPr>
+      </p:pic>
+      <p:sp>
+        <p:nvSpPr>
+          <p:cNvPr id="11" name="Rule head 2"/>
+          <p:cNvSpPr txBox="1"/>
+          <p:nvPr/>
+        </p:nvSpPr>
+        <p:spPr>
+          <a:xfrm>
+            <a:off x="5394960" y="1828800"/>
+            <a:ext cx="2377440" cy="685800"/>
+          </a:xfrm>
+          <a:prstGeom prst="rect">
+            <a:avLst/>
+          </a:prstGeom>
+          <a:noFill/>
+          <a:ln/>
+        </p:spPr>
+        <p:txBody>
+          <a:bodyPr wrap="square" lIns="0" tIns="0" rIns="0" bIns="0" rtlCol="0" anchor="ctr"/>
+          <a:lstStyle/>
+          <a:p>
+            <a:pPr indent="0" marL="0">
+              <a:buNone/>
+            </a:pPr>
+            <a:r>
+              <a:rPr lang="en-US" sz="2400" b="1" dirty="0">
+                <a:solidFill>
+                  <a:schemeClr val="tx2"/>
+                </a:solidFill>
+              </a:rPr>
+              <a:t>정중형 쓰기</a:t>
+            </a:r>
+            <a:endParaRPr lang="en-US" sz="2400" dirty="0"/>
+          </a:p>
+        </p:txBody>
+      </p:sp>
+      <p:sp>
+        <p:nvSpPr>
+          <p:cNvPr id="12" name="Rule desc 2"/>
+          <p:cNvSpPr txBox="1"/>
+          <p:nvPr/>
+        </p:nvSpPr>
+        <p:spPr>
+          <a:xfrm>
+            <a:off x="4572000" y="2651760"/>
+            <a:ext cx="3108960" cy="914400"/>
+          </a:xfrm>
+          <a:prstGeom prst="rect">
+            <a:avLst/>
+          </a:prstGeom>
+          <a:noFill/>
+          <a:ln/>
+        </p:spPr>
+        <p:txBody>
+          <a:bodyPr wrap="square" lIns="0" tIns="0" rIns="0" bIns="0" rtlCol="0" anchor="t"/>
+          <a:lstStyle/>
+          <a:p>
+            <a:pPr indent="0" marL="0">
+              <a:buNone/>
+            </a:pPr>
+            <a:r>
+              <a:rPr lang="en-US" sz="2200" dirty="0">
+                <a:solidFill>
+                  <a:schemeClr val="tx1"/>
+                </a:solidFill>
+              </a:rPr>
+              <a:t>〜たいです로</a:t>
+            </a:r>
+            <a:endParaRPr lang="en-US" sz="2200" dirty="0"/>
+          </a:p>
+          <a:p>
+            <a:pPr indent="0" marL="0">
+              <a:buNone/>
+            </a:pPr>
+            <a:r>
+              <a:rPr lang="en-US" sz="2200" dirty="0">
+                <a:solidFill>
+                  <a:schemeClr val="tx1"/>
+                </a:solidFill>
+              </a:rPr>
+              <a:t>쓰고 말하기</a:t>
+            </a:r>
+            <a:endParaRPr lang="en-US" sz="2200" dirty="0"/>
+          </a:p>
+        </p:txBody>
+      </p:sp>
+      <p:sp>
+        <p:nvSpPr>
+          <p:cNvPr id="13" name="Rule card 3"/>
+          <p:cNvSpPr/>
+          <p:nvPr/>
+        </p:nvSpPr>
+        <p:spPr>
+          <a:xfrm>
+            <a:off x="8046720" y="1554480"/>
+            <a:ext cx="3566160" cy="2148840"/>
+          </a:xfrm>
+          <a:prstGeom prst="roundRect">
+            <a:avLst>
+              <a:gd name="adj" fmla="val 6383"/>
+            </a:avLst>
+          </a:prstGeom>
+          <a:solidFill>
+            <a:schemeClr val="bg2"/>
+          </a:solidFill>
+          <a:ln/>
+        </p:spPr>
+      </p:sp>
+      <p:sp>
+        <p:nvSpPr>
+          <p:cNvPr id="14" name="Rule 3 circle"/>
+          <p:cNvSpPr/>
+          <p:nvPr/>
+        </p:nvSpPr>
+        <p:spPr>
+          <a:xfrm>
+            <a:off x="8321040" y="1828800"/>
+            <a:ext cx="685800" cy="685800"/>
+          </a:xfrm>
+          <a:prstGeom prst="ellipse">
+            <a:avLst/>
+          </a:prstGeom>
+          <a:solidFill>
+            <a:schemeClr val="accent1"/>
+          </a:solidFill>
+          <a:ln/>
+        </p:spPr>
+      </p:sp>
+      <p:pic>
+        <p:nvPicPr>
+          <p:cNvPr id="15" name="Rule 3 icon" descr="preencoded.png">    </p:cNvPr>
+          <p:cNvPicPr>
+            <a:picLocks noChangeAspect="1"/>
+          </p:cNvPicPr>
+          <p:nvPr/>
+        </p:nvPicPr>
+        <p:blipFill>
+          <a:blip r:embed="rId3"/>
+          <a:stretch>
+            <a:fillRect/>
+          </a:stretch>
+        </p:blipFill>
+        <p:spPr>
+          <a:xfrm>
+            <a:off x="8492490" y="2000250"/>
+            <a:ext cx="342900" cy="342900"/>
+          </a:xfrm>
+          <a:prstGeom prst="rect">
+            <a:avLst/>
+          </a:prstGeom>
+        </p:spPr>
+      </p:pic>
+      <p:sp>
+        <p:nvSpPr>
+          <p:cNvPr id="16" name="Rule head 3"/>
+          <p:cNvSpPr txBox="1"/>
+          <p:nvPr/>
+        </p:nvSpPr>
+        <p:spPr>
+          <a:xfrm>
+            <a:off x="9144000" y="1828800"/>
+            <a:ext cx="2377440" cy="685800"/>
+          </a:xfrm>
+          <a:prstGeom prst="rect">
+            <a:avLst/>
+          </a:prstGeom>
+          <a:noFill/>
+          <a:ln/>
+        </p:spPr>
+        <p:txBody>
+          <a:bodyPr wrap="square" lIns="0" tIns="0" rIns="0" bIns="0" rtlCol="0" anchor="ctr"/>
+          <a:lstStyle/>
+          <a:p>
+            <a:pPr indent="0" marL="0">
+              <a:buNone/>
+            </a:pPr>
+            <a:r>
+              <a:rPr lang="en-US" sz="2400" b="1" dirty="0">
+                <a:solidFill>
+                  <a:schemeClr val="tx2"/>
+                </a:solidFill>
+              </a:rPr>
+              <a:t>검정·파란 펜</a:t>
+            </a:r>
+            <a:endParaRPr lang="en-US" sz="2400" dirty="0"/>
+          </a:p>
+        </p:txBody>
+      </p:sp>
+      <p:sp>
+        <p:nvSpPr>
+          <p:cNvPr id="17" name="Rule desc 3"/>
+          <p:cNvSpPr txBox="1"/>
+          <p:nvPr/>
+        </p:nvSpPr>
+        <p:spPr>
+          <a:xfrm>
+            <a:off x="8321040" y="2651760"/>
+            <a:ext cx="3108960" cy="914400"/>
+          </a:xfrm>
+          <a:prstGeom prst="rect">
+            <a:avLst/>
+          </a:prstGeom>
+          <a:noFill/>
+          <a:ln/>
+        </p:spPr>
+        <p:txBody>
+          <a:bodyPr wrap="square" lIns="0" tIns="0" rIns="0" bIns="0" rtlCol="0" anchor="t"/>
+          <a:lstStyle/>
+          <a:p>
+            <a:pPr indent="0" marL="0">
+              <a:buNone/>
+            </a:pPr>
+            <a:r>
+              <a:rPr lang="en-US" sz="2200" dirty="0">
+                <a:solidFill>
+                  <a:schemeClr val="tx1"/>
+                </a:solidFill>
+              </a:rPr>
+              <a:t>다른 색 펜,</a:t>
+            </a:r>
+            <a:endParaRPr lang="en-US" sz="2200" dirty="0"/>
+          </a:p>
+          <a:p>
+            <a:pPr indent="0" marL="0">
+              <a:buNone/>
+            </a:pPr>
+            <a:r>
+              <a:rPr lang="en-US" sz="2200" dirty="0">
+                <a:solidFill>
+                  <a:schemeClr val="tx1"/>
+                </a:solidFill>
+              </a:rPr>
+              <a:t>연필은 안 돼요</a:t>
+            </a:r>
+            <a:endParaRPr lang="en-US" sz="2200" dirty="0"/>
+          </a:p>
+        </p:txBody>
+      </p:sp>
+      <p:sp>
+        <p:nvSpPr>
+          <p:cNvPr id="18" name="Rule card 4"/>
+          <p:cNvSpPr/>
+          <p:nvPr/>
+        </p:nvSpPr>
+        <p:spPr>
+          <a:xfrm>
+            <a:off x="548640" y="3931920"/>
+            <a:ext cx="3566160" cy="2148840"/>
+          </a:xfrm>
+          <a:prstGeom prst="roundRect">
+            <a:avLst>
+              <a:gd name="adj" fmla="val 6383"/>
+            </a:avLst>
+          </a:prstGeom>
+          <a:solidFill>
+            <a:schemeClr val="bg2"/>
+          </a:solidFill>
+          <a:ln/>
+        </p:spPr>
+      </p:sp>
+      <p:sp>
+        <p:nvSpPr>
+          <p:cNvPr id="19" name="Rule 4 circle"/>
+          <p:cNvSpPr/>
+          <p:nvPr/>
+        </p:nvSpPr>
+        <p:spPr>
+          <a:xfrm>
+            <a:off x="822960" y="4206240"/>
+            <a:ext cx="685800" cy="685800"/>
+          </a:xfrm>
+          <a:prstGeom prst="ellipse">
+            <a:avLst/>
+          </a:prstGeom>
+          <a:solidFill>
+            <a:schemeClr val="accent1"/>
+          </a:solidFill>
+          <a:ln/>
+        </p:spPr>
+      </p:sp>
+      <p:pic>
+        <p:nvPicPr>
+          <p:cNvPr id="20" name="Rule 4 icon" descr="preencoded.png">    </p:cNvPr>
+          <p:cNvPicPr>
+            <a:picLocks noChangeAspect="1"/>
+          </p:cNvPicPr>
+          <p:nvPr/>
+        </p:nvPicPr>
+        <p:blipFill>
+          <a:blip r:embed="rId4"/>
+          <a:stretch>
+            <a:fillRect/>
+          </a:stretch>
+        </p:blipFill>
+        <p:spPr>
+          <a:xfrm>
+            <a:off x="994410" y="4377690"/>
+            <a:ext cx="342900" cy="342900"/>
+          </a:xfrm>
+          <a:prstGeom prst="rect">
+            <a:avLst/>
+          </a:prstGeom>
+        </p:spPr>
+      </p:pic>
+      <p:sp>
+        <p:nvSpPr>
+          <p:cNvPr id="21" name="Rule head 4"/>
+          <p:cNvSpPr txBox="1"/>
+          <p:nvPr/>
+        </p:nvSpPr>
+        <p:spPr>
+          <a:xfrm>
+            <a:off x="1645920" y="4206240"/>
+            <a:ext cx="2377440" cy="685800"/>
+          </a:xfrm>
+          <a:prstGeom prst="rect">
+            <a:avLst/>
+          </a:prstGeom>
+          <a:noFill/>
+          <a:ln/>
+        </p:spPr>
+        <p:txBody>
+          <a:bodyPr wrap="square" lIns="0" tIns="0" rIns="0" bIns="0" rtlCol="0" anchor="ctr"/>
+          <a:lstStyle/>
+          <a:p>
+            <a:pPr indent="0" marL="0">
+              <a:buNone/>
+            </a:pPr>
+            <a:r>
+              <a:rPr lang="en-US" sz="2400" b="1" dirty="0">
+                <a:solidFill>
+                  <a:schemeClr val="tx2"/>
+                </a:solidFill>
+              </a:rPr>
+              <a:t>한자엔 히라가나</a:t>
+            </a:r>
+            <a:endParaRPr lang="en-US" sz="2400" dirty="0"/>
+          </a:p>
+        </p:txBody>
+      </p:sp>
+      <p:sp>
+        <p:nvSpPr>
+          <p:cNvPr id="22" name="Rule desc 4"/>
+          <p:cNvSpPr txBox="1"/>
+          <p:nvPr/>
+        </p:nvSpPr>
+        <p:spPr>
+          <a:xfrm>
+            <a:off x="822960" y="5029200"/>
+            <a:ext cx="3108960" cy="914400"/>
+          </a:xfrm>
+          <a:prstGeom prst="rect">
+            <a:avLst/>
+          </a:prstGeom>
+          <a:noFill/>
+          <a:ln/>
+        </p:spPr>
+        <p:txBody>
+          <a:bodyPr wrap="square" lIns="0" tIns="0" rIns="0" bIns="0" rtlCol="0" anchor="t"/>
+          <a:lstStyle/>
+          <a:p>
+            <a:pPr indent="0" marL="0">
+              <a:buNone/>
+            </a:pPr>
+            <a:r>
+              <a:rPr lang="en-US" sz="2200" dirty="0">
+                <a:solidFill>
+                  <a:schemeClr val="tx1"/>
+                </a:solidFill>
+              </a:rPr>
+              <a:t>한자에는 히라가나를</a:t>
+            </a:r>
+            <a:endParaRPr lang="en-US" sz="2200" dirty="0"/>
+          </a:p>
+          <a:p>
+            <a:pPr indent="0" marL="0">
+              <a:buNone/>
+            </a:pPr>
+            <a:r>
+              <a:rPr lang="en-US" sz="2200" dirty="0">
+                <a:solidFill>
+                  <a:schemeClr val="tx1"/>
+                </a:solidFill>
+              </a:rPr>
+              <a:t>함께 써야 인정</a:t>
+            </a:r>
+            <a:endParaRPr lang="en-US" sz="2200" dirty="0"/>
+          </a:p>
+        </p:txBody>
+      </p:sp>
+      <p:sp>
+        <p:nvSpPr>
+          <p:cNvPr id="23" name="Rule card 5"/>
+          <p:cNvSpPr/>
+          <p:nvPr/>
+        </p:nvSpPr>
+        <p:spPr>
+          <a:xfrm>
+            <a:off x="4297680" y="3931920"/>
+            <a:ext cx="3566160" cy="2148840"/>
+          </a:xfrm>
+          <a:prstGeom prst="roundRect">
+            <a:avLst>
+              <a:gd name="adj" fmla="val 6383"/>
+            </a:avLst>
+          </a:prstGeom>
+          <a:solidFill>
+            <a:schemeClr val="bg2"/>
+          </a:solidFill>
+          <a:ln/>
+        </p:spPr>
+      </p:sp>
+      <p:sp>
+        <p:nvSpPr>
+          <p:cNvPr id="24" name="Rule 5 circle"/>
+          <p:cNvSpPr/>
+          <p:nvPr/>
+        </p:nvSpPr>
+        <p:spPr>
+          <a:xfrm>
+            <a:off x="4572000" y="4206240"/>
+            <a:ext cx="685800" cy="685800"/>
+          </a:xfrm>
+          <a:prstGeom prst="ellipse">
+            <a:avLst/>
+          </a:prstGeom>
+          <a:solidFill>
+            <a:schemeClr val="accent1"/>
+          </a:solidFill>
+          <a:ln/>
+        </p:spPr>
+      </p:sp>
+      <p:pic>
+        <p:nvPicPr>
+          <p:cNvPr id="25" name="Rule 5 icon" descr="preencoded.png">    </p:cNvPr>
+          <p:cNvPicPr>
+            <a:picLocks noChangeAspect="1"/>
+          </p:cNvPicPr>
+          <p:nvPr/>
+        </p:nvPicPr>
+        <p:blipFill>
+          <a:blip r:embed="rId5"/>
+          <a:stretch>
+            <a:fillRect/>
+          </a:stretch>
+        </p:blipFill>
+        <p:spPr>
+          <a:xfrm>
+            <a:off x="4743450" y="4377690"/>
+            <a:ext cx="342900" cy="342900"/>
+          </a:xfrm>
+          <a:prstGeom prst="rect">
+            <a:avLst/>
+          </a:prstGeom>
+        </p:spPr>
+      </p:pic>
+      <p:sp>
+        <p:nvSpPr>
+          <p:cNvPr id="26" name="Rule head 5"/>
+          <p:cNvSpPr txBox="1"/>
+          <p:nvPr/>
+        </p:nvSpPr>
+        <p:spPr>
+          <a:xfrm>
+            <a:off x="5394960" y="4206240"/>
+            <a:ext cx="2377440" cy="685800"/>
+          </a:xfrm>
+          <a:prstGeom prst="rect">
+            <a:avLst/>
+          </a:prstGeom>
+          <a:noFill/>
+          <a:ln/>
+        </p:spPr>
+        <p:txBody>
+          <a:bodyPr wrap="square" lIns="0" tIns="0" rIns="0" bIns="0" rtlCol="0" anchor="ctr"/>
+          <a:lstStyle/>
+          <a:p>
+            <a:pPr indent="0" marL="0">
+              <a:buNone/>
+            </a:pPr>
+            <a:r>
+              <a:rPr lang="en-US" sz="2400" b="1" dirty="0">
+                <a:solidFill>
+                  <a:schemeClr val="tx2"/>
+                </a:solidFill>
+              </a:rPr>
+              <a:t>뜻 쓰기</a:t>
+            </a:r>
+            <a:endParaRPr lang="en-US" sz="2400" dirty="0"/>
+          </a:p>
+        </p:txBody>
+      </p:sp>
+      <p:sp>
+        <p:nvSpPr>
+          <p:cNvPr id="27" name="Rule desc 5"/>
+          <p:cNvSpPr txBox="1"/>
+          <p:nvPr/>
+        </p:nvSpPr>
+        <p:spPr>
+          <a:xfrm>
+            <a:off x="4572000" y="5029200"/>
+            <a:ext cx="3108960" cy="914400"/>
+          </a:xfrm>
+          <a:prstGeom prst="rect">
+            <a:avLst/>
+          </a:prstGeom>
+          <a:noFill/>
+          <a:ln/>
+        </p:spPr>
+        <p:txBody>
+          <a:bodyPr wrap="square" lIns="0" tIns="0" rIns="0" bIns="0" rtlCol="0" anchor="t"/>
+          <a:lstStyle/>
+          <a:p>
+            <a:pPr indent="0" marL="0">
+              <a:buNone/>
+            </a:pPr>
+            <a:r>
+              <a:rPr lang="en-US" sz="2200" dirty="0">
+                <a:solidFill>
+                  <a:schemeClr val="tx1"/>
+                </a:solidFill>
+              </a:rPr>
+              <a:t>문장마다 아래에</a:t>
+            </a:r>
+            <a:endParaRPr lang="en-US" sz="2200" dirty="0"/>
+          </a:p>
+          <a:p>
+            <a:pPr indent="0" marL="0">
+              <a:buNone/>
+            </a:pPr>
+            <a:r>
+              <a:rPr lang="en-US" sz="2200" dirty="0">
+                <a:solidFill>
+                  <a:schemeClr val="tx1"/>
+                </a:solidFill>
+              </a:rPr>
+              <a:t>한국어 뜻 쓰기</a:t>
+            </a:r>
+            <a:endParaRPr lang="en-US" sz="2200" dirty="0"/>
+          </a:p>
+        </p:txBody>
+      </p:sp>
+      <p:sp>
+        <p:nvSpPr>
+          <p:cNvPr id="28" name="Rule card 6"/>
+          <p:cNvSpPr/>
+          <p:nvPr/>
+        </p:nvSpPr>
+        <p:spPr>
+          <a:xfrm>
+            <a:off x="8046720" y="3931920"/>
+            <a:ext cx="3566160" cy="2148840"/>
+          </a:xfrm>
+          <a:prstGeom prst="roundRect">
+            <a:avLst>
+              <a:gd name="adj" fmla="val 6383"/>
+            </a:avLst>
+          </a:prstGeom>
+          <a:solidFill>
+            <a:schemeClr val="accent1"/>
+          </a:solidFill>
+          <a:ln/>
+        </p:spPr>
+      </p:sp>
+      <p:sp>
+        <p:nvSpPr>
+          <p:cNvPr id="29" name="Rule 6 circle"/>
+          <p:cNvSpPr/>
+          <p:nvPr/>
+        </p:nvSpPr>
+        <p:spPr>
+          <a:xfrm>
+            <a:off x="8321040" y="4206240"/>
+            <a:ext cx="685800" cy="685800"/>
+          </a:xfrm>
+          <a:prstGeom prst="ellipse">
+            <a:avLst/>
+          </a:prstGeom>
+          <a:solidFill>
+            <a:schemeClr val="tx2"/>
+          </a:solidFill>
+          <a:ln/>
+        </p:spPr>
+      </p:sp>
+      <p:pic>
+        <p:nvPicPr>
+          <p:cNvPr id="30" name="Rule 6 icon" descr="preencoded.png">    </p:cNvPr>
+          <p:cNvPicPr>
+            <a:picLocks noChangeAspect="1"/>
+          </p:cNvPicPr>
+          <p:nvPr/>
+        </p:nvPicPr>
+        <p:blipFill>
+          <a:blip r:embed="rId6"/>
+          <a:stretch>
+            <a:fillRect/>
+          </a:stretch>
+        </p:blipFill>
+        <p:spPr>
+          <a:xfrm>
+            <a:off x="8492490" y="4377690"/>
+            <a:ext cx="342900" cy="342900"/>
+          </a:xfrm>
+          <a:prstGeom prst="rect">
+            <a:avLst/>
+          </a:prstGeom>
+        </p:spPr>
+      </p:pic>
+      <p:sp>
+        <p:nvSpPr>
+          <p:cNvPr id="31" name="Rule head 6"/>
+          <p:cNvSpPr txBox="1"/>
+          <p:nvPr/>
+        </p:nvSpPr>
+        <p:spPr>
+          <a:xfrm>
+            <a:off x="9144000" y="4206240"/>
+            <a:ext cx="2377440" cy="685800"/>
+          </a:xfrm>
+          <a:prstGeom prst="rect">
+            <a:avLst/>
+          </a:prstGeom>
+          <a:noFill/>
+          <a:ln/>
+        </p:spPr>
+        <p:txBody>
+          <a:bodyPr wrap="square" lIns="0" tIns="0" rIns="0" bIns="0" rtlCol="0" anchor="ctr"/>
+          <a:lstStyle/>
+          <a:p>
+            <a:pPr indent="0" marL="0">
+              <a:buNone/>
+            </a:pPr>
+            <a:r>
+              <a:rPr lang="en-US" sz="2400" b="1" dirty="0">
+                <a:solidFill>
+                  <a:schemeClr val="bg1"/>
+                </a:solidFill>
+              </a:rPr>
+              <a:t>부분 점수 없음</a:t>
+            </a:r>
+            <a:endParaRPr lang="en-US" sz="2400" dirty="0"/>
+          </a:p>
+        </p:txBody>
+      </p:sp>
+      <p:sp>
+        <p:nvSpPr>
+          <p:cNvPr id="32" name="Rule desc 6"/>
+          <p:cNvSpPr txBox="1"/>
+          <p:nvPr/>
+        </p:nvSpPr>
+        <p:spPr>
+          <a:xfrm>
+            <a:off x="8321040" y="5029200"/>
+            <a:ext cx="3108960" cy="914400"/>
+          </a:xfrm>
+          <a:prstGeom prst="rect">
+            <a:avLst/>
+          </a:prstGeom>
+          <a:noFill/>
+          <a:ln/>
+        </p:spPr>
+        <p:txBody>
+          <a:bodyPr wrap="square" lIns="0" tIns="0" rIns="0" bIns="0" rtlCol="0" anchor="t"/>
+          <a:lstStyle/>
+          <a:p>
+            <a:pPr indent="0" marL="0">
+              <a:buNone/>
+            </a:pPr>
+            <a:r>
+              <a:rPr lang="en-US" sz="2200" dirty="0">
+                <a:solidFill>
+                  <a:schemeClr val="bg1"/>
+                </a:solidFill>
+              </a:rPr>
+              <a:t>한 군데라도 틀리면</a:t>
+            </a:r>
+            <a:endParaRPr lang="en-US" sz="2200" dirty="0"/>
+          </a:p>
+          <a:p>
+            <a:pPr indent="0" marL="0">
+              <a:buNone/>
+            </a:pPr>
+            <a:r>
+              <a:rPr lang="en-US" sz="2200" dirty="0">
+                <a:solidFill>
+                  <a:schemeClr val="bg1"/>
+                </a:solidFill>
+              </a:rPr>
+              <a:t>그 문장은 0점</a:t>
+            </a:r>
+            <a:endParaRPr lang="en-US" sz="2200" dirty="0"/>
+          </a:p>
+        </p:txBody>
+      </p:sp>
+      <p:sp>
+        <p:nvSpPr>
+          <p:cNvPr id="25" name="Slide Number Placeholder 0"/>
+          <p:cNvSpPr>
+            <a:spLocks noGrp="1"/>
+          </p:cNvSpPr>
+          <p:nvPr>
+            <p:ph type="sldNum" sz="quarter" idx="4294967295"/>
+          </p:nvPr>
+        </p:nvSpPr>
+        <p:spPr>
+          <a:xfrm>
+            <a:off x="11247120" y="6355080"/>
+            <a:ext cx="548640" cy="320040"/>
+          </a:xfrm>
+          <a:prstGeom prst="rect">
+            <a:avLst/>
+          </a:prstGeom>
+          <a:extLst>
+            <a:ext uri="{C572A759-6A51-4108-AA02-DFA0A04FC94B}">
+              <ma14:wrappingTextBoxFlag xmlns:ma14="http://schemas.microsoft.com/office/mac/drawingml/2011/main" val="0"/>
+            </a:ext>
+          </a:extLst>
+        </p:spPr>
+        <p:txBody>
+          <a:bodyPr/>
+          <a:lstStyle>
+            <a:lvl1pPr>
+              <a:defRPr sz="1400">
+                <a:solidFill>
+                  <a:schemeClr val="accent5"/>
+                </a:solidFill>
+              </a:defRPr>
+            </a:lvl1pPr>
+          </a:lstStyle>
+          <a:p>
+            <a:pPr algn="r"/>
+            <a:fld id="{F7021451-1387-4CA6-816F-3879F97B5CBC}" type="slidenum">
+              <a:rPr b="0" lang="en-US"/>
+              <a:t>5</a:t>
+            </a:fld>
+            <a:endParaRPr lang="en-US"/>
+          </a:p>
+        </p:txBody>
+      </p:sp>
+    </p:spTree>
+  </p:cSld>
+  <p:clrMapOvr>
+    <a:masterClrMapping/>
+  </p:clrMapOvr>
+</p:sld>
+</file>
+
+<file path=ppt/slides/slide6.xml><?xml version="1.0" encoding="utf-8"?>
+<p:sld xmlns:a="http://schemas.openxmlformats.org/drawingml/2006/main" xmlns:r="http://schemas.openxmlformats.org/officeDocument/2006/relationships" xmlns:p="http://schemas.openxmlformats.org/presentationml/2006/main">
+  <p:cSld name="Slide 6">
+    <p:spTree>
+      <p:nvGrpSpPr>
+        <p:cNvPr id="1" name=""/>
+        <p:cNvGrpSpPr/>
+        <p:nvPr/>
+      </p:nvGrpSpPr>
+      <p:grpSpPr>
+        <a:xfrm>
+          <a:off x="0" y="0"/>
+          <a:ext cx="0" cy="0"/>
+          <a:chOff x="0" y="0"/>
+          <a:chExt cx="0" cy="0"/>
+        </a:xfrm>
+      </p:grpSpPr>
+      <p:sp>
+        <p:nvSpPr>
+          <p:cNvPr id="2" name="Text 0"/>
+          <p:cNvSpPr/>
+          <p:nvPr>
+            <p:ph idx="100" type="title" hasCustomPrompt="1"/>
+          </p:nvPr>
+        </p:nvSpPr>
+        <p:spPr>
+          <a:xfrm>
+            <a:off x="548640" y="365760"/>
+            <a:ext cx="11064240" cy="914400"/>
+          </a:xfrm>
+          <a:prstGeom prst="rect">
+            <a:avLst/>
+          </a:prstGeom>
+          <a:noFill/>
+          <a:ln/>
+        </p:spPr>
+        <p:txBody>
+          <a:bodyPr wrap="square" lIns="0" tIns="0" rIns="0" bIns="0" rtlCol="0" anchor="ctr"/>
+          <a:lstStyle/>
+          <a:p>
+            <a:pPr algn="l" indent="0" marL="0">
+              <a:buNone/>
+            </a:pPr>
+            <a:r>
+              <a:rPr lang="en-US" sz="4000" b="1" dirty="0">
+                <a:solidFill>
+                  <a:schemeClr val="tx2"/>
+                </a:solidFill>
+              </a:rPr>
+              <a:t>이렇게 진행해요</a:t>
+            </a:r>
+            <a:endParaRPr lang="en-US" sz="4000" dirty="0"/>
+          </a:p>
+        </p:txBody>
+      </p:sp>
+      <p:sp>
+        <p:nvSpPr>
+          <p:cNvPr id="3" name="Step 1 circle"/>
+          <p:cNvSpPr/>
+          <p:nvPr/>
+        </p:nvSpPr>
+        <p:spPr>
+          <a:xfrm>
+            <a:off x="1280160" y="2011680"/>
+            <a:ext cx="1371600" cy="1371600"/>
+          </a:xfrm>
+          <a:prstGeom prst="ellipse">
+            <a:avLst/>
+          </a:prstGeom>
+          <a:solidFill>
+            <a:schemeClr val="tx2"/>
+          </a:solidFill>
+          <a:ln/>
+        </p:spPr>
+      </p:sp>
+      <p:pic>
+        <p:nvPicPr>
+          <p:cNvPr id="4" name="Step 1 icon" descr="preencoded.png">    </p:cNvPr>
+          <p:cNvPicPr>
+            <a:picLocks noChangeAspect="1"/>
+          </p:cNvPicPr>
+          <p:nvPr/>
+        </p:nvPicPr>
+        <p:blipFill>
+          <a:blip r:embed="rId1"/>
+          <a:stretch>
+            <a:fillRect/>
+          </a:stretch>
+        </p:blipFill>
+        <p:spPr>
+          <a:xfrm>
+            <a:off x="1623060" y="2354580"/>
+            <a:ext cx="685800" cy="685800"/>
+          </a:xfrm>
+          <a:prstGeom prst="rect">
+            <a:avLst/>
+          </a:prstGeom>
+        </p:spPr>
+      </p:pic>
+      <p:sp>
+        <p:nvSpPr>
+          <p:cNvPr id="5" name="Arrow 1"/>
+          <p:cNvSpPr/>
+          <p:nvPr/>
+        </p:nvSpPr>
+        <p:spPr>
+          <a:xfrm rot="5400000">
+            <a:off x="3063240" y="2514600"/>
+            <a:ext cx="365760" cy="365760"/>
+          </a:xfrm>
+          <a:prstGeom prst="triangle">
+            <a:avLst/>
+          </a:prstGeom>
+          <a:solidFill>
+            <a:schemeClr val="accent5"/>
+          </a:solidFill>
+          <a:ln/>
+        </p:spPr>
+      </p:sp>
+      <p:sp>
+        <p:nvSpPr>
+          <p:cNvPr id="6" name="Step num 1"/>
+          <p:cNvSpPr txBox="1"/>
+          <p:nvPr/>
+        </p:nvSpPr>
+        <p:spPr>
+          <a:xfrm>
+            <a:off x="548640" y="3611880"/>
+            <a:ext cx="2834640" cy="457200"/>
+          </a:xfrm>
+          <a:prstGeom prst="rect">
+            <a:avLst/>
+          </a:prstGeom>
+          <a:noFill/>
+          <a:ln/>
+        </p:spPr>
+        <p:txBody>
+          <a:bodyPr wrap="square" lIns="0" tIns="0" rIns="0" bIns="0" rtlCol="0" anchor="ctr"/>
+          <a:lstStyle/>
+          <a:p>
+            <a:pPr algn="ctr" indent="0" marL="0">
+              <a:buNone/>
+            </a:pPr>
+            <a:r>
+              <a:rPr lang="en-US" sz="2200" b="1" dirty="0">
+                <a:solidFill>
+                  <a:schemeClr val="accent1"/>
+                </a:solidFill>
+              </a:rPr>
+              <a:t>1단계</a:t>
+            </a:r>
+            <a:endParaRPr lang="en-US" sz="2200" dirty="0"/>
+          </a:p>
+        </p:txBody>
+      </p:sp>
+      <p:sp>
+        <p:nvSpPr>
+          <p:cNvPr id="7" name="Step head 1"/>
+          <p:cNvSpPr txBox="1"/>
+          <p:nvPr/>
+        </p:nvSpPr>
+        <p:spPr>
+          <a:xfrm>
+            <a:off x="548640" y="4069080"/>
+            <a:ext cx="2834640" cy="685800"/>
+          </a:xfrm>
+          <a:prstGeom prst="rect">
+            <a:avLst/>
+          </a:prstGeom>
+          <a:noFill/>
+          <a:ln/>
+        </p:spPr>
+        <p:txBody>
+          <a:bodyPr wrap="square" lIns="0" tIns="0" rIns="0" bIns="0" rtlCol="0" anchor="ctr"/>
+          <a:lstStyle/>
+          <a:p>
+            <a:pPr algn="ctr" indent="0" marL="0">
+              <a:buNone/>
+            </a:pPr>
+            <a:r>
+              <a:rPr lang="en-US" sz="3200" b="1" dirty="0">
+                <a:solidFill>
+                  <a:schemeClr val="tx2"/>
+                </a:solidFill>
+              </a:rPr>
+              <a:t>모둠 조사</a:t>
+            </a:r>
+            <a:endParaRPr lang="en-US" sz="3200" dirty="0"/>
+          </a:p>
+        </p:txBody>
+      </p:sp>
+      <p:sp>
+        <p:nvSpPr>
+          <p:cNvPr id="8" name="Step desc 1"/>
+          <p:cNvSpPr txBox="1"/>
+          <p:nvPr/>
+        </p:nvSpPr>
+        <p:spPr>
+          <a:xfrm>
+            <a:off x="548640" y="4846320"/>
+            <a:ext cx="2834640" cy="1188720"/>
+          </a:xfrm>
+          <a:prstGeom prst="rect">
+            <a:avLst/>
+          </a:prstGeom>
+          <a:noFill/>
+          <a:ln/>
+        </p:spPr>
+        <p:txBody>
+          <a:bodyPr wrap="square" lIns="0" tIns="0" rIns="0" bIns="0" rtlCol="0" anchor="t"/>
+          <a:lstStyle/>
+          <a:p>
+            <a:pPr algn="ctr" indent="0" marL="0">
+              <a:buNone/>
+            </a:pPr>
+            <a:r>
+              <a:rPr lang="en-US" sz="2400" dirty="0">
+                <a:solidFill>
+                  <a:schemeClr val="tx1"/>
+                </a:solidFill>
+              </a:rPr>
+              <a:t>여행지의 장소·음식</a:t>
+            </a:r>
+            <a:endParaRPr lang="en-US" sz="2400" dirty="0"/>
+          </a:p>
+          <a:p>
+            <a:pPr algn="ctr" indent="0" marL="0">
+              <a:buNone/>
+            </a:pPr>
+            <a:r>
+              <a:rPr lang="en-US" sz="2400" dirty="0">
+                <a:solidFill>
+                  <a:schemeClr val="tx1"/>
+                </a:solidFill>
+              </a:rPr>
+              <a:t>볼거리·쇼핑 조사</a:t>
+            </a:r>
+            <a:endParaRPr lang="en-US" sz="2400" dirty="0"/>
+          </a:p>
+        </p:txBody>
+      </p:sp>
+      <p:sp>
+        <p:nvSpPr>
+          <p:cNvPr id="9" name="Step 2 circle"/>
+          <p:cNvSpPr/>
+          <p:nvPr/>
+        </p:nvSpPr>
+        <p:spPr>
+          <a:xfrm>
+            <a:off x="4160520" y="2011680"/>
+            <a:ext cx="1371600" cy="1371600"/>
+          </a:xfrm>
+          <a:prstGeom prst="ellipse">
+            <a:avLst/>
+          </a:prstGeom>
+          <a:solidFill>
+            <a:schemeClr val="tx2"/>
+          </a:solidFill>
+          <a:ln/>
+        </p:spPr>
+      </p:sp>
+      <p:pic>
+        <p:nvPicPr>
+          <p:cNvPr id="10" name="Step 2 icon" descr="preencoded.png">    </p:cNvPr>
+          <p:cNvPicPr>
+            <a:picLocks noChangeAspect="1"/>
+          </p:cNvPicPr>
+          <p:nvPr/>
+        </p:nvPicPr>
+        <p:blipFill>
+          <a:blip r:embed="rId2"/>
+          <a:stretch>
+            <a:fillRect/>
+          </a:stretch>
+        </p:blipFill>
+        <p:spPr>
+          <a:xfrm>
+            <a:off x="4503420" y="2354580"/>
+            <a:ext cx="685800" cy="685800"/>
+          </a:xfrm>
+          <a:prstGeom prst="rect">
+            <a:avLst/>
+          </a:prstGeom>
+        </p:spPr>
+      </p:pic>
+      <p:sp>
+        <p:nvSpPr>
+          <p:cNvPr id="11" name="Arrow 2"/>
+          <p:cNvSpPr/>
+          <p:nvPr/>
+        </p:nvSpPr>
+        <p:spPr>
+          <a:xfrm rot="5400000">
+            <a:off x="5943600" y="2514600"/>
+            <a:ext cx="365760" cy="365760"/>
+          </a:xfrm>
+          <a:prstGeom prst="triangle">
+            <a:avLst/>
+          </a:prstGeom>
+          <a:solidFill>
+            <a:schemeClr val="accent5"/>
+          </a:solidFill>
+          <a:ln/>
+        </p:spPr>
+      </p:sp>
+      <p:sp>
+        <p:nvSpPr>
+          <p:cNvPr id="12" name="Step num 2"/>
+          <p:cNvSpPr txBox="1"/>
+          <p:nvPr/>
+        </p:nvSpPr>
+        <p:spPr>
+          <a:xfrm>
+            <a:off x="3429000" y="3611880"/>
+            <a:ext cx="2834640" cy="457200"/>
+          </a:xfrm>
+          <a:prstGeom prst="rect">
+            <a:avLst/>
+          </a:prstGeom>
+          <a:noFill/>
+          <a:ln/>
+        </p:spPr>
+        <p:txBody>
+          <a:bodyPr wrap="square" lIns="0" tIns="0" rIns="0" bIns="0" rtlCol="0" anchor="ctr"/>
+          <a:lstStyle/>
+          <a:p>
+            <a:pPr algn="ctr" indent="0" marL="0">
+              <a:buNone/>
+            </a:pPr>
+            <a:r>
+              <a:rPr lang="en-US" sz="2200" b="1" dirty="0">
+                <a:solidFill>
+                  <a:schemeClr val="accent1"/>
+                </a:solidFill>
+              </a:rPr>
+              <a:t>2단계</a:t>
+            </a:r>
+            <a:endParaRPr lang="en-US" sz="2200" dirty="0"/>
+          </a:p>
+        </p:txBody>
+      </p:sp>
+      <p:sp>
+        <p:nvSpPr>
+          <p:cNvPr id="13" name="Step head 2"/>
+          <p:cNvSpPr txBox="1"/>
+          <p:nvPr/>
+        </p:nvSpPr>
+        <p:spPr>
+          <a:xfrm>
+            <a:off x="3429000" y="4069080"/>
+            <a:ext cx="2834640" cy="685800"/>
+          </a:xfrm>
+          <a:prstGeom prst="rect">
+            <a:avLst/>
+          </a:prstGeom>
+          <a:noFill/>
+          <a:ln/>
+        </p:spPr>
+        <p:txBody>
+          <a:bodyPr wrap="square" lIns="0" tIns="0" rIns="0" bIns="0" rtlCol="0" anchor="ctr"/>
+          <a:lstStyle/>
+          <a:p>
+            <a:pPr algn="ctr" indent="0" marL="0">
+              <a:buNone/>
+            </a:pPr>
+            <a:r>
+              <a:rPr lang="en-US" sz="3200" b="1" dirty="0">
+                <a:solidFill>
+                  <a:schemeClr val="tx2"/>
+                </a:solidFill>
+              </a:rPr>
+              <a:t>5문장 쓰기</a:t>
+            </a:r>
+            <a:endParaRPr lang="en-US" sz="3200" dirty="0"/>
+          </a:p>
+        </p:txBody>
+      </p:sp>
+      <p:sp>
+        <p:nvSpPr>
+          <p:cNvPr id="14" name="Step desc 2"/>
+          <p:cNvSpPr txBox="1"/>
+          <p:nvPr/>
+        </p:nvSpPr>
+        <p:spPr>
+          <a:xfrm>
+            <a:off x="3429000" y="4846320"/>
+            <a:ext cx="2834640" cy="1188720"/>
+          </a:xfrm>
+          <a:prstGeom prst="rect">
+            <a:avLst/>
+          </a:prstGeom>
+          <a:noFill/>
+          <a:ln/>
+        </p:spPr>
+        <p:txBody>
+          <a:bodyPr wrap="square" lIns="0" tIns="0" rIns="0" bIns="0" rtlCol="0" anchor="t"/>
+          <a:lstStyle/>
+          <a:p>
+            <a:pPr algn="ctr" indent="0" marL="0">
+              <a:buNone/>
+            </a:pPr>
+            <a:r>
+              <a:rPr lang="en-US" sz="2400" dirty="0">
+                <a:solidFill>
+                  <a:schemeClr val="tx1"/>
+                </a:solidFill>
+              </a:rPr>
+              <a:t>활동지에 일본어</a:t>
+            </a:r>
+            <a:endParaRPr lang="en-US" sz="2400" dirty="0"/>
+          </a:p>
+          <a:p>
+            <a:pPr algn="ctr" indent="0" marL="0">
+              <a:buNone/>
+            </a:pPr>
+            <a:r>
+              <a:rPr lang="en-US" sz="2400" dirty="0">
+                <a:solidFill>
+                  <a:schemeClr val="tx1"/>
+                </a:solidFill>
+              </a:rPr>
+              <a:t>문장과 뜻 작성</a:t>
+            </a:r>
+            <a:endParaRPr lang="en-US" sz="2400" dirty="0"/>
+          </a:p>
+        </p:txBody>
+      </p:sp>
+      <p:sp>
+        <p:nvSpPr>
+          <p:cNvPr id="15" name="Step 3 circle"/>
+          <p:cNvSpPr/>
+          <p:nvPr/>
+        </p:nvSpPr>
+        <p:spPr>
+          <a:xfrm>
+            <a:off x="7040880" y="2011680"/>
+            <a:ext cx="1371600" cy="1371600"/>
+          </a:xfrm>
+          <a:prstGeom prst="ellipse">
+            <a:avLst/>
+          </a:prstGeom>
+          <a:solidFill>
+            <a:schemeClr val="tx2"/>
+          </a:solidFill>
+          <a:ln/>
+        </p:spPr>
+      </p:sp>
+      <p:pic>
+        <p:nvPicPr>
+          <p:cNvPr id="16" name="Step 3 icon" descr="preencoded.png">    </p:cNvPr>
+          <p:cNvPicPr>
+            <a:picLocks noChangeAspect="1"/>
+          </p:cNvPicPr>
+          <p:nvPr/>
+        </p:nvPicPr>
+        <p:blipFill>
+          <a:blip r:embed="rId3"/>
+          <a:stretch>
+            <a:fillRect/>
+          </a:stretch>
+        </p:blipFill>
+        <p:spPr>
+          <a:xfrm>
+            <a:off x="7383780" y="2354580"/>
+            <a:ext cx="685800" cy="685800"/>
+          </a:xfrm>
+          <a:prstGeom prst="rect">
+            <a:avLst/>
+          </a:prstGeom>
+        </p:spPr>
+      </p:pic>
+      <p:sp>
+        <p:nvSpPr>
+          <p:cNvPr id="17" name="Arrow 3"/>
+          <p:cNvSpPr/>
+          <p:nvPr/>
+        </p:nvSpPr>
+        <p:spPr>
+          <a:xfrm rot="5400000">
+            <a:off x="8823960" y="2514600"/>
+            <a:ext cx="365760" cy="365760"/>
+          </a:xfrm>
+          <a:prstGeom prst="triangle">
+            <a:avLst/>
+          </a:prstGeom>
+          <a:solidFill>
+            <a:schemeClr val="accent5"/>
+          </a:solidFill>
+          <a:ln/>
+        </p:spPr>
+      </p:sp>
+      <p:sp>
+        <p:nvSpPr>
+          <p:cNvPr id="18" name="Step num 3"/>
+          <p:cNvSpPr txBox="1"/>
+          <p:nvPr/>
+        </p:nvSpPr>
+        <p:spPr>
+          <a:xfrm>
+            <a:off x="6309360" y="3611880"/>
+            <a:ext cx="2834640" cy="457200"/>
+          </a:xfrm>
+          <a:prstGeom prst="rect">
+            <a:avLst/>
+          </a:prstGeom>
+          <a:noFill/>
+          <a:ln/>
+        </p:spPr>
+        <p:txBody>
+          <a:bodyPr wrap="square" lIns="0" tIns="0" rIns="0" bIns="0" rtlCol="0" anchor="ctr"/>
+          <a:lstStyle/>
+          <a:p>
+            <a:pPr algn="ctr" indent="0" marL="0">
+              <a:buNone/>
+            </a:pPr>
+            <a:r>
+              <a:rPr lang="en-US" sz="2200" b="1" dirty="0">
+                <a:solidFill>
+                  <a:schemeClr val="accent1"/>
+                </a:solidFill>
+              </a:rPr>
+              <a:t>3단계</a:t>
+            </a:r>
+            <a:endParaRPr lang="en-US" sz="2200" dirty="0"/>
+          </a:p>
+        </p:txBody>
+      </p:sp>
+      <p:sp>
+        <p:nvSpPr>
+          <p:cNvPr id="19" name="Step head 3"/>
+          <p:cNvSpPr txBox="1"/>
+          <p:nvPr/>
+        </p:nvSpPr>
+        <p:spPr>
+          <a:xfrm>
+            <a:off x="6309360" y="4069080"/>
+            <a:ext cx="2834640" cy="685800"/>
+          </a:xfrm>
+          <a:prstGeom prst="rect">
+            <a:avLst/>
+          </a:prstGeom>
+          <a:noFill/>
+          <a:ln/>
+        </p:spPr>
+        <p:txBody>
+          <a:bodyPr wrap="square" lIns="0" tIns="0" rIns="0" bIns="0" rtlCol="0" anchor="ctr"/>
+          <a:lstStyle/>
+          <a:p>
+            <a:pPr algn="ctr" indent="0" marL="0">
+              <a:buNone/>
+            </a:pPr>
+            <a:r>
+              <a:rPr lang="en-US" sz="3200" b="1" dirty="0">
+                <a:solidFill>
+                  <a:schemeClr val="tx2"/>
+                </a:solidFill>
+              </a:rPr>
+              <a:t>말하기 연습</a:t>
+            </a:r>
+            <a:endParaRPr lang="en-US" sz="3200" dirty="0"/>
+          </a:p>
+        </p:txBody>
+      </p:sp>
+      <p:sp>
+        <p:nvSpPr>
+          <p:cNvPr id="20" name="Step desc 3"/>
+          <p:cNvSpPr txBox="1"/>
+          <p:nvPr/>
+        </p:nvSpPr>
+        <p:spPr>
+          <a:xfrm>
+            <a:off x="6309360" y="4846320"/>
+            <a:ext cx="2834640" cy="1188720"/>
+          </a:xfrm>
+          <a:prstGeom prst="rect">
+            <a:avLst/>
+          </a:prstGeom>
+          <a:noFill/>
+          <a:ln/>
+        </p:spPr>
+        <p:txBody>
+          <a:bodyPr wrap="square" lIns="0" tIns="0" rIns="0" bIns="0" rtlCol="0" anchor="t"/>
+          <a:lstStyle/>
+          <a:p>
+            <a:pPr algn="ctr" indent="0" marL="0">
+              <a:buNone/>
+            </a:pPr>
+            <a:r>
+              <a:rPr lang="en-US" sz="2400" dirty="0">
+                <a:solidFill>
+                  <a:schemeClr val="tx1"/>
+                </a:solidFill>
+              </a:rPr>
+              <a:t>내 문장을 외워서</a:t>
+            </a:r>
+            <a:endParaRPr lang="en-US" sz="2400" dirty="0"/>
+          </a:p>
+          <a:p>
+            <a:pPr algn="ctr" indent="0" marL="0">
+              <a:buNone/>
+            </a:pPr>
+            <a:r>
+              <a:rPr lang="en-US" sz="2400" dirty="0">
+                <a:solidFill>
+                  <a:schemeClr val="tx1"/>
+                </a:solidFill>
+              </a:rPr>
+              <a:t>소리 내어 연습</a:t>
+            </a:r>
+            <a:endParaRPr lang="en-US" sz="2400" dirty="0"/>
+          </a:p>
+        </p:txBody>
+      </p:sp>
+      <p:sp>
+        <p:nvSpPr>
+          <p:cNvPr id="21" name="Step 4 circle"/>
+          <p:cNvSpPr/>
+          <p:nvPr/>
+        </p:nvSpPr>
+        <p:spPr>
+          <a:xfrm>
+            <a:off x="9921240" y="2011680"/>
+            <a:ext cx="1371600" cy="1371600"/>
+          </a:xfrm>
+          <a:prstGeom prst="ellipse">
+            <a:avLst/>
+          </a:prstGeom>
+          <a:solidFill>
+            <a:schemeClr val="accent1"/>
+          </a:solidFill>
+          <a:ln/>
+        </p:spPr>
+      </p:sp>
+      <p:pic>
+        <p:nvPicPr>
+          <p:cNvPr id="22" name="Step 4 icon" descr="preencoded.png">    </p:cNvPr>
+          <p:cNvPicPr>
+            <a:picLocks noChangeAspect="1"/>
+          </p:cNvPicPr>
+          <p:nvPr/>
+        </p:nvPicPr>
+        <p:blipFill>
+          <a:blip r:embed="rId4"/>
+          <a:stretch>
+            <a:fillRect/>
+          </a:stretch>
+        </p:blipFill>
+        <p:spPr>
+          <a:xfrm>
+            <a:off x="10264140" y="2354580"/>
+            <a:ext cx="685800" cy="685800"/>
+          </a:xfrm>
+          <a:prstGeom prst="rect">
+            <a:avLst/>
+          </a:prstGeom>
+        </p:spPr>
+      </p:pic>
+      <p:sp>
+        <p:nvSpPr>
+          <p:cNvPr id="23" name="Step num 4"/>
+          <p:cNvSpPr txBox="1"/>
+          <p:nvPr/>
+        </p:nvSpPr>
+        <p:spPr>
+          <a:xfrm>
+            <a:off x="9189720" y="3611880"/>
+            <a:ext cx="2834640" cy="457200"/>
+          </a:xfrm>
+          <a:prstGeom prst="rect">
+            <a:avLst/>
+          </a:prstGeom>
+          <a:noFill/>
+          <a:ln/>
+        </p:spPr>
+        <p:txBody>
+          <a:bodyPr wrap="square" lIns="0" tIns="0" rIns="0" bIns="0" rtlCol="0" anchor="ctr"/>
+          <a:lstStyle/>
+          <a:p>
+            <a:pPr algn="ctr" indent="0" marL="0">
+              <a:buNone/>
+            </a:pPr>
+            <a:r>
+              <a:rPr lang="en-US" sz="2200" b="1" dirty="0">
+                <a:solidFill>
+                  <a:schemeClr val="accent1"/>
+                </a:solidFill>
+              </a:rPr>
+              <a:t>4단계</a:t>
+            </a:r>
+            <a:endParaRPr lang="en-US" sz="2200" dirty="0"/>
+          </a:p>
+        </p:txBody>
+      </p:sp>
+      <p:sp>
+        <p:nvSpPr>
+          <p:cNvPr id="24" name="Step head 4"/>
+          <p:cNvSpPr txBox="1"/>
+          <p:nvPr/>
+        </p:nvSpPr>
+        <p:spPr>
+          <a:xfrm>
+            <a:off x="9189720" y="4069080"/>
+            <a:ext cx="2834640" cy="685800"/>
+          </a:xfrm>
+          <a:prstGeom prst="rect">
+            <a:avLst/>
+          </a:prstGeom>
+          <a:noFill/>
+          <a:ln/>
+        </p:spPr>
+        <p:txBody>
+          <a:bodyPr wrap="square" lIns="0" tIns="0" rIns="0" bIns="0" rtlCol="0" anchor="ctr"/>
+          <a:lstStyle/>
+          <a:p>
+            <a:pPr algn="ctr" indent="0" marL="0">
+              <a:buNone/>
+            </a:pPr>
+            <a:r>
+              <a:rPr lang="en-US" sz="3200" b="1" dirty="0">
+                <a:solidFill>
+                  <a:schemeClr val="tx2"/>
+                </a:solidFill>
+              </a:rPr>
+              <a:t>인터뷰 평가</a:t>
+            </a:r>
+            <a:endParaRPr lang="en-US" sz="3200" dirty="0"/>
+          </a:p>
+        </p:txBody>
+      </p:sp>
+      <p:sp>
+        <p:nvSpPr>
+          <p:cNvPr id="25" name="Step desc 4"/>
+          <p:cNvSpPr txBox="1"/>
+          <p:nvPr/>
+        </p:nvSpPr>
+        <p:spPr>
+          <a:xfrm>
+            <a:off x="9189720" y="4846320"/>
+            <a:ext cx="2834640" cy="1188720"/>
+          </a:xfrm>
+          <a:prstGeom prst="rect">
+            <a:avLst/>
+          </a:prstGeom>
+          <a:noFill/>
+          <a:ln/>
+        </p:spPr>
+        <p:txBody>
+          <a:bodyPr wrap="square" lIns="0" tIns="0" rIns="0" bIns="0" rtlCol="0" anchor="t"/>
+          <a:lstStyle/>
+          <a:p>
+            <a:pPr algn="ctr" indent="0" marL="0">
+              <a:buNone/>
+            </a:pPr>
+            <a:r>
+              <a:rPr lang="en-US" sz="2400" dirty="0">
+                <a:solidFill>
+                  <a:schemeClr val="tx1"/>
+                </a:solidFill>
+              </a:rPr>
+              <a:t>선생님 질문에</a:t>
+            </a:r>
+            <a:endParaRPr lang="en-US" sz="2400" dirty="0"/>
+          </a:p>
+          <a:p>
+            <a:pPr algn="ctr" indent="0" marL="0">
+              <a:buNone/>
+            </a:pPr>
+            <a:r>
+              <a:rPr lang="en-US" sz="2400" dirty="0">
+                <a:solidFill>
+                  <a:schemeClr val="tx1"/>
+                </a:solidFill>
+              </a:rPr>
+              <a:t>내 문장으로 답하기</a:t>
+            </a:r>
+            <a:endParaRPr lang="en-US" sz="2400" dirty="0"/>
+          </a:p>
+        </p:txBody>
+      </p:sp>
+      <p:sp>
+        <p:nvSpPr>
+          <p:cNvPr id="25" name="Slide Number Placeholder 0"/>
+          <p:cNvSpPr>
+            <a:spLocks noGrp="1"/>
+          </p:cNvSpPr>
+          <p:nvPr>
+            <p:ph type="sldNum" sz="quarter" idx="4294967295"/>
+          </p:nvPr>
+        </p:nvSpPr>
+        <p:spPr>
+          <a:xfrm>
+            <a:off x="11247120" y="6355080"/>
+            <a:ext cx="548640" cy="320040"/>
+          </a:xfrm>
+          <a:prstGeom prst="rect">
+            <a:avLst/>
+          </a:prstGeom>
+          <a:extLst>
+            <a:ext uri="{C572A759-6A51-4108-AA02-DFA0A04FC94B}">
+              <ma14:wrappingTextBoxFlag xmlns:ma14="http://schemas.microsoft.com/office/mac/drawingml/2011/main" val="0"/>
+            </a:ext>
+          </a:extLst>
+        </p:spPr>
+        <p:txBody>
+          <a:bodyPr/>
+          <a:lstStyle>
+            <a:lvl1pPr>
+              <a:defRPr sz="1400">
+                <a:solidFill>
+                  <a:schemeClr val="accent5"/>
+                </a:solidFill>
+              </a:defRPr>
+            </a:lvl1pPr>
+          </a:lstStyle>
+          <a:p>
+            <a:pPr algn="r"/>
+            <a:fld id="{F7021451-1387-4CA6-816F-3879F97B5CBC}" type="slidenum">
+              <a:rPr b="0" lang="en-US"/>
+              <a:t>6</a:t>
+            </a:fld>
+            <a:endParaRPr lang="en-US"/>
+          </a:p>
+        </p:txBody>
+      </p:sp>
+    </p:spTree>
+  </p:cSld>
+  <p:clrMapOvr>
+    <a:masterClrMapping/>
+  </p:clrMapOvr>
+</p:sld>
+</file>
+
+<file path=ppt/slides/slide7.xml><?xml version="1.0" encoding="utf-8"?>
+<p:sld xmlns:a="http://schemas.openxmlformats.org/drawingml/2006/main" xmlns:r="http://schemas.openxmlformats.org/officeDocument/2006/relationships" xmlns:p="http://schemas.openxmlformats.org/presentationml/2006/main">
+  <p:cSld name="Slide 7">
+    <p:spTree>
+      <p:nvGrpSpPr>
+        <p:cNvPr id="1" name=""/>
+        <p:cNvGrpSpPr/>
+        <p:nvPr/>
+      </p:nvGrpSpPr>
+      <p:grpSpPr>
+        <a:xfrm>
+          <a:off x="0" y="0"/>
+          <a:ext cx="0" cy="0"/>
+          <a:chOff x="0" y="0"/>
+          <a:chExt cx="0" cy="0"/>
+        </a:xfrm>
+      </p:grpSpPr>
+      <p:sp>
+        <p:nvSpPr>
+          <p:cNvPr id="2" name="Text 0"/>
+          <p:cNvSpPr/>
+          <p:nvPr>
+            <p:ph idx="100" type="title" hasCustomPrompt="1"/>
+          </p:nvPr>
+        </p:nvSpPr>
+        <p:spPr>
+          <a:xfrm>
+            <a:off x="548640" y="365760"/>
+            <a:ext cx="11064240" cy="914400"/>
+          </a:xfrm>
+          <a:prstGeom prst="rect">
+            <a:avLst/>
+          </a:prstGeom>
+          <a:noFill/>
+          <a:ln/>
+        </p:spPr>
+        <p:txBody>
+          <a:bodyPr wrap="square" lIns="0" tIns="0" rIns="0" bIns="0" rtlCol="0" anchor="ctr"/>
+          <a:lstStyle/>
+          <a:p>
+            <a:pPr algn="l" indent="0" marL="0">
+              <a:buNone/>
+            </a:pPr>
+            <a:r>
+              <a:rPr lang="en-US" sz="4000" b="1" dirty="0">
+                <a:solidFill>
+                  <a:schemeClr val="tx2"/>
+                </a:solidFill>
+              </a:rPr>
+              <a:t>채점 기준 ① 쓰기 (7점)</a:t>
+            </a:r>
+            <a:endParaRPr lang="en-US" sz="4000" dirty="0"/>
+          </a:p>
+        </p:txBody>
+      </p:sp>
+      <p:sp>
+        <p:nvSpPr>
+          <p:cNvPr id="3" name="Write callout"/>
+          <p:cNvSpPr/>
+          <p:nvPr/>
+        </p:nvSpPr>
+        <p:spPr>
+          <a:xfrm>
+            <a:off x="548640" y="1554480"/>
+            <a:ext cx="3291840" cy="4572000"/>
+          </a:xfrm>
+          <a:prstGeom prst="roundRect">
+            <a:avLst>
+              <a:gd name="adj" fmla="val 4167"/>
+            </a:avLst>
+          </a:prstGeom>
+          <a:solidFill>
+            <a:schemeClr val="tx2"/>
+          </a:solidFill>
+          <a:ln/>
+        </p:spPr>
+      </p:sp>
+      <p:sp>
+        <p:nvSpPr>
+          <p:cNvPr id="4" name="Write big"/>
+          <p:cNvSpPr txBox="1"/>
+          <p:nvPr/>
+        </p:nvSpPr>
+        <p:spPr>
+          <a:xfrm>
+            <a:off x="548640" y="1828800"/>
+            <a:ext cx="3291840" cy="1280160"/>
+          </a:xfrm>
+          <a:prstGeom prst="rect">
+            <a:avLst/>
+          </a:prstGeom>
+          <a:noFill/>
+          <a:ln/>
+        </p:spPr>
+        <p:txBody>
+          <a:bodyPr wrap="square" lIns="0" tIns="0" rIns="0" bIns="0" rtlCol="0" anchor="ctr"/>
+          <a:lstStyle/>
+          <a:p>
+            <a:pPr algn="ctr" indent="0" marL="0">
+              <a:buNone/>
+            </a:pPr>
+            <a:r>
+              <a:rPr lang="en-US" sz="6600" b="1" dirty="0">
+                <a:solidFill>
+                  <a:schemeClr val="accent3"/>
+                </a:solidFill>
+              </a:rPr>
+              <a:t>7점</a:t>
+            </a:r>
+            <a:endParaRPr lang="en-US" sz="6600" dirty="0"/>
+          </a:p>
+        </p:txBody>
+      </p:sp>
+      <p:sp>
+        <p:nvSpPr>
+          <p:cNvPr id="5" name="Write desc"/>
+          <p:cNvSpPr txBox="1"/>
+          <p:nvPr/>
+        </p:nvSpPr>
+        <p:spPr>
+          <a:xfrm>
+            <a:off x="548640" y="3291840"/>
+            <a:ext cx="3291840" cy="2011680"/>
+          </a:xfrm>
+          <a:prstGeom prst="rect">
+            <a:avLst/>
+          </a:prstGeom>
+          <a:noFill/>
+          <a:ln/>
+        </p:spPr>
+        <p:txBody>
+          <a:bodyPr wrap="square" lIns="0" tIns="0" rIns="0" bIns="0" rtlCol="0" anchor="t"/>
+          <a:lstStyle/>
+          <a:p>
+            <a:pPr algn="ctr" indent="0" marL="0">
+              <a:buNone/>
+            </a:pPr>
+            <a:r>
+              <a:rPr lang="en-US" sz="2600" dirty="0">
+                <a:solidFill>
+                  <a:schemeClr val="bg1"/>
+                </a:solidFill>
+              </a:rPr>
+              <a:t>오류 없이 쓴</a:t>
+            </a:r>
+            <a:endParaRPr lang="en-US" sz="2600" dirty="0"/>
+          </a:p>
+          <a:p>
+            <a:pPr algn="ctr" indent="0" marL="0">
+              <a:buNone/>
+            </a:pPr>
+            <a:r>
+              <a:rPr lang="en-US" sz="2600" dirty="0">
+                <a:solidFill>
+                  <a:schemeClr val="bg1"/>
+                </a:solidFill>
+              </a:rPr>
+              <a:t>문장 수로</a:t>
+            </a:r>
+            <a:endParaRPr lang="en-US" sz="2600" dirty="0"/>
+          </a:p>
+          <a:p>
+            <a:pPr algn="ctr" indent="0" marL="0">
+              <a:buNone/>
+            </a:pPr>
+            <a:r>
+              <a:rPr lang="en-US" sz="2600" dirty="0">
+                <a:solidFill>
+                  <a:schemeClr val="bg1"/>
+                </a:solidFill>
+              </a:rPr>
+              <a:t>점수가 정해져요</a:t>
+            </a:r>
+            <a:endParaRPr lang="en-US" sz="2600" dirty="0"/>
           </a:p>
         </p:txBody>
       </p:sp>
       <p:graphicFrame>
         <p:nvGraphicFramePr>
-          <p:cNvPr id="6" name="Rubric table"/>
+          <p:cNvPr id="8" name="Write rubric"/>
           <p:cNvGraphicFramePr>
             <a:graphicFrameLocks noGrp="1"/>
           </p:cNvGraphicFramePr>
@@ -3995,19 +6341,18 @@
           </p:nvPr>
         </p:nvGraphicFramePr>
         <p:xfrm>
-          <a:off x="548640" y="1645920"/>
-          <a:ext cx="11064240" cy="914400"/>
+          <a:off x="4114800" y="1554480"/>
+          <a:ext cx="7498080" cy="914400"/>
         </p:xfrm>
         <a:graphic>
           <a:graphicData uri="http://schemas.openxmlformats.org/drawingml/2006/table">
             <a:tbl>
               <a:tblPr/>
               <a:tblGrid>
-                <a:gridCol w="2743200"/>
-                <a:gridCol w="6492240"/>
-                <a:gridCol w="1828800"/>
+                <a:gridCol w="5852160"/>
+                <a:gridCol w="1645920"/>
               </a:tblGrid>
-              <a:tr h="868680">
+              <a:tr h="649224">
                 <a:tc>
                   <a:txBody>
                     <a:bodyPr/>
@@ -4017,17 +6362,17 @@
                         <a:buNone/>
                       </a:pPr>
                       <a:r>
-                        <a:rPr lang="en-US" sz="2600" b="1" dirty="0">
+                        <a:rPr lang="en-US" sz="2200" b="1" dirty="0">
                           <a:solidFill>
                             <a:schemeClr val="bg1"/>
                           </a:solidFill>
                         </a:rPr>
-                        <a:t>영역</a:t>
+                        <a:t>조건에 맞게 오류 없이 쓴 문장</a:t>
                       </a:r>
-                      <a:endParaRPr lang="en-US" sz="2600" dirty="0"/>
+                      <a:endParaRPr lang="en-US" sz="2200" dirty="0"/>
                     </a:p>
                   </a:txBody>
-                  <a:tcPr marL="182880" marR="182880" marT="0" marB="0" anchor="ctr">
+                  <a:tcPr marL="182880" marR="137160" marT="0" marB="0" anchor="ctr">
                     <a:lnL w="12700" cap="flat" cmpd="sng" algn="ctr">
                       <a:solidFill>
                         <a:srgbClr val="D5DAE6"/>
@@ -4078,78 +6423,17 @@
                         <a:buNone/>
                       </a:pPr>
                       <a:r>
-                        <a:rPr lang="en-US" sz="2600" b="1" dirty="0">
+                        <a:rPr lang="en-US" sz="2200" b="1" dirty="0">
                           <a:solidFill>
                             <a:schemeClr val="bg1"/>
                           </a:solidFill>
                         </a:rPr>
-                        <a:t>이런 점을 봐요</a:t>
+                        <a:t>점수</a:t>
                       </a:r>
-                      <a:endParaRPr lang="en-US" sz="2600" dirty="0"/>
+                      <a:endParaRPr lang="en-US" sz="2200" dirty="0"/>
                     </a:p>
                   </a:txBody>
-                  <a:tcPr marL="182880" marR="182880" marT="0" marB="0" anchor="ctr">
-                    <a:lnL w="12700" cap="flat" cmpd="sng" algn="ctr">
-                      <a:solidFill>
-                        <a:srgbClr val="D5DAE6"/>
-                      </a:solidFill>
-                      <a:prstDash val="solid"/>
-                      <a:round/>
-                      <a:headEnd type="none" w="med" len="med"/>
-                      <a:tailEnd type="none" w="med" len="med"/>
-                    </a:lnL>
-                    <a:lnR w="12700" cap="flat" cmpd="sng" algn="ctr">
-                      <a:solidFill>
-                        <a:srgbClr val="D5DAE6"/>
-                      </a:solidFill>
-                      <a:prstDash val="solid"/>
-                      <a:round/>
-                      <a:headEnd type="none" w="med" len="med"/>
-                      <a:tailEnd type="none" w="med" len="med"/>
-                    </a:lnR>
-                    <a:lnT w="12700" cap="flat" cmpd="sng" algn="ctr">
-                      <a:solidFill>
-                        <a:srgbClr val="D5DAE6"/>
-                      </a:solidFill>
-                      <a:prstDash val="solid"/>
-                      <a:round/>
-                      <a:headEnd type="none" w="med" len="med"/>
-                      <a:tailEnd type="none" w="med" len="med"/>
-                    </a:lnT>
-                    <a:lnB w="12700" cap="flat" cmpd="sng" algn="ctr">
-                      <a:solidFill>
-                        <a:srgbClr val="D5DAE6"/>
-                      </a:solidFill>
-                      <a:prstDash val="solid"/>
-                      <a:round/>
-                      <a:headEnd type="none" w="med" len="med"/>
-                      <a:tailEnd type="none" w="med" len="med"/>
-                    </a:lnB>
-                    <a:solidFill>
-                      <a:schemeClr val="tx2"/>
-                    </a:solidFill>
-                  </a:tcPr>
-                </a:tc>
-                <a:tc>
-                  <a:txBody>
-                    <a:bodyPr/>
-                    <a:lstStyle/>
-                    <a:p>
-                      <a:pPr algn="ctr" indent="0" marL="0">
-                        <a:buNone/>
-                      </a:pPr>
-                      <a:r>
-                        <a:rPr lang="en-US" sz="2600" b="1" dirty="0">
-                          <a:solidFill>
-                            <a:schemeClr val="bg1"/>
-                          </a:solidFill>
-                        </a:rPr>
-                        <a:t>배점</a:t>
-                      </a:r>
-                      <a:endParaRPr lang="en-US" sz="2600" dirty="0"/>
-                    </a:p>
-                  </a:txBody>
-                  <a:tcPr marL="182880" marR="182880" marT="0" marB="0" anchor="ctr">
+                  <a:tcPr marL="182880" marR="137160" marT="0" marB="0" anchor="ctr">
                     <a:lnL w="12700" cap="flat" cmpd="sng" algn="ctr">
                       <a:solidFill>
                         <a:srgbClr val="D5DAE6"/>
@@ -4192,68 +6476,7 @@
                   </a:tcPr>
                 </a:tc>
               </a:tr>
-              <a:tr h="868680">
-                <a:tc>
-                  <a:txBody>
-                    <a:bodyPr/>
-                    <a:lstStyle/>
-                    <a:p>
-                      <a:pPr algn="ctr" indent="0" marL="0">
-                        <a:buNone/>
-                      </a:pPr>
-                      <a:r>
-                        <a:rPr lang="en-US" sz="2600" b="1" dirty="0">
-                          <a:solidFill>
-                            <a:schemeClr val="tx1"/>
-                          </a:solidFill>
-                        </a:rPr>
-                        <a:t>내용</a:t>
-                      </a:r>
-                      <a:endParaRPr lang="en-US" sz="2600" dirty="0"/>
-                    </a:p>
-                  </a:txBody>
-                  <a:tcPr marL="182880" marR="182880" marT="0" marB="0" anchor="ctr">
-                    <a:lnL w="12700" cap="flat" cmpd="sng" algn="ctr">
-                      <a:solidFill>
-                        <a:srgbClr val="D5DAE6"/>
-                      </a:solidFill>
-                      <a:prstDash val="solid"/>
-                      <a:round/>
-                      <a:headEnd type="none" w="med" len="med"/>
-                      <a:tailEnd type="none" w="med" len="med"/>
-                    </a:lnL>
-                    <a:lnR w="12700" cap="flat" cmpd="sng" algn="ctr">
-                      <a:solidFill>
-                        <a:srgbClr val="D5DAE6"/>
-                      </a:solidFill>
-                      <a:prstDash val="solid"/>
-                      <a:round/>
-                      <a:headEnd type="none" w="med" len="med"/>
-                      <a:tailEnd type="none" w="med" len="med"/>
-                    </a:lnR>
-                    <a:lnT w="12700" cap="flat" cmpd="sng" algn="ctr">
-                      <a:solidFill>
-                        <a:srgbClr val="D5DAE6"/>
-                      </a:solidFill>
-                      <a:prstDash val="solid"/>
-                      <a:round/>
-                      <a:headEnd type="none" w="med" len="med"/>
-                      <a:tailEnd type="none" w="med" len="med"/>
-                    </a:lnT>
-                    <a:lnB w="12700" cap="flat" cmpd="sng" algn="ctr">
-                      <a:solidFill>
-                        <a:srgbClr val="D5DAE6"/>
-                      </a:solidFill>
-                      <a:prstDash val="solid"/>
-                      <a:round/>
-                      <a:headEnd type="none" w="med" len="med"/>
-                      <a:tailEnd type="none" w="med" len="med"/>
-                    </a:lnB>
-                    <a:solidFill>
-                      <a:srgbClr val="FFFFFF"/>
-                    </a:solidFill>
-                  </a:tcPr>
-                </a:tc>
+              <a:tr h="649224">
                 <a:tc>
                   <a:txBody>
                     <a:bodyPr/>
@@ -4263,17 +6486,17 @@
                         <a:buNone/>
                       </a:pPr>
                       <a:r>
-                        <a:rPr lang="en-US" sz="2600" dirty="0">
+                        <a:rPr lang="en-US" sz="2200" dirty="0">
                           <a:solidFill>
                             <a:schemeClr val="tx1"/>
                           </a:solidFill>
                         </a:rPr>
-                        <a:t>4가지 내용이 모두 들어 있나요?</a:t>
+                        <a:t>5가지 조건 모두</a:t>
                       </a:r>
-                      <a:endParaRPr lang="en-US" sz="2600" dirty="0"/>
+                      <a:endParaRPr lang="en-US" sz="2200" dirty="0"/>
                     </a:p>
                   </a:txBody>
-                  <a:tcPr marL="182880" marR="182880" marT="0" marB="0" anchor="ctr">
+                  <a:tcPr marL="182880" marR="137160" marT="0" marB="0" anchor="ctr">
                     <a:lnL w="12700" cap="flat" cmpd="sng" algn="ctr">
                       <a:solidFill>
                         <a:srgbClr val="D5DAE6"/>
@@ -4324,17 +6547,17 @@
                         <a:buNone/>
                       </a:pPr>
                       <a:r>
-                        <a:rPr lang="en-US" sz="2600" b="1" dirty="0">
+                        <a:rPr lang="en-US" sz="2200" b="1" dirty="0">
                           <a:solidFill>
                             <a:schemeClr val="accent1"/>
                           </a:solidFill>
                         </a:rPr>
-                        <a:t>8점</a:t>
+                        <a:t>7점</a:t>
                       </a:r>
-                      <a:endParaRPr lang="en-US" sz="2600" dirty="0"/>
+                      <a:endParaRPr lang="en-US" sz="2200" dirty="0"/>
                     </a:p>
                   </a:txBody>
-                  <a:tcPr marL="182880" marR="182880" marT="0" marB="0" anchor="ctr">
+                  <a:tcPr marL="182880" marR="137160" marT="0" marB="0" anchor="ctr">
                     <a:lnL w="12700" cap="flat" cmpd="sng" algn="ctr">
                       <a:solidFill>
                         <a:srgbClr val="D5DAE6"/>
@@ -4377,68 +6600,7 @@
                   </a:tcPr>
                 </a:tc>
               </a:tr>
-              <a:tr h="868680">
-                <a:tc>
-                  <a:txBody>
-                    <a:bodyPr/>
-                    <a:lstStyle/>
-                    <a:p>
-                      <a:pPr algn="ctr" indent="0" marL="0">
-                        <a:buNone/>
-                      </a:pPr>
-                      <a:r>
-                        <a:rPr lang="en-US" sz="2600" b="1" dirty="0">
-                          <a:solidFill>
-                            <a:schemeClr val="tx1"/>
-                          </a:solidFill>
-                        </a:rPr>
-                        <a:t>발음 · 유창성</a:t>
-                      </a:r>
-                      <a:endParaRPr lang="en-US" sz="2600" dirty="0"/>
-                    </a:p>
-                  </a:txBody>
-                  <a:tcPr marL="182880" marR="182880" marT="0" marB="0" anchor="ctr">
-                    <a:lnL w="12700" cap="flat" cmpd="sng" algn="ctr">
-                      <a:solidFill>
-                        <a:srgbClr val="D5DAE6"/>
-                      </a:solidFill>
-                      <a:prstDash val="solid"/>
-                      <a:round/>
-                      <a:headEnd type="none" w="med" len="med"/>
-                      <a:tailEnd type="none" w="med" len="med"/>
-                    </a:lnL>
-                    <a:lnR w="12700" cap="flat" cmpd="sng" algn="ctr">
-                      <a:solidFill>
-                        <a:srgbClr val="D5DAE6"/>
-                      </a:solidFill>
-                      <a:prstDash val="solid"/>
-                      <a:round/>
-                      <a:headEnd type="none" w="med" len="med"/>
-                      <a:tailEnd type="none" w="med" len="med"/>
-                    </a:lnR>
-                    <a:lnT w="12700" cap="flat" cmpd="sng" algn="ctr">
-                      <a:solidFill>
-                        <a:srgbClr val="D5DAE6"/>
-                      </a:solidFill>
-                      <a:prstDash val="solid"/>
-                      <a:round/>
-                      <a:headEnd type="none" w="med" len="med"/>
-                      <a:tailEnd type="none" w="med" len="med"/>
-                    </a:lnT>
-                    <a:lnB w="12700" cap="flat" cmpd="sng" algn="ctr">
-                      <a:solidFill>
-                        <a:srgbClr val="D5DAE6"/>
-                      </a:solidFill>
-                      <a:prstDash val="solid"/>
-                      <a:round/>
-                      <a:headEnd type="none" w="med" len="med"/>
-                      <a:tailEnd type="none" w="med" len="med"/>
-                    </a:lnB>
-                    <a:solidFill>
-                      <a:srgbClr val="FFFFFF"/>
-                    </a:solidFill>
-                  </a:tcPr>
-                </a:tc>
+              <a:tr h="649224">
                 <a:tc>
                   <a:txBody>
                     <a:bodyPr/>
@@ -4448,17 +6610,17 @@
                         <a:buNone/>
                       </a:pPr>
                       <a:r>
-                        <a:rPr lang="en-US" sz="2600" dirty="0">
+                        <a:rPr lang="en-US" sz="2200" dirty="0">
                           <a:solidFill>
                             <a:schemeClr val="tx1"/>
                           </a:solidFill>
                         </a:rPr>
-                        <a:t>정확한 발음으로 자연스럽게 말하나요?</a:t>
+                        <a:t>4문장</a:t>
                       </a:r>
-                      <a:endParaRPr lang="en-US" sz="2600" dirty="0"/>
+                      <a:endParaRPr lang="en-US" sz="2200" dirty="0"/>
                     </a:p>
                   </a:txBody>
-                  <a:tcPr marL="182880" marR="182880" marT="0" marB="0" anchor="ctr">
+                  <a:tcPr marL="182880" marR="137160" marT="0" marB="0" anchor="ctr">
                     <a:lnL w="12700" cap="flat" cmpd="sng" algn="ctr">
                       <a:solidFill>
                         <a:srgbClr val="D5DAE6"/>
@@ -4509,17 +6671,17 @@
                         <a:buNone/>
                       </a:pPr>
                       <a:r>
-                        <a:rPr lang="en-US" sz="2600" b="1" dirty="0">
+                        <a:rPr lang="en-US" sz="2200" b="1" dirty="0">
                           <a:solidFill>
                             <a:schemeClr val="accent1"/>
                           </a:solidFill>
                         </a:rPr>
                         <a:t>6점</a:t>
                       </a:r>
-                      <a:endParaRPr lang="en-US" sz="2600" dirty="0"/>
+                      <a:endParaRPr lang="en-US" sz="2200" dirty="0"/>
                     </a:p>
                   </a:txBody>
-                  <a:tcPr marL="182880" marR="182880" marT="0" marB="0" anchor="ctr">
+                  <a:tcPr marL="182880" marR="137160" marT="0" marB="0" anchor="ctr">
                     <a:lnL w="12700" cap="flat" cmpd="sng" algn="ctr">
                       <a:solidFill>
                         <a:srgbClr val="D5DAE6"/>
@@ -4562,68 +6724,7 @@
                   </a:tcPr>
                 </a:tc>
               </a:tr>
-              <a:tr h="868680">
-                <a:tc>
-                  <a:txBody>
-                    <a:bodyPr/>
-                    <a:lstStyle/>
-                    <a:p>
-                      <a:pPr algn="ctr" indent="0" marL="0">
-                        <a:buNone/>
-                      </a:pPr>
-                      <a:r>
-                        <a:rPr lang="en-US" sz="2600" b="1" dirty="0">
-                          <a:solidFill>
-                            <a:schemeClr val="tx1"/>
-                          </a:solidFill>
-                        </a:rPr>
-                        <a:t>태도</a:t>
-                      </a:r>
-                      <a:endParaRPr lang="en-US" sz="2600" dirty="0"/>
-                    </a:p>
-                  </a:txBody>
-                  <a:tcPr marL="182880" marR="182880" marT="0" marB="0" anchor="ctr">
-                    <a:lnL w="12700" cap="flat" cmpd="sng" algn="ctr">
-                      <a:solidFill>
-                        <a:srgbClr val="D5DAE6"/>
-                      </a:solidFill>
-                      <a:prstDash val="solid"/>
-                      <a:round/>
-                      <a:headEnd type="none" w="med" len="med"/>
-                      <a:tailEnd type="none" w="med" len="med"/>
-                    </a:lnL>
-                    <a:lnR w="12700" cap="flat" cmpd="sng" algn="ctr">
-                      <a:solidFill>
-                        <a:srgbClr val="D5DAE6"/>
-                      </a:solidFill>
-                      <a:prstDash val="solid"/>
-                      <a:round/>
-                      <a:headEnd type="none" w="med" len="med"/>
-                      <a:tailEnd type="none" w="med" len="med"/>
-                    </a:lnR>
-                    <a:lnT w="12700" cap="flat" cmpd="sng" algn="ctr">
-                      <a:solidFill>
-                        <a:srgbClr val="D5DAE6"/>
-                      </a:solidFill>
-                      <a:prstDash val="solid"/>
-                      <a:round/>
-                      <a:headEnd type="none" w="med" len="med"/>
-                      <a:tailEnd type="none" w="med" len="med"/>
-                    </a:lnT>
-                    <a:lnB w="12700" cap="flat" cmpd="sng" algn="ctr">
-                      <a:solidFill>
-                        <a:srgbClr val="D5DAE6"/>
-                      </a:solidFill>
-                      <a:prstDash val="solid"/>
-                      <a:round/>
-                      <a:headEnd type="none" w="med" len="med"/>
-                      <a:tailEnd type="none" w="med" len="med"/>
-                    </a:lnB>
-                    <a:solidFill>
-                      <a:srgbClr val="FFFFFF"/>
-                    </a:solidFill>
-                  </a:tcPr>
-                </a:tc>
+              <a:tr h="649224">
                 <a:tc>
                   <a:txBody>
                     <a:bodyPr/>
@@ -4633,17 +6734,17 @@
                         <a:buNone/>
                       </a:pPr>
                       <a:r>
-                        <a:rPr lang="en-US" sz="2600" dirty="0">
+                        <a:rPr lang="en-US" sz="2200" dirty="0">
                           <a:solidFill>
                             <a:schemeClr val="tx1"/>
                           </a:solidFill>
                         </a:rPr>
-                        <a:t>원고 없이, 큰 목소리로 발표하나요?</a:t>
+                        <a:t>3문장</a:t>
                       </a:r>
-                      <a:endParaRPr lang="en-US" sz="2600" dirty="0"/>
+                      <a:endParaRPr lang="en-US" sz="2200" dirty="0"/>
                     </a:p>
                   </a:txBody>
-                  <a:tcPr marL="182880" marR="182880" marT="0" marB="0" anchor="ctr">
+                  <a:tcPr marL="182880" marR="137160" marT="0" marB="0" anchor="ctr">
                     <a:lnL w="12700" cap="flat" cmpd="sng" algn="ctr">
                       <a:solidFill>
                         <a:srgbClr val="D5DAE6"/>
@@ -4694,17 +6795,17 @@
                         <a:buNone/>
                       </a:pPr>
                       <a:r>
-                        <a:rPr lang="en-US" sz="2600" b="1" dirty="0">
+                        <a:rPr lang="en-US" sz="2200" b="1" dirty="0">
                           <a:solidFill>
                             <a:schemeClr val="accent1"/>
                           </a:solidFill>
                         </a:rPr>
-                        <a:t>4점</a:t>
+                        <a:t>5점</a:t>
                       </a:r>
-                      <a:endParaRPr lang="en-US" sz="2600" dirty="0"/>
+                      <a:endParaRPr lang="en-US" sz="2200" dirty="0"/>
                     </a:p>
                   </a:txBody>
-                  <a:tcPr marL="182880" marR="182880" marT="0" marB="0" anchor="ctr">
+                  <a:tcPr marL="182880" marR="137160" marT="0" marB="0" anchor="ctr">
                     <a:lnL w="12700" cap="flat" cmpd="sng" algn="ctr">
                       <a:solidFill>
                         <a:srgbClr val="D5DAE6"/>
@@ -4747,68 +6848,7 @@
                   </a:tcPr>
                 </a:tc>
               </a:tr>
-              <a:tr h="868680">
-                <a:tc>
-                  <a:txBody>
-                    <a:bodyPr/>
-                    <a:lstStyle/>
-                    <a:p>
-                      <a:pPr algn="ctr" indent="0" marL="0">
-                        <a:buNone/>
-                      </a:pPr>
-                      <a:r>
-                        <a:rPr lang="en-US" sz="2600" b="1" dirty="0">
-                          <a:solidFill>
-                            <a:schemeClr val="tx1"/>
-                          </a:solidFill>
-                        </a:rPr>
-                        <a:t>시간</a:t>
-                      </a:r>
-                      <a:endParaRPr lang="en-US" sz="2600" dirty="0"/>
-                    </a:p>
-                  </a:txBody>
-                  <a:tcPr marL="182880" marR="182880" marT="0" marB="0" anchor="ctr">
-                    <a:lnL w="12700" cap="flat" cmpd="sng" algn="ctr">
-                      <a:solidFill>
-                        <a:srgbClr val="D5DAE6"/>
-                      </a:solidFill>
-                      <a:prstDash val="solid"/>
-                      <a:round/>
-                      <a:headEnd type="none" w="med" len="med"/>
-                      <a:tailEnd type="none" w="med" len="med"/>
-                    </a:lnL>
-                    <a:lnR w="12700" cap="flat" cmpd="sng" algn="ctr">
-                      <a:solidFill>
-                        <a:srgbClr val="D5DAE6"/>
-                      </a:solidFill>
-                      <a:prstDash val="solid"/>
-                      <a:round/>
-                      <a:headEnd type="none" w="med" len="med"/>
-                      <a:tailEnd type="none" w="med" len="med"/>
-                    </a:lnR>
-                    <a:lnT w="12700" cap="flat" cmpd="sng" algn="ctr">
-                      <a:solidFill>
-                        <a:srgbClr val="D5DAE6"/>
-                      </a:solidFill>
-                      <a:prstDash val="solid"/>
-                      <a:round/>
-                      <a:headEnd type="none" w="med" len="med"/>
-                      <a:tailEnd type="none" w="med" len="med"/>
-                    </a:lnT>
-                    <a:lnB w="12700" cap="flat" cmpd="sng" algn="ctr">
-                      <a:solidFill>
-                        <a:srgbClr val="D5DAE6"/>
-                      </a:solidFill>
-                      <a:prstDash val="solid"/>
-                      <a:round/>
-                      <a:headEnd type="none" w="med" len="med"/>
-                      <a:tailEnd type="none" w="med" len="med"/>
-                    </a:lnB>
-                    <a:solidFill>
-                      <a:srgbClr val="FFFFFF"/>
-                    </a:solidFill>
-                  </a:tcPr>
-                </a:tc>
+              <a:tr h="649224">
                 <a:tc>
                   <a:txBody>
                     <a:bodyPr/>
@@ -4818,17 +6858,17 @@
                         <a:buNone/>
                       </a:pPr>
                       <a:r>
-                        <a:rPr lang="en-US" sz="2600" dirty="0">
+                        <a:rPr lang="en-US" sz="2200" dirty="0">
                           <a:solidFill>
                             <a:schemeClr val="tx1"/>
                           </a:solidFill>
                         </a:rPr>
-                        <a:t>1분(±10초) 안에 발표를 마치나요?</a:t>
+                        <a:t>2문장</a:t>
                       </a:r>
-                      <a:endParaRPr lang="en-US" sz="2600" dirty="0"/>
+                      <a:endParaRPr lang="en-US" sz="2200" dirty="0"/>
                     </a:p>
                   </a:txBody>
-                  <a:tcPr marL="182880" marR="182880" marT="0" marB="0" anchor="ctr">
+                  <a:tcPr marL="182880" marR="137160" marT="0" marB="0" anchor="ctr">
                     <a:lnL w="12700" cap="flat" cmpd="sng" algn="ctr">
                       <a:solidFill>
                         <a:srgbClr val="D5DAE6"/>
@@ -4879,17 +6919,265 @@
                         <a:buNone/>
                       </a:pPr>
                       <a:r>
-                        <a:rPr lang="en-US" sz="2600" b="1" dirty="0">
+                        <a:rPr lang="en-US" sz="2200" b="1" dirty="0">
+                          <a:solidFill>
+                            <a:schemeClr val="accent1"/>
+                          </a:solidFill>
+                        </a:rPr>
+                        <a:t>4점</a:t>
+                      </a:r>
+                      <a:endParaRPr lang="en-US" sz="2200" dirty="0"/>
+                    </a:p>
+                  </a:txBody>
+                  <a:tcPr marL="182880" marR="137160" marT="0" marB="0" anchor="ctr">
+                    <a:lnL w="12700" cap="flat" cmpd="sng" algn="ctr">
+                      <a:solidFill>
+                        <a:srgbClr val="D5DAE6"/>
+                      </a:solidFill>
+                      <a:prstDash val="solid"/>
+                      <a:round/>
+                      <a:headEnd type="none" w="med" len="med"/>
+                      <a:tailEnd type="none" w="med" len="med"/>
+                    </a:lnL>
+                    <a:lnR w="12700" cap="flat" cmpd="sng" algn="ctr">
+                      <a:solidFill>
+                        <a:srgbClr val="D5DAE6"/>
+                      </a:solidFill>
+                      <a:prstDash val="solid"/>
+                      <a:round/>
+                      <a:headEnd type="none" w="med" len="med"/>
+                      <a:tailEnd type="none" w="med" len="med"/>
+                    </a:lnR>
+                    <a:lnT w="12700" cap="flat" cmpd="sng" algn="ctr">
+                      <a:solidFill>
+                        <a:srgbClr val="D5DAE6"/>
+                      </a:solidFill>
+                      <a:prstDash val="solid"/>
+                      <a:round/>
+                      <a:headEnd type="none" w="med" len="med"/>
+                      <a:tailEnd type="none" w="med" len="med"/>
+                    </a:lnT>
+                    <a:lnB w="12700" cap="flat" cmpd="sng" algn="ctr">
+                      <a:solidFill>
+                        <a:srgbClr val="D5DAE6"/>
+                      </a:solidFill>
+                      <a:prstDash val="solid"/>
+                      <a:round/>
+                      <a:headEnd type="none" w="med" len="med"/>
+                      <a:tailEnd type="none" w="med" len="med"/>
+                    </a:lnB>
+                    <a:solidFill>
+                      <a:srgbClr val="FFFFFF"/>
+                    </a:solidFill>
+                  </a:tcPr>
+                </a:tc>
+              </a:tr>
+              <a:tr h="649224">
+                <a:tc>
+                  <a:txBody>
+                    <a:bodyPr/>
+                    <a:lstStyle/>
+                    <a:p>
+                      <a:pPr indent="0" marL="0">
+                        <a:buNone/>
+                      </a:pPr>
+                      <a:r>
+                        <a:rPr lang="en-US" sz="2200" dirty="0">
+                          <a:solidFill>
+                            <a:schemeClr val="tx1"/>
+                          </a:solidFill>
+                        </a:rPr>
+                        <a:t>1문장</a:t>
+                      </a:r>
+                      <a:endParaRPr lang="en-US" sz="2200" dirty="0"/>
+                    </a:p>
+                  </a:txBody>
+                  <a:tcPr marL="182880" marR="137160" marT="0" marB="0" anchor="ctr">
+                    <a:lnL w="12700" cap="flat" cmpd="sng" algn="ctr">
+                      <a:solidFill>
+                        <a:srgbClr val="D5DAE6"/>
+                      </a:solidFill>
+                      <a:prstDash val="solid"/>
+                      <a:round/>
+                      <a:headEnd type="none" w="med" len="med"/>
+                      <a:tailEnd type="none" w="med" len="med"/>
+                    </a:lnL>
+                    <a:lnR w="12700" cap="flat" cmpd="sng" algn="ctr">
+                      <a:solidFill>
+                        <a:srgbClr val="D5DAE6"/>
+                      </a:solidFill>
+                      <a:prstDash val="solid"/>
+                      <a:round/>
+                      <a:headEnd type="none" w="med" len="med"/>
+                      <a:tailEnd type="none" w="med" len="med"/>
+                    </a:lnR>
+                    <a:lnT w="12700" cap="flat" cmpd="sng" algn="ctr">
+                      <a:solidFill>
+                        <a:srgbClr val="D5DAE6"/>
+                      </a:solidFill>
+                      <a:prstDash val="solid"/>
+                      <a:round/>
+                      <a:headEnd type="none" w="med" len="med"/>
+                      <a:tailEnd type="none" w="med" len="med"/>
+                    </a:lnT>
+                    <a:lnB w="12700" cap="flat" cmpd="sng" algn="ctr">
+                      <a:solidFill>
+                        <a:srgbClr val="D5DAE6"/>
+                      </a:solidFill>
+                      <a:prstDash val="solid"/>
+                      <a:round/>
+                      <a:headEnd type="none" w="med" len="med"/>
+                      <a:tailEnd type="none" w="med" len="med"/>
+                    </a:lnB>
+                    <a:solidFill>
+                      <a:srgbClr val="FFFFFF"/>
+                    </a:solidFill>
+                  </a:tcPr>
+                </a:tc>
+                <a:tc>
+                  <a:txBody>
+                    <a:bodyPr/>
+                    <a:lstStyle/>
+                    <a:p>
+                      <a:pPr algn="ctr" indent="0" marL="0">
+                        <a:buNone/>
+                      </a:pPr>
+                      <a:r>
+                        <a:rPr lang="en-US" sz="2200" b="1" dirty="0">
+                          <a:solidFill>
+                            <a:schemeClr val="accent1"/>
+                          </a:solidFill>
+                        </a:rPr>
+                        <a:t>3점</a:t>
+                      </a:r>
+                      <a:endParaRPr lang="en-US" sz="2200" dirty="0"/>
+                    </a:p>
+                  </a:txBody>
+                  <a:tcPr marL="182880" marR="137160" marT="0" marB="0" anchor="ctr">
+                    <a:lnL w="12700" cap="flat" cmpd="sng" algn="ctr">
+                      <a:solidFill>
+                        <a:srgbClr val="D5DAE6"/>
+                      </a:solidFill>
+                      <a:prstDash val="solid"/>
+                      <a:round/>
+                      <a:headEnd type="none" w="med" len="med"/>
+                      <a:tailEnd type="none" w="med" len="med"/>
+                    </a:lnL>
+                    <a:lnR w="12700" cap="flat" cmpd="sng" algn="ctr">
+                      <a:solidFill>
+                        <a:srgbClr val="D5DAE6"/>
+                      </a:solidFill>
+                      <a:prstDash val="solid"/>
+                      <a:round/>
+                      <a:headEnd type="none" w="med" len="med"/>
+                      <a:tailEnd type="none" w="med" len="med"/>
+                    </a:lnR>
+                    <a:lnT w="12700" cap="flat" cmpd="sng" algn="ctr">
+                      <a:solidFill>
+                        <a:srgbClr val="D5DAE6"/>
+                      </a:solidFill>
+                      <a:prstDash val="solid"/>
+                      <a:round/>
+                      <a:headEnd type="none" w="med" len="med"/>
+                      <a:tailEnd type="none" w="med" len="med"/>
+                    </a:lnT>
+                    <a:lnB w="12700" cap="flat" cmpd="sng" algn="ctr">
+                      <a:solidFill>
+                        <a:srgbClr val="D5DAE6"/>
+                      </a:solidFill>
+                      <a:prstDash val="solid"/>
+                      <a:round/>
+                      <a:headEnd type="none" w="med" len="med"/>
+                      <a:tailEnd type="none" w="med" len="med"/>
+                    </a:lnB>
+                    <a:solidFill>
+                      <a:srgbClr val="FFFFFF"/>
+                    </a:solidFill>
+                  </a:tcPr>
+                </a:tc>
+              </a:tr>
+              <a:tr h="649224">
+                <a:tc>
+                  <a:txBody>
+                    <a:bodyPr/>
+                    <a:lstStyle/>
+                    <a:p>
+                      <a:pPr indent="0" marL="0">
+                        <a:buNone/>
+                      </a:pPr>
+                      <a:r>
+                        <a:rPr lang="en-US" sz="2200" dirty="0">
+                          <a:solidFill>
+                            <a:schemeClr val="tx1"/>
+                          </a:solidFill>
+                        </a:rPr>
+                        <a:t>참여했으나 미제출 (백지 제출 등)</a:t>
+                      </a:r>
+                      <a:endParaRPr lang="en-US" sz="2200" dirty="0"/>
+                    </a:p>
+                  </a:txBody>
+                  <a:tcPr marL="182880" marR="137160" marT="0" marB="0" anchor="ctr">
+                    <a:lnL w="12700" cap="flat" cmpd="sng" algn="ctr">
+                      <a:solidFill>
+                        <a:srgbClr val="D5DAE6"/>
+                      </a:solidFill>
+                      <a:prstDash val="solid"/>
+                      <a:round/>
+                      <a:headEnd type="none" w="med" len="med"/>
+                      <a:tailEnd type="none" w="med" len="med"/>
+                    </a:lnL>
+                    <a:lnR w="12700" cap="flat" cmpd="sng" algn="ctr">
+                      <a:solidFill>
+                        <a:srgbClr val="D5DAE6"/>
+                      </a:solidFill>
+                      <a:prstDash val="solid"/>
+                      <a:round/>
+                      <a:headEnd type="none" w="med" len="med"/>
+                      <a:tailEnd type="none" w="med" len="med"/>
+                    </a:lnR>
+                    <a:lnT w="12700" cap="flat" cmpd="sng" algn="ctr">
+                      <a:solidFill>
+                        <a:srgbClr val="D5DAE6"/>
+                      </a:solidFill>
+                      <a:prstDash val="solid"/>
+                      <a:round/>
+                      <a:headEnd type="none" w="med" len="med"/>
+                      <a:tailEnd type="none" w="med" len="med"/>
+                    </a:lnT>
+                    <a:lnB w="12700" cap="flat" cmpd="sng" algn="ctr">
+                      <a:solidFill>
+                        <a:srgbClr val="D5DAE6"/>
+                      </a:solidFill>
+                      <a:prstDash val="solid"/>
+                      <a:round/>
+                      <a:headEnd type="none" w="med" len="med"/>
+                      <a:tailEnd type="none" w="med" len="med"/>
+                    </a:lnB>
+                    <a:solidFill>
+                      <a:srgbClr val="FFFFFF"/>
+                    </a:solidFill>
+                  </a:tcPr>
+                </a:tc>
+                <a:tc>
+                  <a:txBody>
+                    <a:bodyPr/>
+                    <a:lstStyle/>
+                    <a:p>
+                      <a:pPr algn="ctr" indent="0" marL="0">
+                        <a:buNone/>
+                      </a:pPr>
+                      <a:r>
+                        <a:rPr lang="en-US" sz="2200" b="1" dirty="0">
                           <a:solidFill>
                             <a:schemeClr val="accent1"/>
                           </a:solidFill>
                         </a:rPr>
                         <a:t>2점</a:t>
                       </a:r>
-                      <a:endParaRPr lang="en-US" sz="2600" dirty="0"/>
+                      <a:endParaRPr lang="en-US" sz="2200" dirty="0"/>
                     </a:p>
                   </a:txBody>
-                  <a:tcPr marL="182880" marR="182880" marT="0" marB="0" anchor="ctr">
+                  <a:tcPr marL="182880" marR="137160" marT="0" marB="0" anchor="ctr">
                     <a:lnL w="12700" cap="flat" cmpd="sng" algn="ctr">
                       <a:solidFill>
                         <a:srgbClr val="D5DAE6"/>
@@ -4975,900 +7263,6 @@
             <a:pPr algn="r"/>
             <a:fld id="{F7021451-1387-4CA6-816F-3879F97B5CBC}" type="slidenum">
               <a:rPr b="0" lang="en-US"/>
-              <a:t>5</a:t>
-            </a:fld>
-            <a:endParaRPr lang="en-US"/>
-          </a:p>
-        </p:txBody>
-      </p:sp>
-    </p:spTree>
-  </p:cSld>
-  <p:clrMapOvr>
-    <a:masterClrMapping/>
-  </p:clrMapOvr>
-</p:sld>
-</file>
-
-<file path=ppt/slides/slide6.xml><?xml version="1.0" encoding="utf-8"?>
-<p:sld xmlns:a="http://schemas.openxmlformats.org/drawingml/2006/main" xmlns:r="http://schemas.openxmlformats.org/officeDocument/2006/relationships" xmlns:p="http://schemas.openxmlformats.org/presentationml/2006/main">
-  <p:cSld name="Slide 6">
-    <p:spTree>
-      <p:nvGrpSpPr>
-        <p:cNvPr id="1" name=""/>
-        <p:cNvGrpSpPr/>
-        <p:nvPr/>
-      </p:nvGrpSpPr>
-      <p:grpSpPr>
-        <a:xfrm>
-          <a:off x="0" y="0"/>
-          <a:ext cx="0" cy="0"/>
-          <a:chOff x="0" y="0"/>
-          <a:chExt cx="0" cy="0"/>
-        </a:xfrm>
-      </p:grpSpPr>
-      <p:sp>
-        <p:nvSpPr>
-          <p:cNvPr id="2" name="Text 0"/>
-          <p:cNvSpPr/>
-          <p:nvPr>
-            <p:ph idx="100" type="title" hasCustomPrompt="1"/>
-          </p:nvPr>
-        </p:nvSpPr>
-        <p:spPr>
-          <a:xfrm>
-            <a:off x="548640" y="365760"/>
-            <a:ext cx="11064240" cy="914400"/>
-          </a:xfrm>
-          <a:prstGeom prst="rect">
-            <a:avLst/>
-          </a:prstGeom>
-          <a:noFill/>
-          <a:ln/>
-        </p:spPr>
-        <p:txBody>
-          <a:bodyPr wrap="square" lIns="0" tIns="0" rIns="0" bIns="0" rtlCol="0" anchor="ctr"/>
-          <a:lstStyle/>
-          <a:p>
-            <a:pPr algn="l" indent="0" marL="0">
-              <a:buNone/>
-            </a:pPr>
-            <a:r>
-              <a:rPr lang="en-US" sz="4000" b="1" dirty="0">
-                <a:solidFill>
-                  <a:schemeClr val="tx2"/>
-                </a:solidFill>
-              </a:rPr>
-              <a:t>예시 원고</a:t>
-            </a:r>
-            <a:endParaRPr lang="en-US" sz="4000" dirty="0"/>
-          </a:p>
-        </p:txBody>
-      </p:sp>
-      <p:sp>
-        <p:nvSpPr>
-          <p:cNvPr id="3" name="Script card"/>
-          <p:cNvSpPr/>
-          <p:nvPr/>
-        </p:nvSpPr>
-        <p:spPr>
-          <a:xfrm>
-            <a:off x="548640" y="1600200"/>
-            <a:ext cx="11064240" cy="4526280"/>
-          </a:xfrm>
-          <a:prstGeom prst="roundRect">
-            <a:avLst>
-              <a:gd name="adj" fmla="val 3030"/>
-            </a:avLst>
-          </a:prstGeom>
-          <a:solidFill>
-            <a:schemeClr val="bg2"/>
-          </a:solidFill>
-          <a:ln/>
-        </p:spPr>
-      </p:sp>
-      <p:sp>
-        <p:nvSpPr>
-          <p:cNvPr id="4" name="Script jp 1"/>
-          <p:cNvSpPr txBox="1"/>
-          <p:nvPr/>
-        </p:nvSpPr>
-        <p:spPr>
-          <a:xfrm>
-            <a:off x="914400" y="1783080"/>
-            <a:ext cx="10332720" cy="594360"/>
-          </a:xfrm>
-          <a:prstGeom prst="rect">
-            <a:avLst/>
-          </a:prstGeom>
-          <a:noFill/>
-          <a:ln/>
-        </p:spPr>
-        <p:txBody>
-          <a:bodyPr wrap="square" lIns="0" tIns="0" rIns="0" bIns="0" rtlCol="0" anchor="ctr"/>
-          <a:lstStyle/>
-          <a:p>
-            <a:pPr indent="0" marL="0">
-              <a:buNone/>
-            </a:pPr>
-            <a:r>
-              <a:rPr lang="en-US" sz="3000" b="1" dirty="0">
-                <a:solidFill>
-                  <a:schemeClr val="tx2"/>
-                </a:solidFill>
-                <a:latin typeface="Meiryo" pitchFamily="34" charset="0"/>
-                <a:ea typeface="Meiryo" pitchFamily="34" charset="-122"/>
-                <a:cs typeface="Meiryo" pitchFamily="34" charset="-120"/>
-              </a:rPr>
-              <a:t>はじめまして。キム・ミンジュです。</a:t>
-            </a:r>
-            <a:endParaRPr lang="en-US" sz="3000" dirty="0"/>
-          </a:p>
-        </p:txBody>
-      </p:sp>
-      <p:sp>
-        <p:nvSpPr>
-          <p:cNvPr id="5" name="Script ko 1"/>
-          <p:cNvSpPr txBox="1"/>
-          <p:nvPr/>
-        </p:nvSpPr>
-        <p:spPr>
-          <a:xfrm>
-            <a:off x="914400" y="2331720"/>
-            <a:ext cx="10332720" cy="411480"/>
-          </a:xfrm>
-          <a:prstGeom prst="rect">
-            <a:avLst/>
-          </a:prstGeom>
-          <a:noFill/>
-          <a:ln/>
-        </p:spPr>
-        <p:txBody>
-          <a:bodyPr wrap="square" lIns="0" tIns="0" rIns="0" bIns="0" rtlCol="0" anchor="ctr"/>
-          <a:lstStyle/>
-          <a:p>
-            <a:pPr indent="0" marL="0">
-              <a:buNone/>
-            </a:pPr>
-            <a:r>
-              <a:rPr lang="en-US" sz="2000" dirty="0">
-                <a:solidFill>
-                  <a:schemeClr val="accent5"/>
-                </a:solidFill>
-              </a:rPr>
-              <a:t>처음 뵙겠습니다. 김민주입니다.</a:t>
-            </a:r>
-            <a:endParaRPr lang="en-US" sz="2000" dirty="0"/>
-          </a:p>
-        </p:txBody>
-      </p:sp>
-      <p:sp>
-        <p:nvSpPr>
-          <p:cNvPr id="6" name="Script jp 2"/>
-          <p:cNvSpPr txBox="1"/>
-          <p:nvPr/>
-        </p:nvSpPr>
-        <p:spPr>
-          <a:xfrm>
-            <a:off x="914400" y="2862072"/>
-            <a:ext cx="10332720" cy="594360"/>
-          </a:xfrm>
-          <a:prstGeom prst="rect">
-            <a:avLst/>
-          </a:prstGeom>
-          <a:noFill/>
-          <a:ln/>
-        </p:spPr>
-        <p:txBody>
-          <a:bodyPr wrap="square" lIns="0" tIns="0" rIns="0" bIns="0" rtlCol="0" anchor="ctr"/>
-          <a:lstStyle/>
-          <a:p>
-            <a:pPr indent="0" marL="0">
-              <a:buNone/>
-            </a:pPr>
-            <a:r>
-              <a:rPr lang="en-US" sz="3000" b="1" dirty="0">
-                <a:solidFill>
-                  <a:schemeClr val="tx2"/>
-                </a:solidFill>
-                <a:latin typeface="Meiryo" pitchFamily="34" charset="0"/>
-                <a:ea typeface="Meiryo" pitchFamily="34" charset="-122"/>
-                <a:cs typeface="Meiryo" pitchFamily="34" charset="-120"/>
-              </a:rPr>
-              <a:t>中学2年生です。14さいです。</a:t>
-            </a:r>
-            <a:endParaRPr lang="en-US" sz="3000" dirty="0"/>
-          </a:p>
-        </p:txBody>
-      </p:sp>
-      <p:sp>
-        <p:nvSpPr>
-          <p:cNvPr id="7" name="Script ko 2"/>
-          <p:cNvSpPr txBox="1"/>
-          <p:nvPr/>
-        </p:nvSpPr>
-        <p:spPr>
-          <a:xfrm>
-            <a:off x="914400" y="3410712"/>
-            <a:ext cx="10332720" cy="411480"/>
-          </a:xfrm>
-          <a:prstGeom prst="rect">
-            <a:avLst/>
-          </a:prstGeom>
-          <a:noFill/>
-          <a:ln/>
-        </p:spPr>
-        <p:txBody>
-          <a:bodyPr wrap="square" lIns="0" tIns="0" rIns="0" bIns="0" rtlCol="0" anchor="ctr"/>
-          <a:lstStyle/>
-          <a:p>
-            <a:pPr indent="0" marL="0">
-              <a:buNone/>
-            </a:pPr>
-            <a:r>
-              <a:rPr lang="en-US" sz="2000" dirty="0">
-                <a:solidFill>
-                  <a:schemeClr val="accent5"/>
-                </a:solidFill>
-              </a:rPr>
-              <a:t>중학교 2학년입니다. 14살입니다.</a:t>
-            </a:r>
-            <a:endParaRPr lang="en-US" sz="2000" dirty="0"/>
-          </a:p>
-        </p:txBody>
-      </p:sp>
-      <p:sp>
-        <p:nvSpPr>
-          <p:cNvPr id="8" name="Script jp 3"/>
-          <p:cNvSpPr txBox="1"/>
-          <p:nvPr/>
-        </p:nvSpPr>
-        <p:spPr>
-          <a:xfrm>
-            <a:off x="914400" y="3941064"/>
-            <a:ext cx="10332720" cy="594360"/>
-          </a:xfrm>
-          <a:prstGeom prst="rect">
-            <a:avLst/>
-          </a:prstGeom>
-          <a:noFill/>
-          <a:ln/>
-        </p:spPr>
-        <p:txBody>
-          <a:bodyPr wrap="square" lIns="0" tIns="0" rIns="0" bIns="0" rtlCol="0" anchor="ctr"/>
-          <a:lstStyle/>
-          <a:p>
-            <a:pPr indent="0" marL="0">
-              <a:buNone/>
-            </a:pPr>
-            <a:r>
-              <a:rPr lang="en-US" sz="3000" b="1" dirty="0">
-                <a:solidFill>
-                  <a:schemeClr val="tx2"/>
-                </a:solidFill>
-                <a:latin typeface="Meiryo" pitchFamily="34" charset="0"/>
-                <a:ea typeface="Meiryo" pitchFamily="34" charset="-122"/>
-                <a:cs typeface="Meiryo" pitchFamily="34" charset="-120"/>
-              </a:rPr>
-              <a:t>わたしは ねこが 好きです。</a:t>
-            </a:r>
-            <a:endParaRPr lang="en-US" sz="3000" dirty="0"/>
-          </a:p>
-        </p:txBody>
-      </p:sp>
-      <p:sp>
-        <p:nvSpPr>
-          <p:cNvPr id="9" name="Script ko 3"/>
-          <p:cNvSpPr txBox="1"/>
-          <p:nvPr/>
-        </p:nvSpPr>
-        <p:spPr>
-          <a:xfrm>
-            <a:off x="914400" y="4489704"/>
-            <a:ext cx="10332720" cy="411480"/>
-          </a:xfrm>
-          <a:prstGeom prst="rect">
-            <a:avLst/>
-          </a:prstGeom>
-          <a:noFill/>
-          <a:ln/>
-        </p:spPr>
-        <p:txBody>
-          <a:bodyPr wrap="square" lIns="0" tIns="0" rIns="0" bIns="0" rtlCol="0" anchor="ctr"/>
-          <a:lstStyle/>
-          <a:p>
-            <a:pPr indent="0" marL="0">
-              <a:buNone/>
-            </a:pPr>
-            <a:r>
-              <a:rPr lang="en-US" sz="2000" dirty="0">
-                <a:solidFill>
-                  <a:schemeClr val="accent5"/>
-                </a:solidFill>
-              </a:rPr>
-              <a:t>저는 고양이를 좋아합니다.</a:t>
-            </a:r>
-            <a:endParaRPr lang="en-US" sz="2000" dirty="0"/>
-          </a:p>
-        </p:txBody>
-      </p:sp>
-      <p:sp>
-        <p:nvSpPr>
-          <p:cNvPr id="10" name="Script jp 4"/>
-          <p:cNvSpPr txBox="1"/>
-          <p:nvPr/>
-        </p:nvSpPr>
-        <p:spPr>
-          <a:xfrm>
-            <a:off x="914400" y="5020056"/>
-            <a:ext cx="10332720" cy="594360"/>
-          </a:xfrm>
-          <a:prstGeom prst="rect">
-            <a:avLst/>
-          </a:prstGeom>
-          <a:noFill/>
-          <a:ln/>
-        </p:spPr>
-        <p:txBody>
-          <a:bodyPr wrap="square" lIns="0" tIns="0" rIns="0" bIns="0" rtlCol="0" anchor="ctr"/>
-          <a:lstStyle/>
-          <a:p>
-            <a:pPr indent="0" marL="0">
-              <a:buNone/>
-            </a:pPr>
-            <a:r>
-              <a:rPr lang="en-US" sz="3000" b="1" dirty="0">
-                <a:solidFill>
-                  <a:schemeClr val="tx2"/>
-                </a:solidFill>
-                <a:latin typeface="Meiryo" pitchFamily="34" charset="0"/>
-                <a:ea typeface="Meiryo" pitchFamily="34" charset="-122"/>
-                <a:cs typeface="Meiryo" pitchFamily="34" charset="-120"/>
-              </a:rPr>
-              <a:t>どうぞ よろしく おねがいします。</a:t>
-            </a:r>
-            <a:endParaRPr lang="en-US" sz="3000" dirty="0"/>
-          </a:p>
-        </p:txBody>
-      </p:sp>
-      <p:sp>
-        <p:nvSpPr>
-          <p:cNvPr id="11" name="Script ko 4"/>
-          <p:cNvSpPr txBox="1"/>
-          <p:nvPr/>
-        </p:nvSpPr>
-        <p:spPr>
-          <a:xfrm>
-            <a:off x="914400" y="5568696"/>
-            <a:ext cx="10332720" cy="411480"/>
-          </a:xfrm>
-          <a:prstGeom prst="rect">
-            <a:avLst/>
-          </a:prstGeom>
-          <a:noFill/>
-          <a:ln/>
-        </p:spPr>
-        <p:txBody>
-          <a:bodyPr wrap="square" lIns="0" tIns="0" rIns="0" bIns="0" rtlCol="0" anchor="ctr"/>
-          <a:lstStyle/>
-          <a:p>
-            <a:pPr indent="0" marL="0">
-              <a:buNone/>
-            </a:pPr>
-            <a:r>
-              <a:rPr lang="en-US" sz="2000" dirty="0">
-                <a:solidFill>
-                  <a:schemeClr val="accent5"/>
-                </a:solidFill>
-              </a:rPr>
-              <a:t>잘 부탁드립니다.</a:t>
-            </a:r>
-            <a:endParaRPr lang="en-US" sz="2000" dirty="0"/>
-          </a:p>
-        </p:txBody>
-      </p:sp>
-      <p:sp>
-        <p:nvSpPr>
-          <p:cNvPr id="25" name="Slide Number Placeholder 0"/>
-          <p:cNvSpPr>
-            <a:spLocks noGrp="1"/>
-          </p:cNvSpPr>
-          <p:nvPr>
-            <p:ph type="sldNum" sz="quarter" idx="4294967295"/>
-          </p:nvPr>
-        </p:nvSpPr>
-        <p:spPr>
-          <a:xfrm>
-            <a:off x="11247120" y="6355080"/>
-            <a:ext cx="548640" cy="320040"/>
-          </a:xfrm>
-          <a:prstGeom prst="rect">
-            <a:avLst/>
-          </a:prstGeom>
-          <a:extLst>
-            <a:ext uri="{C572A759-6A51-4108-AA02-DFA0A04FC94B}">
-              <ma14:wrappingTextBoxFlag xmlns:ma14="http://schemas.microsoft.com/office/mac/drawingml/2011/main" val="0"/>
-            </a:ext>
-          </a:extLst>
-        </p:spPr>
-        <p:txBody>
-          <a:bodyPr/>
-          <a:lstStyle>
-            <a:lvl1pPr>
-              <a:defRPr sz="1400">
-                <a:solidFill>
-                  <a:schemeClr val="accent5"/>
-                </a:solidFill>
-              </a:defRPr>
-            </a:lvl1pPr>
-          </a:lstStyle>
-          <a:p>
-            <a:pPr algn="r"/>
-            <a:fld id="{F7021451-1387-4CA6-816F-3879F97B5CBC}" type="slidenum">
-              <a:rPr b="0" lang="en-US"/>
-              <a:t>6</a:t>
-            </a:fld>
-            <a:endParaRPr lang="en-US"/>
-          </a:p>
-        </p:txBody>
-      </p:sp>
-    </p:spTree>
-  </p:cSld>
-  <p:clrMapOvr>
-    <a:masterClrMapping/>
-  </p:clrMapOvr>
-</p:sld>
-</file>
-
-<file path=ppt/slides/slide7.xml><?xml version="1.0" encoding="utf-8"?>
-<p:sld xmlns:a="http://schemas.openxmlformats.org/drawingml/2006/main" xmlns:r="http://schemas.openxmlformats.org/officeDocument/2006/relationships" xmlns:p="http://schemas.openxmlformats.org/presentationml/2006/main">
-  <p:cSld name="Slide 7">
-    <p:spTree>
-      <p:nvGrpSpPr>
-        <p:cNvPr id="1" name=""/>
-        <p:cNvGrpSpPr/>
-        <p:nvPr/>
-      </p:nvGrpSpPr>
-      <p:grpSpPr>
-        <a:xfrm>
-          <a:off x="0" y="0"/>
-          <a:ext cx="0" cy="0"/>
-          <a:chOff x="0" y="0"/>
-          <a:chExt cx="0" cy="0"/>
-        </a:xfrm>
-      </p:grpSpPr>
-      <p:sp>
-        <p:nvSpPr>
-          <p:cNvPr id="2" name="Text 0"/>
-          <p:cNvSpPr/>
-          <p:nvPr>
-            <p:ph idx="100" type="title" hasCustomPrompt="1"/>
-          </p:nvPr>
-        </p:nvSpPr>
-        <p:spPr>
-          <a:xfrm>
-            <a:off x="548640" y="365760"/>
-            <a:ext cx="11064240" cy="914400"/>
-          </a:xfrm>
-          <a:prstGeom prst="rect">
-            <a:avLst/>
-          </a:prstGeom>
-          <a:noFill/>
-          <a:ln/>
-        </p:spPr>
-        <p:txBody>
-          <a:bodyPr wrap="square" lIns="0" tIns="0" rIns="0" bIns="0" rtlCol="0" anchor="ctr"/>
-          <a:lstStyle/>
-          <a:p>
-            <a:pPr algn="l" indent="0" marL="0">
-              <a:buNone/>
-            </a:pPr>
-            <a:r>
-              <a:rPr lang="en-US" sz="4000" b="1" dirty="0">
-                <a:solidFill>
-                  <a:schemeClr val="tx2"/>
-                </a:solidFill>
-              </a:rPr>
-              <a:t>꼭 기억하세요</a:t>
-            </a:r>
-            <a:endParaRPr lang="en-US" sz="4000" dirty="0"/>
-          </a:p>
-        </p:txBody>
-      </p:sp>
-      <p:sp>
-        <p:nvSpPr>
-          <p:cNvPr id="3" name="Tips card"/>
-          <p:cNvSpPr/>
-          <p:nvPr/>
-        </p:nvSpPr>
-        <p:spPr>
-          <a:xfrm>
-            <a:off x="548640" y="1600200"/>
-            <a:ext cx="5394960" cy="4206240"/>
-          </a:xfrm>
-          <a:prstGeom prst="roundRect">
-            <a:avLst>
-              <a:gd name="adj" fmla="val 3261"/>
-            </a:avLst>
-          </a:prstGeom>
-          <a:solidFill>
-            <a:schemeClr val="bg2"/>
-          </a:solidFill>
-          <a:ln/>
-        </p:spPr>
-      </p:sp>
-      <p:sp>
-        <p:nvSpPr>
-          <p:cNvPr id="4" name="Tips circle"/>
-          <p:cNvSpPr/>
-          <p:nvPr/>
-        </p:nvSpPr>
-        <p:spPr>
-          <a:xfrm>
-            <a:off x="914400" y="1874520"/>
-            <a:ext cx="731520" cy="731520"/>
-          </a:xfrm>
-          <a:prstGeom prst="ellipse">
-            <a:avLst/>
-          </a:prstGeom>
-          <a:solidFill>
-            <a:schemeClr val="bg1"/>
-          </a:solidFill>
-          <a:ln/>
-        </p:spPr>
-      </p:sp>
-      <p:pic>
-        <p:nvPicPr>
-          <p:cNvPr id="5" name="Tips icon" descr="preencoded.png">    </p:cNvPr>
-          <p:cNvPicPr>
-            <a:picLocks noChangeAspect="1"/>
-          </p:cNvPicPr>
-          <p:nvPr/>
-        </p:nvPicPr>
-        <p:blipFill>
-          <a:blip r:embed="rId1"/>
-          <a:stretch>
-            <a:fillRect/>
-          </a:stretch>
-        </p:blipFill>
-        <p:spPr>
-          <a:xfrm>
-            <a:off x="1097280" y="2057400"/>
-            <a:ext cx="365760" cy="365760"/>
-          </a:xfrm>
-          <a:prstGeom prst="rect">
-            <a:avLst/>
-          </a:prstGeom>
-        </p:spPr>
-      </p:pic>
-      <p:sp>
-        <p:nvSpPr>
-          <p:cNvPr id="6" name="Tips title"/>
-          <p:cNvSpPr txBox="1"/>
-          <p:nvPr/>
-        </p:nvSpPr>
-        <p:spPr>
-          <a:xfrm>
-            <a:off x="1828800" y="1874520"/>
-            <a:ext cx="3840480" cy="731520"/>
-          </a:xfrm>
-          <a:prstGeom prst="rect">
-            <a:avLst/>
-          </a:prstGeom>
-          <a:noFill/>
-          <a:ln/>
-        </p:spPr>
-        <p:txBody>
-          <a:bodyPr wrap="square" lIns="0" tIns="0" rIns="0" bIns="0" rtlCol="0" anchor="ctr"/>
-          <a:lstStyle/>
-          <a:p>
-            <a:pPr indent="0" marL="0">
-              <a:buNone/>
-            </a:pPr>
-            <a:r>
-              <a:rPr lang="en-US" sz="3000" b="1" dirty="0">
-                <a:solidFill>
-                  <a:schemeClr val="accent4"/>
-                </a:solidFill>
-              </a:rPr>
-              <a:t>이렇게 하면 좋아요</a:t>
-            </a:r>
-            <a:endParaRPr lang="en-US" sz="3000" dirty="0"/>
-          </a:p>
-        </p:txBody>
-      </p:sp>
-      <p:sp>
-        <p:nvSpPr>
-          <p:cNvPr id="7" name="Tips list"/>
-          <p:cNvSpPr txBox="1"/>
-          <p:nvPr/>
-        </p:nvSpPr>
-        <p:spPr>
-          <a:xfrm>
-            <a:off x="914400" y="2880360"/>
-            <a:ext cx="4754880" cy="3017520"/>
-          </a:xfrm>
-          <a:prstGeom prst="rect">
-            <a:avLst/>
-          </a:prstGeom>
-          <a:noFill/>
-          <a:ln/>
-        </p:spPr>
-        <p:txBody>
-          <a:bodyPr wrap="square" lIns="0" tIns="0" rIns="0" bIns="0" rtlCol="0" anchor="t"/>
-          <a:lstStyle/>
-          <a:p>
-            <a:pPr marL="342900" indent="-342900">
-              <a:spcAft>
-                <a:spcPts val="2000"/>
-              </a:spcAft>
-              <a:buSzPct val="100000"/>
-              <a:buChar char="•"/>
-            </a:pPr>
-            <a:r>
-              <a:rPr lang="en-US" sz="2800" dirty="0">
-                <a:solidFill>
-                  <a:schemeClr val="tx1"/>
-                </a:solidFill>
-              </a:rPr>
-              <a:t>천천히, 또박또박 말하기</a:t>
-            </a:r>
-            <a:endParaRPr lang="en-US" sz="2800" dirty="0"/>
-          </a:p>
-          <a:p>
-            <a:pPr marL="342900" indent="-342900">
-              <a:spcAft>
-                <a:spcPts val="2000"/>
-              </a:spcAft>
-              <a:buSzPct val="100000"/>
-              <a:buChar char="•"/>
-            </a:pPr>
-            <a:r>
-              <a:rPr lang="en-US" sz="2800" dirty="0">
-                <a:solidFill>
-                  <a:schemeClr val="tx1"/>
-                </a:solidFill>
-              </a:rPr>
-              <a:t>친구들 얼굴 보며 말하기</a:t>
-            </a:r>
-            <a:endParaRPr lang="en-US" sz="2800" dirty="0"/>
-          </a:p>
-          <a:p>
-            <a:pPr marL="342900" indent="-342900">
-              <a:spcAft>
-                <a:spcPts val="2000"/>
-              </a:spcAft>
-              <a:buSzPct val="100000"/>
-              <a:buChar char="•"/>
-            </a:pPr>
-            <a:r>
-              <a:rPr lang="en-US" sz="2800" dirty="0">
-                <a:solidFill>
-                  <a:schemeClr val="tx1"/>
-                </a:solidFill>
-              </a:rPr>
-              <a:t>집에서 거울 보고 연습하기</a:t>
-            </a:r>
-            <a:endParaRPr lang="en-US" sz="2800" dirty="0"/>
-          </a:p>
-        </p:txBody>
-      </p:sp>
-      <p:sp>
-        <p:nvSpPr>
-          <p:cNvPr id="8" name="Warn card"/>
-          <p:cNvSpPr/>
-          <p:nvPr/>
-        </p:nvSpPr>
-        <p:spPr>
-          <a:xfrm>
-            <a:off x="6217920" y="1600200"/>
-            <a:ext cx="5394960" cy="4206240"/>
-          </a:xfrm>
-          <a:prstGeom prst="roundRect">
-            <a:avLst>
-              <a:gd name="adj" fmla="val 3261"/>
-            </a:avLst>
-          </a:prstGeom>
-          <a:solidFill>
-            <a:schemeClr val="bg2"/>
-          </a:solidFill>
-          <a:ln/>
-        </p:spPr>
-      </p:sp>
-      <p:sp>
-        <p:nvSpPr>
-          <p:cNvPr id="9" name="Warn circle"/>
-          <p:cNvSpPr/>
-          <p:nvPr/>
-        </p:nvSpPr>
-        <p:spPr>
-          <a:xfrm>
-            <a:off x="6583680" y="1874520"/>
-            <a:ext cx="731520" cy="731520"/>
-          </a:xfrm>
-          <a:prstGeom prst="ellipse">
-            <a:avLst/>
-          </a:prstGeom>
-          <a:solidFill>
-            <a:schemeClr val="bg1"/>
-          </a:solidFill>
-          <a:ln/>
-        </p:spPr>
-      </p:sp>
-      <p:pic>
-        <p:nvPicPr>
-          <p:cNvPr id="10" name="Warn icon" descr="preencoded.png">    </p:cNvPr>
-          <p:cNvPicPr>
-            <a:picLocks noChangeAspect="1"/>
-          </p:cNvPicPr>
-          <p:nvPr/>
-        </p:nvPicPr>
-        <p:blipFill>
-          <a:blip r:embed="rId2"/>
-          <a:stretch>
-            <a:fillRect/>
-          </a:stretch>
-        </p:blipFill>
-        <p:spPr>
-          <a:xfrm>
-            <a:off x="6766560" y="2057400"/>
-            <a:ext cx="365760" cy="365760"/>
-          </a:xfrm>
-          <a:prstGeom prst="rect">
-            <a:avLst/>
-          </a:prstGeom>
-        </p:spPr>
-      </p:pic>
-      <p:sp>
-        <p:nvSpPr>
-          <p:cNvPr id="11" name="Warn title"/>
-          <p:cNvSpPr txBox="1"/>
-          <p:nvPr/>
-        </p:nvSpPr>
-        <p:spPr>
-          <a:xfrm>
-            <a:off x="7498080" y="1874520"/>
-            <a:ext cx="3840480" cy="731520"/>
-          </a:xfrm>
-          <a:prstGeom prst="rect">
-            <a:avLst/>
-          </a:prstGeom>
-          <a:noFill/>
-          <a:ln/>
-        </p:spPr>
-        <p:txBody>
-          <a:bodyPr wrap="square" lIns="0" tIns="0" rIns="0" bIns="0" rtlCol="0" anchor="ctr"/>
-          <a:lstStyle/>
-          <a:p>
-            <a:pPr indent="0" marL="0">
-              <a:buNone/>
-            </a:pPr>
-            <a:r>
-              <a:rPr lang="en-US" sz="3000" b="1" dirty="0">
-                <a:solidFill>
-                  <a:schemeClr val="accent1"/>
-                </a:solidFill>
-              </a:rPr>
-              <a:t>주의하세요</a:t>
-            </a:r>
-            <a:endParaRPr lang="en-US" sz="3000" dirty="0"/>
-          </a:p>
-        </p:txBody>
-      </p:sp>
-      <p:sp>
-        <p:nvSpPr>
-          <p:cNvPr id="12" name="Warn list"/>
-          <p:cNvSpPr txBox="1"/>
-          <p:nvPr/>
-        </p:nvSpPr>
-        <p:spPr>
-          <a:xfrm>
-            <a:off x="6583680" y="2880360"/>
-            <a:ext cx="4754880" cy="3017520"/>
-          </a:xfrm>
-          <a:prstGeom prst="rect">
-            <a:avLst/>
-          </a:prstGeom>
-          <a:noFill/>
-          <a:ln/>
-        </p:spPr>
-        <p:txBody>
-          <a:bodyPr wrap="square" lIns="0" tIns="0" rIns="0" bIns="0" rtlCol="0" anchor="t"/>
-          <a:lstStyle/>
-          <a:p>
-            <a:pPr marL="342900" indent="-342900">
-              <a:spcAft>
-                <a:spcPts val="2000"/>
-              </a:spcAft>
-              <a:buSzPct val="100000"/>
-              <a:buChar char="•"/>
-            </a:pPr>
-            <a:r>
-              <a:rPr lang="en-US" sz="2800" dirty="0">
-                <a:solidFill>
-                  <a:schemeClr val="tx1"/>
-                </a:solidFill>
-              </a:rPr>
-              <a:t>원고를 보면 태도 점수 감점</a:t>
-            </a:r>
-            <a:endParaRPr lang="en-US" sz="2800" dirty="0"/>
-          </a:p>
-          <a:p>
-            <a:pPr marL="342900" indent="-342900">
-              <a:spcAft>
-                <a:spcPts val="2000"/>
-              </a:spcAft>
-              <a:buSzPct val="100000"/>
-              <a:buChar char="•"/>
-            </a:pPr>
-            <a:r>
-              <a:rPr lang="en-US" sz="2800" dirty="0">
-                <a:solidFill>
-                  <a:schemeClr val="tx1"/>
-                </a:solidFill>
-              </a:rPr>
-              <a:t>결석 시 추후 재평가</a:t>
-            </a:r>
-            <a:endParaRPr lang="en-US" sz="2800" dirty="0"/>
-          </a:p>
-          <a:p>
-            <a:pPr marL="342900" indent="-342900">
-              <a:spcAft>
-                <a:spcPts val="2000"/>
-              </a:spcAft>
-              <a:buSzPct val="100000"/>
-              <a:buChar char="•"/>
-            </a:pPr>
-            <a:r>
-              <a:rPr lang="en-US" sz="2800" dirty="0">
-                <a:solidFill>
-                  <a:schemeClr val="tx1"/>
-                </a:solidFill>
-              </a:rPr>
-              <a:t>번역기로 쓴 원고는 0점</a:t>
-            </a:r>
-            <a:endParaRPr lang="en-US" sz="2800" dirty="0"/>
-          </a:p>
-        </p:txBody>
-      </p:sp>
-      <p:sp>
-        <p:nvSpPr>
-          <p:cNvPr id="25" name="Slide Number Placeholder 0"/>
-          <p:cNvSpPr>
-            <a:spLocks noGrp="1"/>
-          </p:cNvSpPr>
-          <p:nvPr>
-            <p:ph type="sldNum" sz="quarter" idx="4294967295"/>
-          </p:nvPr>
-        </p:nvSpPr>
-        <p:spPr>
-          <a:xfrm>
-            <a:off x="11247120" y="6355080"/>
-            <a:ext cx="548640" cy="320040"/>
-          </a:xfrm>
-          <a:prstGeom prst="rect">
-            <a:avLst/>
-          </a:prstGeom>
-          <a:extLst>
-            <a:ext uri="{C572A759-6A51-4108-AA02-DFA0A04FC94B}">
-              <ma14:wrappingTextBoxFlag xmlns:ma14="http://schemas.microsoft.com/office/mac/drawingml/2011/main" val="0"/>
-            </a:ext>
-          </a:extLst>
-        </p:spPr>
-        <p:txBody>
-          <a:bodyPr/>
-          <a:lstStyle>
-            <a:lvl1pPr>
-              <a:defRPr sz="1400">
-                <a:solidFill>
-                  <a:schemeClr val="accent5"/>
-                </a:solidFill>
-              </a:defRPr>
-            </a:lvl1pPr>
-          </a:lstStyle>
-          <a:p>
-            <a:pPr algn="r"/>
-            <a:fld id="{F7021451-1387-4CA6-816F-3879F97B5CBC}" type="slidenum">
-              <a:rPr b="0" lang="en-US"/>
               <a:t>7</a:t>
             </a:fld>
             <a:endParaRPr lang="en-US"/>
@@ -5910,8 +7304,8 @@
         </p:nvSpPr>
         <p:spPr>
           <a:xfrm>
-            <a:off x="731520" y="2286000"/>
-            <a:ext cx="10698480" cy="1371600"/>
+            <a:off x="548640" y="365760"/>
+            <a:ext cx="11064240" cy="914400"/>
           </a:xfrm>
           <a:prstGeom prst="rect">
             <a:avLst/>
@@ -5927,82 +7321,1370 @@
               <a:buNone/>
             </a:pPr>
             <a:r>
-              <a:rPr lang="en-US" sz="5400" b="1" dirty="0">
+              <a:rPr lang="en-US" sz="4000" b="1" dirty="0">
+                <a:solidFill>
+                  <a:schemeClr val="tx2"/>
+                </a:solidFill>
+              </a:rPr>
+              <a:t>채점 기준 ② 인터뷰 말하기 (5점)</a:t>
+            </a:r>
+            <a:endParaRPr lang="en-US" sz="4000" dirty="0"/>
+          </a:p>
+        </p:txBody>
+      </p:sp>
+      <p:sp>
+        <p:nvSpPr>
+          <p:cNvPr id="3" name="Speak card 1"/>
+          <p:cNvSpPr/>
+          <p:nvPr/>
+        </p:nvSpPr>
+        <p:spPr>
+          <a:xfrm>
+            <a:off x="548640" y="1554480"/>
+            <a:ext cx="2606040" cy="4572000"/>
+          </a:xfrm>
+          <a:prstGeom prst="roundRect">
+            <a:avLst>
+              <a:gd name="adj" fmla="val 5263"/>
+            </a:avLst>
+          </a:prstGeom>
+          <a:solidFill>
+            <a:schemeClr val="tx2"/>
+          </a:solidFill>
+          <a:ln/>
+        </p:spPr>
+      </p:sp>
+      <p:sp>
+        <p:nvSpPr>
+          <p:cNvPr id="4" name="Speak score 1"/>
+          <p:cNvSpPr txBox="1"/>
+          <p:nvPr/>
+        </p:nvSpPr>
+        <p:spPr>
+          <a:xfrm>
+            <a:off x="548640" y="1783080"/>
+            <a:ext cx="2606040" cy="1097280"/>
+          </a:xfrm>
+          <a:prstGeom prst="rect">
+            <a:avLst/>
+          </a:prstGeom>
+          <a:noFill/>
+          <a:ln/>
+        </p:spPr>
+        <p:txBody>
+          <a:bodyPr wrap="square" lIns="0" tIns="0" rIns="0" bIns="0" rtlCol="0" anchor="ctr"/>
+          <a:lstStyle/>
+          <a:p>
+            <a:pPr algn="ctr" indent="0" marL="0">
+              <a:buNone/>
+            </a:pPr>
+            <a:r>
+              <a:rPr lang="en-US" sz="6000" b="1" dirty="0">
+                <a:solidFill>
+                  <a:schemeClr val="accent3"/>
+                </a:solidFill>
+              </a:rPr>
+              <a:t>5점</a:t>
+            </a:r>
+            <a:endParaRPr lang="en-US" sz="6000" dirty="0"/>
+          </a:p>
+        </p:txBody>
+      </p:sp>
+      <p:sp>
+        <p:nvSpPr>
+          <p:cNvPr id="5" name="Speak head 1"/>
+          <p:cNvSpPr txBox="1"/>
+          <p:nvPr/>
+        </p:nvSpPr>
+        <p:spPr>
+          <a:xfrm>
+            <a:off x="548640" y="3017520"/>
+            <a:ext cx="2606040" cy="640080"/>
+          </a:xfrm>
+          <a:prstGeom prst="rect">
+            <a:avLst/>
+          </a:prstGeom>
+          <a:noFill/>
+          <a:ln/>
+        </p:spPr>
+        <p:txBody>
+          <a:bodyPr wrap="square" lIns="0" tIns="0" rIns="0" bIns="0" rtlCol="0" anchor="ctr"/>
+          <a:lstStyle/>
+          <a:p>
+            <a:pPr algn="ctr" indent="0" marL="0">
+              <a:buNone/>
+            </a:pPr>
+            <a:r>
+              <a:rPr lang="en-US" sz="2800" b="1" dirty="0">
                 <a:solidFill>
                   <a:schemeClr val="bg1"/>
+                </a:solidFill>
+              </a:rPr>
+              <a:t>내 문장 3개</a:t>
+            </a:r>
+            <a:endParaRPr lang="en-US" sz="2800" dirty="0"/>
+          </a:p>
+        </p:txBody>
+      </p:sp>
+      <p:sp>
+        <p:nvSpPr>
+          <p:cNvPr id="6" name="Speak desc 1"/>
+          <p:cNvSpPr txBox="1"/>
+          <p:nvPr/>
+        </p:nvSpPr>
+        <p:spPr>
+          <a:xfrm>
+            <a:off x="685800" y="3840480"/>
+            <a:ext cx="2331720" cy="2011680"/>
+          </a:xfrm>
+          <a:prstGeom prst="rect">
+            <a:avLst/>
+          </a:prstGeom>
+          <a:noFill/>
+          <a:ln/>
+        </p:spPr>
+        <p:txBody>
+          <a:bodyPr wrap="square" lIns="0" tIns="0" rIns="0" bIns="0" rtlCol="0" anchor="t"/>
+          <a:lstStyle/>
+          <a:p>
+            <a:pPr algn="ctr" indent="0" marL="0">
+              <a:buNone/>
+            </a:pPr>
+            <a:r>
+              <a:rPr lang="en-US" sz="2200" dirty="0">
+                <a:solidFill>
+                  <a:schemeClr val="bg1"/>
+                </a:solidFill>
+              </a:rPr>
+              <a:t>질문 정확히 이해</a:t>
+            </a:r>
+            <a:endParaRPr lang="en-US" sz="2200" dirty="0"/>
+          </a:p>
+          <a:p>
+            <a:pPr algn="ctr" indent="0" marL="0">
+              <a:buNone/>
+            </a:pPr>
+            <a:r>
+              <a:rPr lang="en-US" sz="2200" dirty="0">
+                <a:solidFill>
+                  <a:schemeClr val="bg1"/>
+                </a:solidFill>
+              </a:rPr>
+              <a:t>발음·문법 정확</a:t>
+            </a:r>
+            <a:endParaRPr lang="en-US" sz="2200" dirty="0"/>
+          </a:p>
+          <a:p>
+            <a:pPr algn="ctr" indent="0" marL="0">
+              <a:buNone/>
+            </a:pPr>
+            <a:r>
+              <a:rPr lang="en-US" sz="2200" dirty="0">
+                <a:solidFill>
+                  <a:schemeClr val="bg1"/>
+                </a:solidFill>
+              </a:rPr>
+              <a:t>유창하게 답변</a:t>
+            </a:r>
+            <a:endParaRPr lang="en-US" sz="2200" dirty="0"/>
+          </a:p>
+        </p:txBody>
+      </p:sp>
+      <p:sp>
+        <p:nvSpPr>
+          <p:cNvPr id="7" name="Speak card 2"/>
+          <p:cNvSpPr/>
+          <p:nvPr/>
+        </p:nvSpPr>
+        <p:spPr>
+          <a:xfrm>
+            <a:off x="3364992" y="1554480"/>
+            <a:ext cx="2606040" cy="4572000"/>
+          </a:xfrm>
+          <a:prstGeom prst="roundRect">
+            <a:avLst>
+              <a:gd name="adj" fmla="val 5263"/>
+            </a:avLst>
+          </a:prstGeom>
+          <a:solidFill>
+            <a:schemeClr val="bg2"/>
+          </a:solidFill>
+          <a:ln/>
+        </p:spPr>
+      </p:sp>
+      <p:sp>
+        <p:nvSpPr>
+          <p:cNvPr id="8" name="Speak score 2"/>
+          <p:cNvSpPr txBox="1"/>
+          <p:nvPr/>
+        </p:nvSpPr>
+        <p:spPr>
+          <a:xfrm>
+            <a:off x="3364992" y="1783080"/>
+            <a:ext cx="2606040" cy="1097280"/>
+          </a:xfrm>
+          <a:prstGeom prst="rect">
+            <a:avLst/>
+          </a:prstGeom>
+          <a:noFill/>
+          <a:ln/>
+        </p:spPr>
+        <p:txBody>
+          <a:bodyPr wrap="square" lIns="0" tIns="0" rIns="0" bIns="0" rtlCol="0" anchor="ctr"/>
+          <a:lstStyle/>
+          <a:p>
+            <a:pPr algn="ctr" indent="0" marL="0">
+              <a:buNone/>
+            </a:pPr>
+            <a:r>
+              <a:rPr lang="en-US" sz="6000" b="1" dirty="0">
+                <a:solidFill>
+                  <a:schemeClr val="accent1"/>
+                </a:solidFill>
+              </a:rPr>
+              <a:t>4점</a:t>
+            </a:r>
+            <a:endParaRPr lang="en-US" sz="6000" dirty="0"/>
+          </a:p>
+        </p:txBody>
+      </p:sp>
+      <p:sp>
+        <p:nvSpPr>
+          <p:cNvPr id="9" name="Speak head 2"/>
+          <p:cNvSpPr txBox="1"/>
+          <p:nvPr/>
+        </p:nvSpPr>
+        <p:spPr>
+          <a:xfrm>
+            <a:off x="3364992" y="3017520"/>
+            <a:ext cx="2606040" cy="640080"/>
+          </a:xfrm>
+          <a:prstGeom prst="rect">
+            <a:avLst/>
+          </a:prstGeom>
+          <a:noFill/>
+          <a:ln/>
+        </p:spPr>
+        <p:txBody>
+          <a:bodyPr wrap="square" lIns="0" tIns="0" rIns="0" bIns="0" rtlCol="0" anchor="ctr"/>
+          <a:lstStyle/>
+          <a:p>
+            <a:pPr algn="ctr" indent="0" marL="0">
+              <a:buNone/>
+            </a:pPr>
+            <a:r>
+              <a:rPr lang="en-US" sz="2800" b="1" dirty="0">
+                <a:solidFill>
+                  <a:schemeClr val="tx2"/>
+                </a:solidFill>
+              </a:rPr>
+              <a:t>내 문장 2개</a:t>
+            </a:r>
+            <a:endParaRPr lang="en-US" sz="2800" dirty="0"/>
+          </a:p>
+        </p:txBody>
+      </p:sp>
+      <p:sp>
+        <p:nvSpPr>
+          <p:cNvPr id="10" name="Speak desc 2"/>
+          <p:cNvSpPr txBox="1"/>
+          <p:nvPr/>
+        </p:nvSpPr>
+        <p:spPr>
+          <a:xfrm>
+            <a:off x="3502152" y="3840480"/>
+            <a:ext cx="2331720" cy="2011680"/>
+          </a:xfrm>
+          <a:prstGeom prst="rect">
+            <a:avLst/>
+          </a:prstGeom>
+          <a:noFill/>
+          <a:ln/>
+        </p:spPr>
+        <p:txBody>
+          <a:bodyPr wrap="square" lIns="0" tIns="0" rIns="0" bIns="0" rtlCol="0" anchor="t"/>
+          <a:lstStyle/>
+          <a:p>
+            <a:pPr algn="ctr" indent="0" marL="0">
+              <a:buNone/>
+            </a:pPr>
+            <a:r>
+              <a:rPr lang="en-US" sz="2200" dirty="0">
+                <a:solidFill>
+                  <a:schemeClr val="tx1"/>
+                </a:solidFill>
+              </a:rPr>
+              <a:t>질문 정확히 이해</a:t>
+            </a:r>
+            <a:endParaRPr lang="en-US" sz="2200" dirty="0"/>
+          </a:p>
+          <a:p>
+            <a:pPr algn="ctr" indent="0" marL="0">
+              <a:buNone/>
+            </a:pPr>
+            <a:r>
+              <a:rPr lang="en-US" sz="2200" dirty="0">
+                <a:solidFill>
+                  <a:schemeClr val="tx1"/>
+                </a:solidFill>
+              </a:rPr>
+              <a:t>올바르게 활용</a:t>
+            </a:r>
+            <a:endParaRPr lang="en-US" sz="2200" dirty="0"/>
+          </a:p>
+          <a:p>
+            <a:pPr algn="ctr" indent="0" marL="0">
+              <a:buNone/>
+            </a:pPr>
+            <a:r>
+              <a:rPr lang="en-US" sz="2200" dirty="0">
+                <a:solidFill>
+                  <a:schemeClr val="tx1"/>
+                </a:solidFill>
+              </a:rPr>
+              <a:t>답변</a:t>
+            </a:r>
+            <a:endParaRPr lang="en-US" sz="2200" dirty="0"/>
+          </a:p>
+        </p:txBody>
+      </p:sp>
+      <p:sp>
+        <p:nvSpPr>
+          <p:cNvPr id="11" name="Speak card 3"/>
+          <p:cNvSpPr/>
+          <p:nvPr/>
+        </p:nvSpPr>
+        <p:spPr>
+          <a:xfrm>
+            <a:off x="6181344" y="1554480"/>
+            <a:ext cx="2606040" cy="4572000"/>
+          </a:xfrm>
+          <a:prstGeom prst="roundRect">
+            <a:avLst>
+              <a:gd name="adj" fmla="val 5263"/>
+            </a:avLst>
+          </a:prstGeom>
+          <a:solidFill>
+            <a:schemeClr val="bg2"/>
+          </a:solidFill>
+          <a:ln/>
+        </p:spPr>
+      </p:sp>
+      <p:sp>
+        <p:nvSpPr>
+          <p:cNvPr id="12" name="Speak score 3"/>
+          <p:cNvSpPr txBox="1"/>
+          <p:nvPr/>
+        </p:nvSpPr>
+        <p:spPr>
+          <a:xfrm>
+            <a:off x="6181344" y="1783080"/>
+            <a:ext cx="2606040" cy="1097280"/>
+          </a:xfrm>
+          <a:prstGeom prst="rect">
+            <a:avLst/>
+          </a:prstGeom>
+          <a:noFill/>
+          <a:ln/>
+        </p:spPr>
+        <p:txBody>
+          <a:bodyPr wrap="square" lIns="0" tIns="0" rIns="0" bIns="0" rtlCol="0" anchor="ctr"/>
+          <a:lstStyle/>
+          <a:p>
+            <a:pPr algn="ctr" indent="0" marL="0">
+              <a:buNone/>
+            </a:pPr>
+            <a:r>
+              <a:rPr lang="en-US" sz="6000" b="1" dirty="0">
+                <a:solidFill>
+                  <a:schemeClr val="accent1"/>
+                </a:solidFill>
+              </a:rPr>
+              <a:t>3점</a:t>
+            </a:r>
+            <a:endParaRPr lang="en-US" sz="6000" dirty="0"/>
+          </a:p>
+        </p:txBody>
+      </p:sp>
+      <p:sp>
+        <p:nvSpPr>
+          <p:cNvPr id="13" name="Speak head 3"/>
+          <p:cNvSpPr txBox="1"/>
+          <p:nvPr/>
+        </p:nvSpPr>
+        <p:spPr>
+          <a:xfrm>
+            <a:off x="6181344" y="3017520"/>
+            <a:ext cx="2606040" cy="640080"/>
+          </a:xfrm>
+          <a:prstGeom prst="rect">
+            <a:avLst/>
+          </a:prstGeom>
+          <a:noFill/>
+          <a:ln/>
+        </p:spPr>
+        <p:txBody>
+          <a:bodyPr wrap="square" lIns="0" tIns="0" rIns="0" bIns="0" rtlCol="0" anchor="ctr"/>
+          <a:lstStyle/>
+          <a:p>
+            <a:pPr algn="ctr" indent="0" marL="0">
+              <a:buNone/>
+            </a:pPr>
+            <a:r>
+              <a:rPr lang="en-US" sz="2800" b="1" dirty="0">
+                <a:solidFill>
+                  <a:schemeClr val="tx2"/>
+                </a:solidFill>
+              </a:rPr>
+              <a:t>내 문장 1개</a:t>
+            </a:r>
+            <a:endParaRPr lang="en-US" sz="2800" dirty="0"/>
+          </a:p>
+        </p:txBody>
+      </p:sp>
+      <p:sp>
+        <p:nvSpPr>
+          <p:cNvPr id="14" name="Speak desc 3"/>
+          <p:cNvSpPr txBox="1"/>
+          <p:nvPr/>
+        </p:nvSpPr>
+        <p:spPr>
+          <a:xfrm>
+            <a:off x="6318504" y="3840480"/>
+            <a:ext cx="2331720" cy="2011680"/>
+          </a:xfrm>
+          <a:prstGeom prst="rect">
+            <a:avLst/>
+          </a:prstGeom>
+          <a:noFill/>
+          <a:ln/>
+        </p:spPr>
+        <p:txBody>
+          <a:bodyPr wrap="square" lIns="0" tIns="0" rIns="0" bIns="0" rtlCol="0" anchor="t"/>
+          <a:lstStyle/>
+          <a:p>
+            <a:pPr algn="ctr" indent="0" marL="0">
+              <a:buNone/>
+            </a:pPr>
+            <a:r>
+              <a:rPr lang="en-US" sz="2200" dirty="0">
+                <a:solidFill>
+                  <a:schemeClr val="tx1"/>
+                </a:solidFill>
+              </a:rPr>
+              <a:t>질문에 대해</a:t>
+            </a:r>
+            <a:endParaRPr lang="en-US" sz="2200" dirty="0"/>
+          </a:p>
+          <a:p>
+            <a:pPr algn="ctr" indent="0" marL="0">
+              <a:buNone/>
+            </a:pPr>
+            <a:r>
+              <a:rPr lang="en-US" sz="2200" dirty="0">
+                <a:solidFill>
+                  <a:schemeClr val="tx1"/>
+                </a:solidFill>
+              </a:rPr>
+              <a:t>올바르게 활용</a:t>
+            </a:r>
+            <a:endParaRPr lang="en-US" sz="2200" dirty="0"/>
+          </a:p>
+          <a:p>
+            <a:pPr algn="ctr" indent="0" marL="0">
+              <a:buNone/>
+            </a:pPr>
+            <a:r>
+              <a:rPr lang="en-US" sz="2200" dirty="0">
+                <a:solidFill>
+                  <a:schemeClr val="tx1"/>
+                </a:solidFill>
+              </a:rPr>
+              <a:t>답변</a:t>
+            </a:r>
+            <a:endParaRPr lang="en-US" sz="2200" dirty="0"/>
+          </a:p>
+        </p:txBody>
+      </p:sp>
+      <p:sp>
+        <p:nvSpPr>
+          <p:cNvPr id="15" name="Speak card 4"/>
+          <p:cNvSpPr/>
+          <p:nvPr/>
+        </p:nvSpPr>
+        <p:spPr>
+          <a:xfrm>
+            <a:off x="8997696" y="1554480"/>
+            <a:ext cx="2606040" cy="4572000"/>
+          </a:xfrm>
+          <a:prstGeom prst="roundRect">
+            <a:avLst>
+              <a:gd name="adj" fmla="val 5263"/>
+            </a:avLst>
+          </a:prstGeom>
+          <a:solidFill>
+            <a:schemeClr val="bg2"/>
+          </a:solidFill>
+          <a:ln/>
+        </p:spPr>
+      </p:sp>
+      <p:sp>
+        <p:nvSpPr>
+          <p:cNvPr id="16" name="Speak score 4"/>
+          <p:cNvSpPr txBox="1"/>
+          <p:nvPr/>
+        </p:nvSpPr>
+        <p:spPr>
+          <a:xfrm>
+            <a:off x="8997696" y="1783080"/>
+            <a:ext cx="2606040" cy="1097280"/>
+          </a:xfrm>
+          <a:prstGeom prst="rect">
+            <a:avLst/>
+          </a:prstGeom>
+          <a:noFill/>
+          <a:ln/>
+        </p:spPr>
+        <p:txBody>
+          <a:bodyPr wrap="square" lIns="0" tIns="0" rIns="0" bIns="0" rtlCol="0" anchor="ctr"/>
+          <a:lstStyle/>
+          <a:p>
+            <a:pPr algn="ctr" indent="0" marL="0">
+              <a:buNone/>
+            </a:pPr>
+            <a:r>
+              <a:rPr lang="en-US" sz="6000" b="1" dirty="0">
+                <a:solidFill>
+                  <a:schemeClr val="accent1"/>
+                </a:solidFill>
+              </a:rPr>
+              <a:t>2점</a:t>
+            </a:r>
+            <a:endParaRPr lang="en-US" sz="6000" dirty="0"/>
+          </a:p>
+        </p:txBody>
+      </p:sp>
+      <p:sp>
+        <p:nvSpPr>
+          <p:cNvPr id="17" name="Speak head 4"/>
+          <p:cNvSpPr txBox="1"/>
+          <p:nvPr/>
+        </p:nvSpPr>
+        <p:spPr>
+          <a:xfrm>
+            <a:off x="8997696" y="3017520"/>
+            <a:ext cx="2606040" cy="640080"/>
+          </a:xfrm>
+          <a:prstGeom prst="rect">
+            <a:avLst/>
+          </a:prstGeom>
+          <a:noFill/>
+          <a:ln/>
+        </p:spPr>
+        <p:txBody>
+          <a:bodyPr wrap="square" lIns="0" tIns="0" rIns="0" bIns="0" rtlCol="0" anchor="ctr"/>
+          <a:lstStyle/>
+          <a:p>
+            <a:pPr algn="ctr" indent="0" marL="0">
+              <a:buNone/>
+            </a:pPr>
+            <a:r>
+              <a:rPr lang="en-US" sz="2800" b="1" dirty="0">
+                <a:solidFill>
+                  <a:schemeClr val="tx2"/>
+                </a:solidFill>
+              </a:rPr>
+              <a:t>기본 점수</a:t>
+            </a:r>
+            <a:endParaRPr lang="en-US" sz="2800" dirty="0"/>
+          </a:p>
+        </p:txBody>
+      </p:sp>
+      <p:sp>
+        <p:nvSpPr>
+          <p:cNvPr id="18" name="Speak desc 4"/>
+          <p:cNvSpPr txBox="1"/>
+          <p:nvPr/>
+        </p:nvSpPr>
+        <p:spPr>
+          <a:xfrm>
+            <a:off x="9134856" y="3840480"/>
+            <a:ext cx="2331720" cy="2011680"/>
+          </a:xfrm>
+          <a:prstGeom prst="rect">
+            <a:avLst/>
+          </a:prstGeom>
+          <a:noFill/>
+          <a:ln/>
+        </p:spPr>
+        <p:txBody>
+          <a:bodyPr wrap="square" lIns="0" tIns="0" rIns="0" bIns="0" rtlCol="0" anchor="t"/>
+          <a:lstStyle/>
+          <a:p>
+            <a:pPr algn="ctr" indent="0" marL="0">
+              <a:buNone/>
+            </a:pPr>
+            <a:r>
+              <a:rPr lang="en-US" sz="2200" dirty="0">
+                <a:solidFill>
+                  <a:schemeClr val="tx1"/>
+                </a:solidFill>
+              </a:rPr>
+              <a:t>참여했으나</a:t>
+            </a:r>
+            <a:endParaRPr lang="en-US" sz="2200" dirty="0"/>
+          </a:p>
+          <a:p>
+            <a:pPr algn="ctr" indent="0" marL="0">
+              <a:buNone/>
+            </a:pPr>
+            <a:r>
+              <a:rPr lang="en-US" sz="2200" dirty="0">
+                <a:solidFill>
+                  <a:schemeClr val="tx1"/>
+                </a:solidFill>
+              </a:rPr>
+              <a:t>미제출</a:t>
+            </a:r>
+            <a:endParaRPr lang="en-US" sz="2200" dirty="0"/>
+          </a:p>
+          <a:p>
+            <a:pPr algn="ctr" indent="0" marL="0">
+              <a:buNone/>
+            </a:pPr>
+            <a:r>
+              <a:rPr lang="en-US" sz="2200" dirty="0">
+                <a:solidFill>
+                  <a:schemeClr val="tx1"/>
+                </a:solidFill>
+              </a:rPr>
+              <a:t>(백지 제출 등)</a:t>
+            </a:r>
+            <a:endParaRPr lang="en-US" sz="2200" dirty="0"/>
+          </a:p>
+        </p:txBody>
+      </p:sp>
+      <p:sp>
+        <p:nvSpPr>
+          <p:cNvPr id="25" name="Slide Number Placeholder 0"/>
+          <p:cNvSpPr>
+            <a:spLocks noGrp="1"/>
+          </p:cNvSpPr>
+          <p:nvPr>
+            <p:ph type="sldNum" sz="quarter" idx="4294967295"/>
+          </p:nvPr>
+        </p:nvSpPr>
+        <p:spPr>
+          <a:xfrm>
+            <a:off x="11247120" y="6355080"/>
+            <a:ext cx="548640" cy="320040"/>
+          </a:xfrm>
+          <a:prstGeom prst="rect">
+            <a:avLst/>
+          </a:prstGeom>
+          <a:extLst>
+            <a:ext uri="{C572A759-6A51-4108-AA02-DFA0A04FC94B}">
+              <ma14:wrappingTextBoxFlag xmlns:ma14="http://schemas.microsoft.com/office/mac/drawingml/2011/main" val="0"/>
+            </a:ext>
+          </a:extLst>
+        </p:spPr>
+        <p:txBody>
+          <a:bodyPr/>
+          <a:lstStyle>
+            <a:lvl1pPr>
+              <a:defRPr sz="1400">
+                <a:solidFill>
+                  <a:schemeClr val="accent5"/>
+                </a:solidFill>
+              </a:defRPr>
+            </a:lvl1pPr>
+          </a:lstStyle>
+          <a:p>
+            <a:pPr algn="r"/>
+            <a:fld id="{F7021451-1387-4CA6-816F-3879F97B5CBC}" type="slidenum">
+              <a:rPr b="0" lang="en-US"/>
+              <a:t>8</a:t>
+            </a:fld>
+            <a:endParaRPr lang="en-US"/>
+          </a:p>
+        </p:txBody>
+      </p:sp>
+    </p:spTree>
+  </p:cSld>
+  <p:clrMapOvr>
+    <a:masterClrMapping/>
+  </p:clrMapOvr>
+</p:sld>
+</file>
+
+<file path=ppt/slides/slide9.xml><?xml version="1.0" encoding="utf-8"?>
+<p:sld xmlns:a="http://schemas.openxmlformats.org/drawingml/2006/main" xmlns:r="http://schemas.openxmlformats.org/officeDocument/2006/relationships" xmlns:p="http://schemas.openxmlformats.org/presentationml/2006/main">
+  <p:cSld name="Slide 9">
+    <p:spTree>
+      <p:nvGrpSpPr>
+        <p:cNvPr id="1" name=""/>
+        <p:cNvGrpSpPr/>
+        <p:nvPr/>
+      </p:nvGrpSpPr>
+      <p:grpSpPr>
+        <a:xfrm>
+          <a:off x="0" y="0"/>
+          <a:ext cx="0" cy="0"/>
+          <a:chOff x="0" y="0"/>
+          <a:chExt cx="0" cy="0"/>
+        </a:xfrm>
+      </p:grpSpPr>
+      <p:sp>
+        <p:nvSpPr>
+          <p:cNvPr id="2" name="Text 0"/>
+          <p:cNvSpPr/>
+          <p:nvPr>
+            <p:ph idx="100" type="title" hasCustomPrompt="1"/>
+          </p:nvPr>
+        </p:nvSpPr>
+        <p:spPr>
+          <a:xfrm>
+            <a:off x="548640" y="365760"/>
+            <a:ext cx="11064240" cy="914400"/>
+          </a:xfrm>
+          <a:prstGeom prst="rect">
+            <a:avLst/>
+          </a:prstGeom>
+          <a:noFill/>
+          <a:ln/>
+        </p:spPr>
+        <p:txBody>
+          <a:bodyPr wrap="square" lIns="0" tIns="0" rIns="0" bIns="0" rtlCol="0" anchor="ctr"/>
+          <a:lstStyle/>
+          <a:p>
+            <a:pPr algn="l" indent="0" marL="0">
+              <a:buNone/>
+            </a:pPr>
+            <a:r>
+              <a:rPr lang="en-US" sz="4000" b="1" dirty="0">
+                <a:solidFill>
+                  <a:schemeClr val="tx2"/>
+                </a:solidFill>
+              </a:rPr>
+              <a:t>인터뷰는 이런 느낌이에요</a:t>
+            </a:r>
+            <a:endParaRPr lang="en-US" sz="4000" dirty="0"/>
+          </a:p>
+        </p:txBody>
+      </p:sp>
+      <p:sp>
+        <p:nvSpPr>
+          <p:cNvPr id="3" name="Bubble 1"/>
+          <p:cNvSpPr/>
+          <p:nvPr/>
+        </p:nvSpPr>
+        <p:spPr>
+          <a:xfrm>
+            <a:off x="548640" y="1508760"/>
+            <a:ext cx="9692640" cy="987552"/>
+          </a:xfrm>
+          <a:prstGeom prst="roundRect">
+            <a:avLst>
+              <a:gd name="adj" fmla="val 13889"/>
+            </a:avLst>
+          </a:prstGeom>
+          <a:solidFill>
+            <a:schemeClr val="bg2"/>
+          </a:solidFill>
+          <a:ln/>
+        </p:spPr>
+      </p:sp>
+      <p:sp>
+        <p:nvSpPr>
+          <p:cNvPr id="4" name="Speaker 1"/>
+          <p:cNvSpPr txBox="1"/>
+          <p:nvPr/>
+        </p:nvSpPr>
+        <p:spPr>
+          <a:xfrm>
+            <a:off x="777240" y="1508760"/>
+            <a:ext cx="1188720" cy="987552"/>
+          </a:xfrm>
+          <a:prstGeom prst="rect">
+            <a:avLst/>
+          </a:prstGeom>
+          <a:noFill/>
+          <a:ln/>
+        </p:spPr>
+        <p:txBody>
+          <a:bodyPr wrap="square" lIns="0" tIns="0" rIns="0" bIns="0" rtlCol="0" anchor="ctr"/>
+          <a:lstStyle/>
+          <a:p>
+            <a:pPr indent="0" marL="0">
+              <a:buNone/>
+            </a:pPr>
+            <a:r>
+              <a:rPr lang="en-US" sz="2200" b="1" dirty="0">
+                <a:solidFill>
+                  <a:schemeClr val="tx2"/>
+                </a:solidFill>
+              </a:rPr>
+              <a:t>선생님</a:t>
+            </a:r>
+            <a:endParaRPr lang="en-US" sz="2200" dirty="0"/>
+          </a:p>
+        </p:txBody>
+      </p:sp>
+      <p:sp>
+        <p:nvSpPr>
+          <p:cNvPr id="5" name="Bubble jp 1"/>
+          <p:cNvSpPr txBox="1"/>
+          <p:nvPr/>
+        </p:nvSpPr>
+        <p:spPr>
+          <a:xfrm>
+            <a:off x="1965960" y="1581912"/>
+            <a:ext cx="8046720" cy="502920"/>
+          </a:xfrm>
+          <a:prstGeom prst="rect">
+            <a:avLst/>
+          </a:prstGeom>
+          <a:noFill/>
+          <a:ln/>
+        </p:spPr>
+        <p:txBody>
+          <a:bodyPr wrap="square" lIns="0" tIns="0" rIns="0" bIns="0" rtlCol="0" anchor="ctr"/>
+          <a:lstStyle/>
+          <a:p>
+            <a:pPr indent="0" marL="0">
+              <a:buNone/>
+            </a:pPr>
+            <a:r>
+              <a:rPr lang="en-US" sz="2400" b="1" dirty="0">
+                <a:solidFill>
+                  <a:schemeClr val="tx1"/>
                 </a:solidFill>
                 <a:latin typeface="Meiryo" pitchFamily="34" charset="0"/>
                 <a:ea typeface="Meiryo" pitchFamily="34" charset="-122"/>
                 <a:cs typeface="Meiryo" pitchFamily="34" charset="-120"/>
               </a:rPr>
-              <a:t>がんばってください！</a:t>
-            </a:r>
-            <a:endParaRPr lang="en-US" sz="5400" dirty="0"/>
-          </a:p>
-        </p:txBody>
-      </p:sp>
-      <p:sp>
-        <p:nvSpPr>
-          <p:cNvPr id="3" name="Text 0"/>
+              <a:t>日本（にほん）で 何（なに）を したいですか。</a:t>
+            </a:r>
+            <a:endParaRPr lang="en-US" sz="2400" dirty="0"/>
+          </a:p>
+        </p:txBody>
+      </p:sp>
+      <p:sp>
+        <p:nvSpPr>
+          <p:cNvPr id="6" name="Bubble ko 1"/>
+          <p:cNvSpPr txBox="1"/>
+          <p:nvPr/>
+        </p:nvSpPr>
+        <p:spPr>
+          <a:xfrm>
+            <a:off x="1965960" y="2057400"/>
+            <a:ext cx="8046720" cy="365760"/>
+          </a:xfrm>
+          <a:prstGeom prst="rect">
+            <a:avLst/>
+          </a:prstGeom>
+          <a:noFill/>
+          <a:ln/>
+        </p:spPr>
+        <p:txBody>
+          <a:bodyPr wrap="square" lIns="0" tIns="0" rIns="0" bIns="0" rtlCol="0" anchor="ctr"/>
+          <a:lstStyle/>
+          <a:p>
+            <a:pPr indent="0" marL="0">
+              <a:buNone/>
+            </a:pPr>
+            <a:r>
+              <a:rPr lang="en-US" sz="1800" dirty="0">
+                <a:solidFill>
+                  <a:schemeClr val="accent5"/>
+                </a:solidFill>
+              </a:rPr>
+              <a:t>일본에서 무엇을 하고 싶어요?</a:t>
+            </a:r>
+            <a:endParaRPr lang="en-US" sz="1800" dirty="0"/>
+          </a:p>
+        </p:txBody>
+      </p:sp>
+      <p:sp>
+        <p:nvSpPr>
+          <p:cNvPr id="7" name="Bubble 2"/>
           <p:cNvSpPr/>
+          <p:nvPr/>
+        </p:nvSpPr>
+        <p:spPr>
+          <a:xfrm>
+            <a:off x="1920240" y="2624328"/>
+            <a:ext cx="9692640" cy="987552"/>
+          </a:xfrm>
+          <a:prstGeom prst="roundRect">
+            <a:avLst>
+              <a:gd name="adj" fmla="val 13889"/>
+            </a:avLst>
+          </a:prstGeom>
+          <a:solidFill>
+            <a:schemeClr val="accent6"/>
+          </a:solidFill>
+          <a:ln/>
+        </p:spPr>
+      </p:sp>
+      <p:sp>
+        <p:nvSpPr>
+          <p:cNvPr id="8" name="Speaker 2"/>
+          <p:cNvSpPr txBox="1"/>
+          <p:nvPr/>
+        </p:nvSpPr>
+        <p:spPr>
+          <a:xfrm>
+            <a:off x="2148840" y="2624328"/>
+            <a:ext cx="1188720" cy="987552"/>
+          </a:xfrm>
+          <a:prstGeom prst="rect">
+            <a:avLst/>
+          </a:prstGeom>
+          <a:noFill/>
+          <a:ln/>
+        </p:spPr>
+        <p:txBody>
+          <a:bodyPr wrap="square" lIns="0" tIns="0" rIns="0" bIns="0" rtlCol="0" anchor="ctr"/>
+          <a:lstStyle/>
+          <a:p>
+            <a:pPr indent="0" marL="0">
+              <a:buNone/>
+            </a:pPr>
+            <a:r>
+              <a:rPr lang="en-US" sz="2200" b="1" dirty="0">
+                <a:solidFill>
+                  <a:schemeClr val="accent1"/>
+                </a:solidFill>
+              </a:rPr>
+              <a:t>나</a:t>
+            </a:r>
+            <a:endParaRPr lang="en-US" sz="2200" dirty="0"/>
+          </a:p>
+        </p:txBody>
+      </p:sp>
+      <p:sp>
+        <p:nvSpPr>
+          <p:cNvPr id="9" name="Bubble jp 2"/>
+          <p:cNvSpPr txBox="1"/>
+          <p:nvPr/>
+        </p:nvSpPr>
+        <p:spPr>
+          <a:xfrm>
+            <a:off x="3337560" y="2697480"/>
+            <a:ext cx="8046720" cy="502920"/>
+          </a:xfrm>
+          <a:prstGeom prst="rect">
+            <a:avLst/>
+          </a:prstGeom>
+          <a:noFill/>
+          <a:ln/>
+        </p:spPr>
+        <p:txBody>
+          <a:bodyPr wrap="square" lIns="0" tIns="0" rIns="0" bIns="0" rtlCol="0" anchor="ctr"/>
+          <a:lstStyle/>
+          <a:p>
+            <a:pPr indent="0" marL="0">
+              <a:buNone/>
+            </a:pPr>
+            <a:r>
+              <a:rPr lang="en-US" sz="2400" b="1" dirty="0">
+                <a:solidFill>
+                  <a:schemeClr val="tx1"/>
+                </a:solidFill>
+                <a:latin typeface="Meiryo" pitchFamily="34" charset="0"/>
+                <a:ea typeface="Meiryo" pitchFamily="34" charset="-122"/>
+                <a:cs typeface="Meiryo" pitchFamily="34" charset="-120"/>
+              </a:rPr>
+              <a:t>大阪（おおさか）で たこやきを 食（た）べたいです。</a:t>
+            </a:r>
+            <a:endParaRPr lang="en-US" sz="2400" dirty="0"/>
+          </a:p>
+        </p:txBody>
+      </p:sp>
+      <p:sp>
+        <p:nvSpPr>
+          <p:cNvPr id="10" name="Bubble ko 2"/>
+          <p:cNvSpPr txBox="1"/>
+          <p:nvPr/>
+        </p:nvSpPr>
+        <p:spPr>
+          <a:xfrm>
+            <a:off x="3337560" y="3172968"/>
+            <a:ext cx="8046720" cy="365760"/>
+          </a:xfrm>
+          <a:prstGeom prst="rect">
+            <a:avLst/>
+          </a:prstGeom>
+          <a:noFill/>
+          <a:ln/>
+        </p:spPr>
+        <p:txBody>
+          <a:bodyPr wrap="square" lIns="0" tIns="0" rIns="0" bIns="0" rtlCol="0" anchor="ctr"/>
+          <a:lstStyle/>
+          <a:p>
+            <a:pPr indent="0" marL="0">
+              <a:buNone/>
+            </a:pPr>
+            <a:r>
+              <a:rPr lang="en-US" sz="1800" dirty="0">
+                <a:solidFill>
+                  <a:schemeClr val="accent5"/>
+                </a:solidFill>
+              </a:rPr>
+              <a:t>오사카에서 다코야키를 먹고 싶습니다.</a:t>
+            </a:r>
+            <a:endParaRPr lang="en-US" sz="1800" dirty="0"/>
+          </a:p>
+        </p:txBody>
+      </p:sp>
+      <p:sp>
+        <p:nvSpPr>
+          <p:cNvPr id="11" name="Bubble 3"/>
+          <p:cNvSpPr/>
+          <p:nvPr/>
+        </p:nvSpPr>
+        <p:spPr>
+          <a:xfrm>
+            <a:off x="548640" y="3739896"/>
+            <a:ext cx="9692640" cy="987552"/>
+          </a:xfrm>
+          <a:prstGeom prst="roundRect">
+            <a:avLst>
+              <a:gd name="adj" fmla="val 13889"/>
+            </a:avLst>
+          </a:prstGeom>
+          <a:solidFill>
+            <a:schemeClr val="bg2"/>
+          </a:solidFill>
+          <a:ln/>
+        </p:spPr>
+      </p:sp>
+      <p:sp>
+        <p:nvSpPr>
+          <p:cNvPr id="12" name="Speaker 3"/>
+          <p:cNvSpPr txBox="1"/>
+          <p:nvPr/>
+        </p:nvSpPr>
+        <p:spPr>
+          <a:xfrm>
+            <a:off x="777240" y="3739896"/>
+            <a:ext cx="1188720" cy="987552"/>
+          </a:xfrm>
+          <a:prstGeom prst="rect">
+            <a:avLst/>
+          </a:prstGeom>
+          <a:noFill/>
+          <a:ln/>
+        </p:spPr>
+        <p:txBody>
+          <a:bodyPr wrap="square" lIns="0" tIns="0" rIns="0" bIns="0" rtlCol="0" anchor="ctr"/>
+          <a:lstStyle/>
+          <a:p>
+            <a:pPr indent="0" marL="0">
+              <a:buNone/>
+            </a:pPr>
+            <a:r>
+              <a:rPr lang="en-US" sz="2200" b="1" dirty="0">
+                <a:solidFill>
+                  <a:schemeClr val="tx2"/>
+                </a:solidFill>
+              </a:rPr>
+              <a:t>선생님</a:t>
+            </a:r>
+            <a:endParaRPr lang="en-US" sz="2200" dirty="0"/>
+          </a:p>
+        </p:txBody>
+      </p:sp>
+      <p:sp>
+        <p:nvSpPr>
+          <p:cNvPr id="13" name="Bubble jp 3"/>
+          <p:cNvSpPr txBox="1"/>
+          <p:nvPr/>
+        </p:nvSpPr>
+        <p:spPr>
+          <a:xfrm>
+            <a:off x="1965960" y="3813048"/>
+            <a:ext cx="8046720" cy="502920"/>
+          </a:xfrm>
+          <a:prstGeom prst="rect">
+            <a:avLst/>
+          </a:prstGeom>
+          <a:noFill/>
+          <a:ln/>
+        </p:spPr>
+        <p:txBody>
+          <a:bodyPr wrap="square" lIns="0" tIns="0" rIns="0" bIns="0" rtlCol="0" anchor="ctr"/>
+          <a:lstStyle/>
+          <a:p>
+            <a:pPr indent="0" marL="0">
+              <a:buNone/>
+            </a:pPr>
+            <a:r>
+              <a:rPr lang="en-US" sz="2400" b="1" dirty="0">
+                <a:solidFill>
+                  <a:schemeClr val="tx1"/>
+                </a:solidFill>
+                <a:latin typeface="Meiryo" pitchFamily="34" charset="0"/>
+                <a:ea typeface="Meiryo" pitchFamily="34" charset="-122"/>
+                <a:cs typeface="Meiryo" pitchFamily="34" charset="-120"/>
+              </a:rPr>
+              <a:t>何（なに）を 買（か）いたいですか。</a:t>
+            </a:r>
+            <a:endParaRPr lang="en-US" sz="2400" dirty="0"/>
+          </a:p>
+        </p:txBody>
+      </p:sp>
+      <p:sp>
+        <p:nvSpPr>
+          <p:cNvPr id="14" name="Bubble ko 3"/>
+          <p:cNvSpPr txBox="1"/>
+          <p:nvPr/>
+        </p:nvSpPr>
+        <p:spPr>
+          <a:xfrm>
+            <a:off x="1965960" y="4288536"/>
+            <a:ext cx="8046720" cy="365760"/>
+          </a:xfrm>
+          <a:prstGeom prst="rect">
+            <a:avLst/>
+          </a:prstGeom>
+          <a:noFill/>
+          <a:ln/>
+        </p:spPr>
+        <p:txBody>
+          <a:bodyPr wrap="square" lIns="0" tIns="0" rIns="0" bIns="0" rtlCol="0" anchor="ctr"/>
+          <a:lstStyle/>
+          <a:p>
+            <a:pPr indent="0" marL="0">
+              <a:buNone/>
+            </a:pPr>
+            <a:r>
+              <a:rPr lang="en-US" sz="1800" dirty="0">
+                <a:solidFill>
+                  <a:schemeClr val="accent5"/>
+                </a:solidFill>
+              </a:rPr>
+              <a:t>무엇을 사고 싶어요?</a:t>
+            </a:r>
+            <a:endParaRPr lang="en-US" sz="1800" dirty="0"/>
+          </a:p>
+        </p:txBody>
+      </p:sp>
+      <p:sp>
+        <p:nvSpPr>
+          <p:cNvPr id="15" name="Bubble 4"/>
+          <p:cNvSpPr/>
+          <p:nvPr/>
+        </p:nvSpPr>
+        <p:spPr>
+          <a:xfrm>
+            <a:off x="1920240" y="4855464"/>
+            <a:ext cx="9692640" cy="987552"/>
+          </a:xfrm>
+          <a:prstGeom prst="roundRect">
+            <a:avLst>
+              <a:gd name="adj" fmla="val 13889"/>
+            </a:avLst>
+          </a:prstGeom>
+          <a:solidFill>
+            <a:schemeClr val="accent6"/>
+          </a:solidFill>
+          <a:ln/>
+        </p:spPr>
+      </p:sp>
+      <p:sp>
+        <p:nvSpPr>
+          <p:cNvPr id="16" name="Speaker 4"/>
+          <p:cNvSpPr txBox="1"/>
+          <p:nvPr/>
+        </p:nvSpPr>
+        <p:spPr>
+          <a:xfrm>
+            <a:off x="2148840" y="4855464"/>
+            <a:ext cx="1188720" cy="987552"/>
+          </a:xfrm>
+          <a:prstGeom prst="rect">
+            <a:avLst/>
+          </a:prstGeom>
+          <a:noFill/>
+          <a:ln/>
+        </p:spPr>
+        <p:txBody>
+          <a:bodyPr wrap="square" lIns="0" tIns="0" rIns="0" bIns="0" rtlCol="0" anchor="ctr"/>
+          <a:lstStyle/>
+          <a:p>
+            <a:pPr indent="0" marL="0">
+              <a:buNone/>
+            </a:pPr>
+            <a:r>
+              <a:rPr lang="en-US" sz="2200" b="1" dirty="0">
+                <a:solidFill>
+                  <a:schemeClr val="accent1"/>
+                </a:solidFill>
+              </a:rPr>
+              <a:t>나</a:t>
+            </a:r>
+            <a:endParaRPr lang="en-US" sz="2200" dirty="0"/>
+          </a:p>
+        </p:txBody>
+      </p:sp>
+      <p:sp>
+        <p:nvSpPr>
+          <p:cNvPr id="17" name="Bubble jp 4"/>
+          <p:cNvSpPr txBox="1"/>
+          <p:nvPr/>
+        </p:nvSpPr>
+        <p:spPr>
+          <a:xfrm>
+            <a:off x="3337560" y="4928616"/>
+            <a:ext cx="8046720" cy="502920"/>
+          </a:xfrm>
+          <a:prstGeom prst="rect">
+            <a:avLst/>
+          </a:prstGeom>
+          <a:noFill/>
+          <a:ln/>
+        </p:spPr>
+        <p:txBody>
+          <a:bodyPr wrap="square" lIns="0" tIns="0" rIns="0" bIns="0" rtlCol="0" anchor="ctr"/>
+          <a:lstStyle/>
+          <a:p>
+            <a:pPr indent="0" marL="0">
+              <a:buNone/>
+            </a:pPr>
+            <a:r>
+              <a:rPr lang="en-US" sz="2400" b="1" dirty="0">
+                <a:solidFill>
+                  <a:schemeClr val="tx1"/>
+                </a:solidFill>
+                <a:latin typeface="Meiryo" pitchFamily="34" charset="0"/>
+                <a:ea typeface="Meiryo" pitchFamily="34" charset="-122"/>
+                <a:cs typeface="Meiryo" pitchFamily="34" charset="-120"/>
+              </a:rPr>
+              <a:t>おみやげを 買（か）いたいです。</a:t>
+            </a:r>
+            <a:endParaRPr lang="en-US" sz="2400" dirty="0"/>
+          </a:p>
+        </p:txBody>
+      </p:sp>
+      <p:sp>
+        <p:nvSpPr>
+          <p:cNvPr id="18" name="Bubble ko 4"/>
+          <p:cNvSpPr txBox="1"/>
+          <p:nvPr/>
+        </p:nvSpPr>
+        <p:spPr>
+          <a:xfrm>
+            <a:off x="3337560" y="5404104"/>
+            <a:ext cx="8046720" cy="365760"/>
+          </a:xfrm>
+          <a:prstGeom prst="rect">
+            <a:avLst/>
+          </a:prstGeom>
+          <a:noFill/>
+          <a:ln/>
+        </p:spPr>
+        <p:txBody>
+          <a:bodyPr wrap="square" lIns="0" tIns="0" rIns="0" bIns="0" rtlCol="0" anchor="ctr"/>
+          <a:lstStyle/>
+          <a:p>
+            <a:pPr indent="0" marL="0">
+              <a:buNone/>
+            </a:pPr>
+            <a:r>
+              <a:rPr lang="en-US" sz="1800" dirty="0">
+                <a:solidFill>
+                  <a:schemeClr val="accent5"/>
+                </a:solidFill>
+              </a:rPr>
+              <a:t>기념품을 사고 싶습니다.</a:t>
+            </a:r>
+            <a:endParaRPr lang="en-US" sz="1800" dirty="0"/>
+          </a:p>
+        </p:txBody>
+      </p:sp>
+      <p:sp>
+        <p:nvSpPr>
+          <p:cNvPr id="19" name="Interview note"/>
+          <p:cNvSpPr txBox="1"/>
+          <p:nvPr/>
+        </p:nvSpPr>
+        <p:spPr>
+          <a:xfrm>
+            <a:off x="548640" y="6035040"/>
+            <a:ext cx="10332720" cy="411480"/>
+          </a:xfrm>
+          <a:prstGeom prst="rect">
+            <a:avLst/>
+          </a:prstGeom>
+          <a:noFill/>
+          <a:ln/>
+        </p:spPr>
+        <p:txBody>
+          <a:bodyPr wrap="square" lIns="0" tIns="0" rIns="0" bIns="0" rtlCol="0" anchor="ctr"/>
+          <a:lstStyle/>
+          <a:p>
+            <a:pPr indent="0" marL="0">
+              <a:buNone/>
+            </a:pPr>
+            <a:r>
+              <a:rPr lang="en-US" sz="2000" dirty="0">
+                <a:solidFill>
+                  <a:schemeClr val="accent5"/>
+                </a:solidFill>
+              </a:rPr>
+              <a:t>※ 예시 대화예요. 실제 질문은 달라질 수 있어요</a:t>
+            </a:r>
+            <a:endParaRPr lang="en-US" sz="2000" dirty="0"/>
+          </a:p>
+        </p:txBody>
+      </p:sp>
+      <p:sp>
+        <p:nvSpPr>
+          <p:cNvPr id="25" name="Slide Number Placeholder 0"/>
+          <p:cNvSpPr>
+            <a:spLocks noGrp="1"/>
+          </p:cNvSpPr>
           <p:nvPr>
-            <p:ph idx="101" type="body" hasCustomPrompt="1"/>
+            <p:ph type="sldNum" sz="quarter" idx="4294967295"/>
           </p:nvPr>
         </p:nvSpPr>
         <p:spPr>
           <a:xfrm>
-            <a:off x="731520" y="3749040"/>
-            <a:ext cx="10698480" cy="914400"/>
-          </a:xfrm>
-          <a:prstGeom prst="rect">
-            <a:avLst/>
-          </a:prstGeom>
-          <a:noFill/>
-          <a:ln/>
-        </p:spPr>
-        <p:txBody>
-          <a:bodyPr wrap="square" lIns="0" tIns="0" rIns="0" bIns="0" rtlCol="0" anchor="t"/>
-          <a:lstStyle/>
-          <a:p>
-            <a:pPr algn="l" indent="0" marL="0">
-              <a:buNone/>
-            </a:pPr>
-            <a:r>
-              <a:rPr lang="en-US" sz="3000" dirty="0">
-                <a:solidFill>
-                  <a:schemeClr val="accent3"/>
-                </a:solidFill>
-              </a:rPr>
-              <a:t>궁금한 점은 언제든지 선생님께 물어보세요</a:t>
-            </a:r>
-            <a:endParaRPr lang="en-US" sz="3000" dirty="0"/>
-          </a:p>
-        </p:txBody>
-      </p:sp>
-      <p:pic>
-        <p:nvPicPr>
-          <p:cNvPr id="4" name="Star" descr="preencoded.png">    </p:cNvPr>
-          <p:cNvPicPr>
-            <a:picLocks noChangeAspect="1"/>
-          </p:cNvPicPr>
-          <p:nvPr/>
-        </p:nvPicPr>
-        <p:blipFill>
-          <a:blip r:embed="rId1"/>
-          <a:stretch>
-            <a:fillRect/>
-          </a:stretch>
-        </p:blipFill>
-        <p:spPr>
-          <a:xfrm>
-            <a:off x="10058400" y="914400"/>
-            <a:ext cx="1280160" cy="1280160"/>
-          </a:xfrm>
-          <a:prstGeom prst="rect">
-            <a:avLst/>
-          </a:prstGeom>
-        </p:spPr>
-      </p:pic>
+            <a:off x="11247120" y="6355080"/>
+            <a:ext cx="548640" cy="320040"/>
+          </a:xfrm>
+          <a:prstGeom prst="rect">
+            <a:avLst/>
+          </a:prstGeom>
+          <a:extLst>
+            <a:ext uri="{C572A759-6A51-4108-AA02-DFA0A04FC94B}">
+              <ma14:wrappingTextBoxFlag xmlns:ma14="http://schemas.microsoft.com/office/mac/drawingml/2011/main" val="0"/>
+            </a:ext>
+          </a:extLst>
+        </p:spPr>
+        <p:txBody>
+          <a:bodyPr/>
+          <a:lstStyle>
+            <a:lvl1pPr>
+              <a:defRPr sz="1400">
+                <a:solidFill>
+                  <a:schemeClr val="accent5"/>
+                </a:solidFill>
+              </a:defRPr>
+            </a:lvl1pPr>
+          </a:lstStyle>
+          <a:p>
+            <a:pPr algn="r"/>
+            <a:fld id="{F7021451-1387-4CA6-816F-3879F97B5CBC}" type="slidenum">
+              <a:rPr b="0" lang="en-US"/>
+              <a:t>9</a:t>
+            </a:fld>
+            <a:endParaRPr lang="en-US"/>
+          </a:p>
+        </p:txBody>
+      </p:sp>
     </p:spTree>
   </p:cSld>
   <p:clrMapOvr>
